--- a/Planixor_Marketing.pptx
+++ b/Planixor_Marketing.pptx
@@ -13,17 +13,18 @@
     <p:sldId id="261" r:id="rId7"/>
     <p:sldId id="274" r:id="rId8"/>
     <p:sldId id="262" r:id="rId9"/>
-    <p:sldId id="263" r:id="rId10"/>
-    <p:sldId id="264" r:id="rId11"/>
-    <p:sldId id="265" r:id="rId12"/>
-    <p:sldId id="266" r:id="rId13"/>
-    <p:sldId id="267" r:id="rId14"/>
-    <p:sldId id="268" r:id="rId15"/>
-    <p:sldId id="269" r:id="rId16"/>
-    <p:sldId id="270" r:id="rId17"/>
-    <p:sldId id="271" r:id="rId18"/>
-    <p:sldId id="272" r:id="rId19"/>
-    <p:sldId id="273" r:id="rId20"/>
+    <p:sldId id="275" r:id="rId10"/>
+    <p:sldId id="263" r:id="rId11"/>
+    <p:sldId id="264" r:id="rId12"/>
+    <p:sldId id="265" r:id="rId13"/>
+    <p:sldId id="266" r:id="rId14"/>
+    <p:sldId id="267" r:id="rId15"/>
+    <p:sldId id="268" r:id="rId16"/>
+    <p:sldId id="269" r:id="rId17"/>
+    <p:sldId id="270" r:id="rId18"/>
+    <p:sldId id="271" r:id="rId19"/>
+    <p:sldId id="272" r:id="rId20"/>
+    <p:sldId id="273" r:id="rId21"/>
   </p:sldIdLst>
   <p:sldSz cx="12192000" cy="6858000"/>
   <p:notesSz cx="6858000" cy="9144000"/>
@@ -320,7 +321,7 @@
           <a:p>
             <a:fld id="{5BCAD085-E8A6-8845-BD4E-CB4CCA059FC4}" type="datetimeFigureOut">
               <a:rPr lang="en-US" smtClean="0"/>
-              <a:t>7/3/2026</a:t>
+              <a:t>7/4/2026</a:t>
             </a:fld>
             <a:endParaRPr lang="en-US"/>
           </a:p>
@@ -488,7 +489,7 @@
           <a:p>
             <a:fld id="{5BCAD085-E8A6-8845-BD4E-CB4CCA059FC4}" type="datetimeFigureOut">
               <a:rPr lang="en-US" smtClean="0"/>
-              <a:t>7/3/2026</a:t>
+              <a:t>7/4/2026</a:t>
             </a:fld>
             <a:endParaRPr lang="en-US"/>
           </a:p>
@@ -666,7 +667,7 @@
           <a:p>
             <a:fld id="{5BCAD085-E8A6-8845-BD4E-CB4CCA059FC4}" type="datetimeFigureOut">
               <a:rPr lang="en-US" smtClean="0"/>
-              <a:t>7/3/2026</a:t>
+              <a:t>7/4/2026</a:t>
             </a:fld>
             <a:endParaRPr lang="en-US"/>
           </a:p>
@@ -834,7 +835,7 @@
           <a:p>
             <a:fld id="{5BCAD085-E8A6-8845-BD4E-CB4CCA059FC4}" type="datetimeFigureOut">
               <a:rPr lang="en-US" smtClean="0"/>
-              <a:t>7/3/2026</a:t>
+              <a:t>7/4/2026</a:t>
             </a:fld>
             <a:endParaRPr lang="en-US"/>
           </a:p>
@@ -1079,7 +1080,7 @@
           <a:p>
             <a:fld id="{5BCAD085-E8A6-8845-BD4E-CB4CCA059FC4}" type="datetimeFigureOut">
               <a:rPr lang="en-US" smtClean="0"/>
-              <a:t>7/3/2026</a:t>
+              <a:t>7/4/2026</a:t>
             </a:fld>
             <a:endParaRPr lang="en-US"/>
           </a:p>
@@ -1364,7 +1365,7 @@
           <a:p>
             <a:fld id="{5BCAD085-E8A6-8845-BD4E-CB4CCA059FC4}" type="datetimeFigureOut">
               <a:rPr lang="en-US" smtClean="0"/>
-              <a:t>7/3/2026</a:t>
+              <a:t>7/4/2026</a:t>
             </a:fld>
             <a:endParaRPr lang="en-US"/>
           </a:p>
@@ -1783,7 +1784,7 @@
           <a:p>
             <a:fld id="{5BCAD085-E8A6-8845-BD4E-CB4CCA059FC4}" type="datetimeFigureOut">
               <a:rPr lang="en-US" smtClean="0"/>
-              <a:t>7/3/2026</a:t>
+              <a:t>7/4/2026</a:t>
             </a:fld>
             <a:endParaRPr lang="en-US"/>
           </a:p>
@@ -1900,7 +1901,7 @@
           <a:p>
             <a:fld id="{5BCAD085-E8A6-8845-BD4E-CB4CCA059FC4}" type="datetimeFigureOut">
               <a:rPr lang="en-US" smtClean="0"/>
-              <a:t>7/3/2026</a:t>
+              <a:t>7/4/2026</a:t>
             </a:fld>
             <a:endParaRPr lang="en-US"/>
           </a:p>
@@ -1995,7 +1996,7 @@
           <a:p>
             <a:fld id="{5BCAD085-E8A6-8845-BD4E-CB4CCA059FC4}" type="datetimeFigureOut">
               <a:rPr lang="en-US" smtClean="0"/>
-              <a:t>7/3/2026</a:t>
+              <a:t>7/4/2026</a:t>
             </a:fld>
             <a:endParaRPr lang="en-US"/>
           </a:p>
@@ -2270,7 +2271,7 @@
           <a:p>
             <a:fld id="{5BCAD085-E8A6-8845-BD4E-CB4CCA059FC4}" type="datetimeFigureOut">
               <a:rPr lang="en-US" smtClean="0"/>
-              <a:t>7/3/2026</a:t>
+              <a:t>7/4/2026</a:t>
             </a:fld>
             <a:endParaRPr lang="en-US"/>
           </a:p>
@@ -2522,7 +2523,7 @@
           <a:p>
             <a:fld id="{5BCAD085-E8A6-8845-BD4E-CB4CCA059FC4}" type="datetimeFigureOut">
               <a:rPr lang="en-US" smtClean="0"/>
-              <a:t>7/3/2026</a:t>
+              <a:t>7/4/2026</a:t>
             </a:fld>
             <a:endParaRPr lang="en-US"/>
           </a:p>
@@ -2733,7 +2734,7 @@
           <a:p>
             <a:fld id="{5BCAD085-E8A6-8845-BD4E-CB4CCA059FC4}" type="datetimeFigureOut">
               <a:rPr lang="en-US" smtClean="0"/>
-              <a:t>7/3/2026</a:t>
+              <a:t>7/4/2026</a:t>
             </a:fld>
             <a:endParaRPr lang="en-US"/>
           </a:p>
@@ -3405,7 +3406,7 @@
             <a:avLst/>
           </a:prstGeom>
           <a:solidFill>
-            <a:srgbClr val="2563EB"/>
+            <a:srgbClr val="0B86D4"/>
           </a:solidFill>
           <a:ln>
             <a:noFill/>
@@ -3465,7 +3466,7 @@
               </a:defRPr>
             </a:pPr>
             <a:r>
-              <a:t>Sincronizacion: Tu Servidor, Tus Reglas</a:t>
+              <a:t>Offline-First: Privacidad por Diseno</a:t>
             </a:r>
           </a:p>
         </p:txBody>
@@ -3478,7 +3479,7 @@
         </p:nvSpPr>
         <p:spPr>
           <a:xfrm>
-            <a:off x="731520" y="1280160"/>
+            <a:off x="731520" y="1371600"/>
             <a:ext cx="10058400" cy="914400"/>
           </a:xfrm>
           <a:prstGeom prst="rect">
@@ -3493,15 +3494,15 @@
           <a:lstStyle/>
           <a:p>
             <a:pPr algn="l">
-              <a:defRPr sz="1800" b="0">
-                <a:solidFill>
-                  <a:srgbClr val="9CA3AF"/>
-                </a:solidFill>
-                <a:latin typeface="Calibri"/>
-              </a:defRPr>
-            </a:pPr>
-            <a:r>
-              <a:t>Sincronizacion bidireccional opcional con tu propio backend auto-hospedado. Sin terceros, sin suscripciones cloud.</a:t>
+              <a:defRPr sz="2000" b="0">
+                <a:solidFill>
+                  <a:srgbClr val="F9FAFB"/>
+                </a:solidFill>
+                <a:latin typeface="Calibri"/>
+              </a:defRPr>
+            </a:pPr>
+            <a:r>
+              <a:t>Planixor funciona completamente sin internet. Tus datos nunca salen de tu dispositivo a menos que tu lo decidas.</a:t>
             </a:r>
           </a:p>
         </p:txBody>
@@ -3514,8 +3515,8 @@
         </p:nvSpPr>
         <p:spPr>
           <a:xfrm>
-            <a:off x="731520" y="2286000"/>
-            <a:ext cx="10058400" cy="4114800"/>
+            <a:off x="731520" y="2560320"/>
+            <a:ext cx="4572000" cy="457200"/>
           </a:xfrm>
           <a:prstGeom prst="rect">
             <a:avLst/>
@@ -3528,167 +3529,30 @@
           </a:bodyPr>
           <a:lstStyle/>
           <a:p>
-            <a:pPr>
-              <a:spcAft>
-                <a:spcPts val="800"/>
-              </a:spcAft>
-              <a:defRPr sz="1600">
-                <a:solidFill>
-                  <a:srgbClr val="F9FAFB"/>
-                </a:solidFill>
-                <a:latin typeface="Calibri"/>
-              </a:defRPr>
-            </a:pPr>
-            <a:r>
-              <a:t>Sincronizacion bidireccional: push + pull en cada ciclo</a:t>
-            </a:r>
-          </a:p>
-          <a:p>
-            <a:pPr>
-              <a:spcAft>
-                <a:spcPts val="800"/>
-              </a:spcAft>
-              <a:defRPr sz="1600">
-                <a:solidFill>
-                  <a:srgbClr val="F9FAFB"/>
-                </a:solidFill>
-                <a:latin typeface="Calibri"/>
-              </a:defRPr>
-            </a:pPr>
-            <a:r>
-              <a:t>Intervalo configurable: 5, 10, 15, 20, 25, 30, 45 o 60 minutos</a:t>
-            </a:r>
-          </a:p>
-          <a:p>
-            <a:pPr>
-              <a:spcAft>
-                <a:spcPts val="800"/>
-              </a:spcAft>
-              <a:defRPr sz="1600">
-                <a:solidFill>
-                  <a:srgbClr val="F9FAFB"/>
-                </a:solidFill>
-                <a:latin typeface="Calibri"/>
-              </a:defRPr>
-            </a:pPr>
-            <a:r>
-              <a:t>Sync automatico al abrir la app y al cerrarla</a:t>
-            </a:r>
-          </a:p>
-          <a:p>
-            <a:pPr>
-              <a:spcAft>
-                <a:spcPts val="800"/>
-              </a:spcAft>
-              <a:defRPr sz="1600">
-                <a:solidFill>
-                  <a:srgbClr val="F9FAFB"/>
-                </a:solidFill>
-                <a:latin typeface="Calibri"/>
-              </a:defRPr>
-            </a:pPr>
-            <a:r>
-              <a:t>Deteccion inteligente de conectividad</a:t>
-            </a:r>
-          </a:p>
-          <a:p>
-            <a:pPr>
-              <a:spcAft>
-                <a:spcPts val="800"/>
-              </a:spcAft>
-              <a:defRPr sz="1600">
-                <a:solidFill>
-                  <a:srgbClr val="F9FAFB"/>
-                </a:solidFill>
-                <a:latin typeface="Calibri"/>
-              </a:defRPr>
-            </a:pPr>
-            <a:r>
-              <a:t>Sync manual disponible en cualquier momento</a:t>
-            </a:r>
-          </a:p>
-          <a:p>
-            <a:pPr>
-              <a:spcAft>
-                <a:spcPts val="800"/>
-              </a:spcAft>
-              <a:defRPr sz="1600">
-                <a:solidFill>
-                  <a:srgbClr val="F9FAFB"/>
-                </a:solidFill>
-                <a:latin typeface="Calibri"/>
-              </a:defRPr>
-            </a:pPr>
-            <a:r>
-              <a:t>Resolucion de conflictos: Last-Writer-Wins (LWW)</a:t>
-            </a:r>
-          </a:p>
-          <a:p>
-            <a:pPr>
-              <a:spcAft>
-                <a:spcPts val="800"/>
-              </a:spcAft>
-              <a:defRPr sz="1600">
-                <a:solidFill>
-                  <a:srgbClr val="F9FAFB"/>
-                </a:solidFill>
-                <a:latin typeface="Calibri"/>
-              </a:defRPr>
-            </a:pPr>
-            <a:r>
-              <a:t>Indicador de estado en tiempo real (Activo/Fallando/Pausado)</a:t>
-            </a:r>
-          </a:p>
-          <a:p>
-            <a:pPr>
-              <a:spcAft>
-                <a:spcPts val="800"/>
-              </a:spcAft>
-              <a:defRPr sz="1600">
-                <a:solidFill>
-                  <a:srgbClr val="F9FAFB"/>
-                </a:solidFill>
-                <a:latin typeface="Calibri"/>
-              </a:defRPr>
-            </a:pPr>
-            <a:r>
-              <a:t>Backend desplegable con Docker en minutos</a:t>
-            </a:r>
-          </a:p>
-          <a:p>
-            <a:pPr>
-              <a:spcAft>
-                <a:spcPts val="800"/>
-              </a:spcAft>
-              <a:defRPr sz="1600">
-                <a:solidFill>
-                  <a:srgbClr val="F9FAFB"/>
-                </a:solidFill>
-                <a:latin typeface="Calibri"/>
-              </a:defRPr>
-            </a:pPr>
-            <a:r>
-              <a:t>API key como unica autenticacion (simple y seguro)</a:t>
-            </a:r>
-          </a:p>
-        </p:txBody>
-      </p:sp>
-      <p:sp>
-        <p:nvSpPr>
-          <p:cNvPr id="6" name="CuadroTexto 5">
-            <a:extLst>
-              <a:ext uri="{FF2B5EF4-FFF2-40B4-BE49-F238E27FC236}">
-                <a16:creationId xmlns:a16="http://schemas.microsoft.com/office/drawing/2014/main" id="{BE8F6630-22B8-2BF1-78FD-7265A5A741B8}"/>
-              </a:ext>
-            </a:extLst>
-          </p:cNvPr>
+            <a:pPr algn="l">
+              <a:defRPr sz="2000" b="1">
+                <a:solidFill>
+                  <a:srgbClr val="0B86D4"/>
+                </a:solidFill>
+                <a:latin typeface="Calibri"/>
+              </a:defRPr>
+            </a:pPr>
+            <a:r>
+              <a:t>Como funciona</a:t>
+            </a:r>
+          </a:p>
+        </p:txBody>
+      </p:sp>
+      <p:sp>
+        <p:nvSpPr>
+          <p:cNvPr id="6" name="TextBox 5"/>
           <p:cNvSpPr txBox="1"/>
           <p:nvPr/>
         </p:nvSpPr>
         <p:spPr>
           <a:xfrm>
-            <a:off x="7565161" y="2689894"/>
-            <a:ext cx="3224759" cy="2646878"/>
+            <a:off x="731520" y="3108960"/>
+            <a:ext cx="5029200" cy="3200400"/>
           </a:xfrm>
           <a:prstGeom prst="rect">
             <a:avLst/>
@@ -3696,14 +3560,227 @@
           <a:noFill/>
         </p:spPr>
         <p:txBody>
-          <a:bodyPr wrap="square" rtlCol="0">
+          <a:bodyPr wrap="square">
             <a:spAutoFit/>
           </a:bodyPr>
           <a:lstStyle/>
           <a:p>
-            <a:r>
-              <a:rPr lang="es-ES" sz="16600" dirty="0"/>
-              <a:t>🔄️</a:t>
+            <a:pPr>
+              <a:spcAft>
+                <a:spcPts val="800"/>
+              </a:spcAft>
+              <a:defRPr sz="1500">
+                <a:solidFill>
+                  <a:srgbClr val="F9FAFB"/>
+                </a:solidFill>
+                <a:latin typeface="Calibri"/>
+              </a:defRPr>
+            </a:pPr>
+            <a:r>
+              <a:t>Web: datos en IndexedDB (navegador)</a:t>
+            </a:r>
+          </a:p>
+          <a:p>
+            <a:pPr>
+              <a:spcAft>
+                <a:spcPts val="800"/>
+              </a:spcAft>
+              <a:defRPr sz="1500">
+                <a:solidFill>
+                  <a:srgbClr val="F9FAFB"/>
+                </a:solidFill>
+                <a:latin typeface="Calibri"/>
+              </a:defRPr>
+            </a:pPr>
+            <a:r>
+              <a:t>Android: datos en SQLite (dispositivo)</a:t>
+            </a:r>
+          </a:p>
+          <a:p>
+            <a:pPr>
+              <a:spcAft>
+                <a:spcPts val="800"/>
+              </a:spcAft>
+              <a:defRPr sz="1500">
+                <a:solidFill>
+                  <a:srgbClr val="F9FAFB"/>
+                </a:solidFill>
+                <a:latin typeface="Calibri"/>
+              </a:defRPr>
+            </a:pPr>
+            <a:r>
+              <a:t>Sin cuenta, sin registro, sin servidor</a:t>
+            </a:r>
+          </a:p>
+          <a:p>
+            <a:pPr>
+              <a:spcAft>
+                <a:spcPts val="800"/>
+              </a:spcAft>
+              <a:defRPr sz="1500">
+                <a:solidFill>
+                  <a:srgbClr val="F9FAFB"/>
+                </a:solidFill>
+                <a:latin typeface="Calibri"/>
+              </a:defRPr>
+            </a:pPr>
+            <a:r>
+              <a:t>Funcionalidad completa sin conexion</a:t>
+            </a:r>
+          </a:p>
+          <a:p>
+            <a:pPr>
+              <a:spcAft>
+                <a:spcPts val="800"/>
+              </a:spcAft>
+              <a:defRPr sz="1500">
+                <a:solidFill>
+                  <a:srgbClr val="F9FAFB"/>
+                </a:solidFill>
+                <a:latin typeface="Calibri"/>
+              </a:defRPr>
+            </a:pPr>
+            <a:r>
+              <a:t>Tus datos = solo tuyos</a:t>
+            </a:r>
+          </a:p>
+        </p:txBody>
+      </p:sp>
+      <p:sp>
+        <p:nvSpPr>
+          <p:cNvPr id="7" name="TextBox 6"/>
+          <p:cNvSpPr txBox="1"/>
+          <p:nvPr/>
+        </p:nvSpPr>
+        <p:spPr>
+          <a:xfrm>
+            <a:off x="6400800" y="2560320"/>
+            <a:ext cx="4572000" cy="457200"/>
+          </a:xfrm>
+          <a:prstGeom prst="rect">
+            <a:avLst/>
+          </a:prstGeom>
+          <a:noFill/>
+        </p:spPr>
+        <p:txBody>
+          <a:bodyPr wrap="square">
+            <a:spAutoFit/>
+          </a:bodyPr>
+          <a:lstStyle/>
+          <a:p>
+            <a:pPr algn="l">
+              <a:defRPr sz="2000" b="1">
+                <a:solidFill>
+                  <a:srgbClr val="10B981"/>
+                </a:solidFill>
+                <a:latin typeface="Calibri"/>
+              </a:defRPr>
+            </a:pPr>
+            <a:r>
+              <a:t>Beneficios</a:t>
+            </a:r>
+          </a:p>
+        </p:txBody>
+      </p:sp>
+      <p:sp>
+        <p:nvSpPr>
+          <p:cNvPr id="8" name="TextBox 7"/>
+          <p:cNvSpPr txBox="1"/>
+          <p:nvPr/>
+        </p:nvSpPr>
+        <p:spPr>
+          <a:xfrm>
+            <a:off x="6400800" y="3108960"/>
+            <a:ext cx="5029200" cy="3200400"/>
+          </a:xfrm>
+          <a:prstGeom prst="rect">
+            <a:avLst/>
+          </a:prstGeom>
+          <a:noFill/>
+        </p:spPr>
+        <p:txBody>
+          <a:bodyPr wrap="square">
+            <a:spAutoFit/>
+          </a:bodyPr>
+          <a:lstStyle/>
+          <a:p>
+            <a:pPr>
+              <a:spcAft>
+                <a:spcPts val="800"/>
+              </a:spcAft>
+              <a:defRPr sz="1500">
+                <a:solidFill>
+                  <a:srgbClr val="F9FAFB"/>
+                </a:solidFill>
+                <a:latin typeface="Calibri"/>
+              </a:defRPr>
+            </a:pPr>
+            <a:r>
+              <a:t>Velocidad instantanea (sin latencia de red)</a:t>
+            </a:r>
+          </a:p>
+          <a:p>
+            <a:pPr>
+              <a:spcAft>
+                <a:spcPts val="800"/>
+              </a:spcAft>
+              <a:defRPr sz="1500">
+                <a:solidFill>
+                  <a:srgbClr val="F9FAFB"/>
+                </a:solidFill>
+                <a:latin typeface="Calibri"/>
+              </a:defRPr>
+            </a:pPr>
+            <a:r>
+              <a:t>Privacidad absoluta por defecto</a:t>
+            </a:r>
+          </a:p>
+          <a:p>
+            <a:pPr>
+              <a:spcAft>
+                <a:spcPts val="800"/>
+              </a:spcAft>
+              <a:defRPr sz="1500">
+                <a:solidFill>
+                  <a:srgbClr val="F9FAFB"/>
+                </a:solidFill>
+                <a:latin typeface="Calibri"/>
+              </a:defRPr>
+            </a:pPr>
+            <a:r>
+              <a:t>Funciona en aviones, metro, rural</a:t>
+            </a:r>
+          </a:p>
+          <a:p>
+            <a:pPr>
+              <a:spcAft>
+                <a:spcPts val="800"/>
+              </a:spcAft>
+              <a:defRPr sz="1500">
+                <a:solidFill>
+                  <a:srgbClr val="F9FAFB"/>
+                </a:solidFill>
+                <a:latin typeface="Calibri"/>
+              </a:defRPr>
+            </a:pPr>
+            <a:r>
+              <a:t>Sin costos de suscripcion de nube</a:t>
+            </a:r>
+          </a:p>
+          <a:p>
+            <a:pPr>
+              <a:spcAft>
+                <a:spcPts val="800"/>
+              </a:spcAft>
+              <a:defRPr sz="1500">
+                <a:solidFill>
+                  <a:srgbClr val="F9FAFB"/>
+                </a:solidFill>
+                <a:latin typeface="Calibri"/>
+              </a:defRPr>
+            </a:pPr>
+            <a:r>
+              <a:t>Cumplimiento GDPR simplificado</a:t>
             </a:r>
           </a:p>
         </p:txBody>
@@ -3756,7 +3833,7 @@
             <a:avLst/>
           </a:prstGeom>
           <a:solidFill>
-            <a:srgbClr val="10B981"/>
+            <a:srgbClr val="2563EB"/>
           </a:solidFill>
           <a:ln>
             <a:noFill/>
@@ -3816,7 +3893,7 @@
               </a:defRPr>
             </a:pPr>
             <a:r>
-              <a:t>Backups: Tu Informacion Siempre Segura</a:t>
+              <a:t>Sincronizacion: Tu Servidor, Tus Reglas</a:t>
             </a:r>
           </a:p>
         </p:txBody>
@@ -3830,7 +3907,7 @@
         <p:spPr>
           <a:xfrm>
             <a:off x="731520" y="1280160"/>
-            <a:ext cx="10058400" cy="731520"/>
+            <a:ext cx="10058400" cy="914400"/>
           </a:xfrm>
           <a:prstGeom prst="rect">
             <a:avLst/>
@@ -3852,7 +3929,7 @@
               </a:defRPr>
             </a:pPr>
             <a:r>
-              <a:t>Exporta e importa todos tus datos sin depender de ningun servidor</a:t>
+              <a:t>Sincronizacion bidireccional opcional con tu propio backend auto-hospedado. Sin terceros, sin suscripciones cloud.</a:t>
             </a:r>
           </a:p>
         </p:txBody>
@@ -3865,7 +3942,7 @@
         </p:nvSpPr>
         <p:spPr>
           <a:xfrm>
-            <a:off x="731520" y="2103120"/>
+            <a:off x="731520" y="2286000"/>
             <a:ext cx="10058400" cy="4114800"/>
           </a:xfrm>
           <a:prstGeom prst="rect">
@@ -3891,7 +3968,7 @@
               </a:defRPr>
             </a:pPr>
             <a:r>
-              <a:t>Exportacion completa a archivo .bak (formato JSON portable)</a:t>
+              <a:t>Sincronizacion bidireccional: push + pull en cada ciclo</a:t>
             </a:r>
           </a:p>
           <a:p>
@@ -3907,7 +3984,7 @@
               </a:defRPr>
             </a:pPr>
             <a:r>
-              <a:t>Incluye: eventos, turnos, recordatorios, notificaciones, configuracion</a:t>
+              <a:t>Intervalo configurable: 5, 10, 15, 20, 25, 30, 45 o 60 minutos</a:t>
             </a:r>
           </a:p>
           <a:p>
@@ -3923,7 +4000,7 @@
               </a:defRPr>
             </a:pPr>
             <a:r>
-              <a:t>Restauracion con merge inteligente (Last-Writer-Wins)</a:t>
+              <a:t>Sync automatico al abrir la app y al cerrarla</a:t>
             </a:r>
           </a:p>
           <a:p>
@@ -3939,7 +4016,7 @@
               </a:defRPr>
             </a:pPr>
             <a:r>
-              <a:t>Cross-platform: crea en web, restaura en Android (y viceversa)</a:t>
+              <a:t>Deteccion inteligente de conectividad</a:t>
             </a:r>
           </a:p>
           <a:p>
@@ -3955,7 +4032,7 @@
               </a:defRPr>
             </a:pPr>
             <a:r>
-              <a:t>Sin backend necesario para backups</a:t>
+              <a:t>Sync manual disponible en cualquier momento</a:t>
             </a:r>
           </a:p>
           <a:p>
@@ -3971,7 +4048,7 @@
               </a:defRPr>
             </a:pPr>
             <a:r>
-              <a:t>Dialogo de confirmacion antes de sobrescribir datos existentes</a:t>
+              <a:t>Resolucion de conflictos: Last-Writer-Wins (LWW)</a:t>
             </a:r>
           </a:p>
           <a:p>
@@ -3987,7 +4064,39 @@
               </a:defRPr>
             </a:pPr>
             <a:r>
-              <a:t>Accesible desde Ajustes &gt; Backups</a:t>
+              <a:t>Indicador de estado en tiempo real (Activo/Fallando/Pausado)</a:t>
+            </a:r>
+          </a:p>
+          <a:p>
+            <a:pPr>
+              <a:spcAft>
+                <a:spcPts val="800"/>
+              </a:spcAft>
+              <a:defRPr sz="1600">
+                <a:solidFill>
+                  <a:srgbClr val="F9FAFB"/>
+                </a:solidFill>
+                <a:latin typeface="Calibri"/>
+              </a:defRPr>
+            </a:pPr>
+            <a:r>
+              <a:t>Backend desplegable con Docker en minutos</a:t>
+            </a:r>
+          </a:p>
+          <a:p>
+            <a:pPr>
+              <a:spcAft>
+                <a:spcPts val="800"/>
+              </a:spcAft>
+              <a:defRPr sz="1600">
+                <a:solidFill>
+                  <a:srgbClr val="F9FAFB"/>
+                </a:solidFill>
+                <a:latin typeface="Calibri"/>
+              </a:defRPr>
+            </a:pPr>
+            <a:r>
+              <a:t>API key como unica autenticacion (simple y seguro)</a:t>
             </a:r>
           </a:p>
         </p:txBody>
@@ -3997,7 +4106,7 @@
           <p:cNvPr id="6" name="CuadroTexto 5">
             <a:extLst>
               <a:ext uri="{FF2B5EF4-FFF2-40B4-BE49-F238E27FC236}">
-                <a16:creationId xmlns:a16="http://schemas.microsoft.com/office/drawing/2014/main" id="{42DB2274-427E-1EC9-0C79-C133B22C534E}"/>
+                <a16:creationId xmlns:a16="http://schemas.microsoft.com/office/drawing/2014/main" id="{BE8F6630-22B8-2BF1-78FD-7265A5A741B8}"/>
               </a:ext>
             </a:extLst>
           </p:cNvPr>
@@ -4006,8 +4115,8 @@
         </p:nvSpPr>
         <p:spPr>
           <a:xfrm>
-            <a:off x="7540378" y="2425012"/>
-            <a:ext cx="3106941" cy="2646878"/>
+            <a:off x="7565161" y="2689894"/>
+            <a:ext cx="3224759" cy="2646878"/>
           </a:xfrm>
           <a:prstGeom prst="rect">
             <a:avLst/>
@@ -4015,14 +4124,14 @@
           <a:noFill/>
         </p:spPr>
         <p:txBody>
-          <a:bodyPr wrap="none" rtlCol="0">
+          <a:bodyPr wrap="square" rtlCol="0">
             <a:spAutoFit/>
           </a:bodyPr>
           <a:lstStyle/>
           <a:p>
             <a:r>
               <a:rPr lang="es-ES" sz="16600" dirty="0"/>
-              <a:t>💾</a:t>
+              <a:t>🔄️</a:t>
             </a:r>
           </a:p>
         </p:txBody>
@@ -4075,7 +4184,7 @@
             <a:avLst/>
           </a:prstGeom>
           <a:solidFill>
-            <a:srgbClr val="7C3AED"/>
+            <a:srgbClr val="10B981"/>
           </a:solidFill>
           <a:ln>
             <a:noFill/>
@@ -4135,7 +4244,7 @@
               </a:defRPr>
             </a:pPr>
             <a:r>
-              <a:t>Multiplataforma: Web + Android</a:t>
+              <a:t>Backups: Tu Informacion Siempre Segura</a:t>
             </a:r>
           </a:p>
         </p:txBody>
@@ -4148,8 +4257,8 @@
         </p:nvSpPr>
         <p:spPr>
           <a:xfrm>
-            <a:off x="731520" y="1463040"/>
-            <a:ext cx="4572000" cy="457200"/>
+            <a:off x="731520" y="1280160"/>
+            <a:ext cx="10058400" cy="731520"/>
           </a:xfrm>
           <a:prstGeom prst="rect">
             <a:avLst/>
@@ -4163,15 +4272,15 @@
           <a:lstStyle/>
           <a:p>
             <a:pPr algn="l">
-              <a:defRPr sz="2200" b="1">
-                <a:solidFill>
-                  <a:srgbClr val="2563EB"/>
-                </a:solidFill>
-                <a:latin typeface="Calibri"/>
-              </a:defRPr>
-            </a:pPr>
-            <a:r>
-              <a:t>Web (PWA)</a:t>
+              <a:defRPr sz="1800" b="0">
+                <a:solidFill>
+                  <a:srgbClr val="9CA3AF"/>
+                </a:solidFill>
+                <a:latin typeface="Calibri"/>
+              </a:defRPr>
+            </a:pPr>
+            <a:r>
+              <a:t>Exporta e importa todos tus datos sin depender de ningun servidor</a:t>
             </a:r>
           </a:p>
         </p:txBody>
@@ -4184,8 +4293,8 @@
         </p:nvSpPr>
         <p:spPr>
           <a:xfrm>
-            <a:off x="731520" y="2011680"/>
-            <a:ext cx="5029200" cy="4114800"/>
+            <a:off x="731520" y="2103120"/>
+            <a:ext cx="10058400" cy="4114800"/>
           </a:xfrm>
           <a:prstGeom prst="rect">
             <a:avLst/>
@@ -4202,125 +4311,131 @@
               <a:spcAft>
                 <a:spcPts val="800"/>
               </a:spcAft>
-              <a:defRPr sz="1400">
-                <a:solidFill>
-                  <a:srgbClr val="F9FAFB"/>
-                </a:solidFill>
-                <a:latin typeface="Calibri"/>
-              </a:defRPr>
-            </a:pPr>
-            <a:r>
-              <a:t>Progressive Web App instalable</a:t>
-            </a:r>
-          </a:p>
-          <a:p>
-            <a:pPr>
-              <a:spcAft>
-                <a:spcPts val="800"/>
-              </a:spcAft>
-              <a:defRPr sz="1400">
-                <a:solidFill>
-                  <a:srgbClr val="F9FAFB"/>
-                </a:solidFill>
-                <a:latin typeface="Calibri"/>
-              </a:defRPr>
-            </a:pPr>
-            <a:r>
-              <a:t>React 19 + TypeScript + Vite</a:t>
-            </a:r>
-          </a:p>
-          <a:p>
-            <a:pPr>
-              <a:spcAft>
-                <a:spcPts val="800"/>
-              </a:spcAft>
-              <a:defRPr sz="1400">
-                <a:solidFill>
-                  <a:srgbClr val="F9FAFB"/>
-                </a:solidFill>
-                <a:latin typeface="Calibri"/>
-              </a:defRPr>
-            </a:pPr>
-            <a:r>
-              <a:t>Funciona en cualquier navegador moderno</a:t>
-            </a:r>
-          </a:p>
-          <a:p>
-            <a:pPr>
-              <a:spcAft>
-                <a:spcPts val="800"/>
-              </a:spcAft>
-              <a:defRPr sz="1400">
-                <a:solidFill>
-                  <a:srgbClr val="F9FAFB"/>
-                </a:solidFill>
-                <a:latin typeface="Calibri"/>
-              </a:defRPr>
-            </a:pPr>
-            <a:r>
-              <a:t>Modo escritorio con sidebar de navegacion</a:t>
-            </a:r>
-          </a:p>
-          <a:p>
-            <a:pPr>
-              <a:spcAft>
-                <a:spcPts val="800"/>
-              </a:spcAft>
-              <a:defRPr sz="1400">
-                <a:solidFill>
-                  <a:srgbClr val="F9FAFB"/>
-                </a:solidFill>
-                <a:latin typeface="Calibri"/>
-              </a:defRPr>
-            </a:pPr>
-            <a:r>
-              <a:t>Modo movil con bottom navigation</a:t>
-            </a:r>
-          </a:p>
-          <a:p>
-            <a:pPr>
-              <a:spcAft>
-                <a:spcPts val="800"/>
-              </a:spcAft>
-              <a:defRPr sz="1400">
-                <a:solidFill>
-                  <a:srgbClr val="F9FAFB"/>
-                </a:solidFill>
-                <a:latin typeface="Calibri"/>
-              </a:defRPr>
-            </a:pPr>
-            <a:r>
-              <a:t>IndexedDB para almacenamiento persistente</a:t>
-            </a:r>
-          </a:p>
-          <a:p>
-            <a:pPr>
-              <a:spcAft>
-                <a:spcPts val="800"/>
-              </a:spcAft>
-              <a:defRPr sz="1400">
-                <a:solidFill>
-                  <a:srgbClr val="F9FAFB"/>
-                </a:solidFill>
-                <a:latin typeface="Calibri"/>
-              </a:defRPr>
-            </a:pPr>
-            <a:r>
-              <a:t>Tema claro/oscuro + bilingue ES/EN</a:t>
-            </a:r>
-          </a:p>
-        </p:txBody>
-      </p:sp>
-      <p:sp>
-        <p:nvSpPr>
-          <p:cNvPr id="6" name="TextBox 5"/>
+              <a:defRPr sz="1600">
+                <a:solidFill>
+                  <a:srgbClr val="F9FAFB"/>
+                </a:solidFill>
+                <a:latin typeface="Calibri"/>
+              </a:defRPr>
+            </a:pPr>
+            <a:r>
+              <a:t>Exportacion completa a archivo .bak (formato JSON portable)</a:t>
+            </a:r>
+          </a:p>
+          <a:p>
+            <a:pPr>
+              <a:spcAft>
+                <a:spcPts val="800"/>
+              </a:spcAft>
+              <a:defRPr sz="1600">
+                <a:solidFill>
+                  <a:srgbClr val="F9FAFB"/>
+                </a:solidFill>
+                <a:latin typeface="Calibri"/>
+              </a:defRPr>
+            </a:pPr>
+            <a:r>
+              <a:t>Incluye: eventos, turnos, recordatorios, notificaciones, configuracion</a:t>
+            </a:r>
+          </a:p>
+          <a:p>
+            <a:pPr>
+              <a:spcAft>
+                <a:spcPts val="800"/>
+              </a:spcAft>
+              <a:defRPr sz="1600">
+                <a:solidFill>
+                  <a:srgbClr val="F9FAFB"/>
+                </a:solidFill>
+                <a:latin typeface="Calibri"/>
+              </a:defRPr>
+            </a:pPr>
+            <a:r>
+              <a:t>Restauracion con merge inteligente (Last-Writer-Wins)</a:t>
+            </a:r>
+          </a:p>
+          <a:p>
+            <a:pPr>
+              <a:spcAft>
+                <a:spcPts val="800"/>
+              </a:spcAft>
+              <a:defRPr sz="1600">
+                <a:solidFill>
+                  <a:srgbClr val="F9FAFB"/>
+                </a:solidFill>
+                <a:latin typeface="Calibri"/>
+              </a:defRPr>
+            </a:pPr>
+            <a:r>
+              <a:t>Cross-platform: crea en web, restaura en Android (y viceversa)</a:t>
+            </a:r>
+          </a:p>
+          <a:p>
+            <a:pPr>
+              <a:spcAft>
+                <a:spcPts val="800"/>
+              </a:spcAft>
+              <a:defRPr sz="1600">
+                <a:solidFill>
+                  <a:srgbClr val="F9FAFB"/>
+                </a:solidFill>
+                <a:latin typeface="Calibri"/>
+              </a:defRPr>
+            </a:pPr>
+            <a:r>
+              <a:t>Sin backend necesario para backups</a:t>
+            </a:r>
+          </a:p>
+          <a:p>
+            <a:pPr>
+              <a:spcAft>
+                <a:spcPts val="800"/>
+              </a:spcAft>
+              <a:defRPr sz="1600">
+                <a:solidFill>
+                  <a:srgbClr val="F9FAFB"/>
+                </a:solidFill>
+                <a:latin typeface="Calibri"/>
+              </a:defRPr>
+            </a:pPr>
+            <a:r>
+              <a:t>Dialogo de confirmacion antes de sobrescribir datos existentes</a:t>
+            </a:r>
+          </a:p>
+          <a:p>
+            <a:pPr>
+              <a:spcAft>
+                <a:spcPts val="800"/>
+              </a:spcAft>
+              <a:defRPr sz="1600">
+                <a:solidFill>
+                  <a:srgbClr val="F9FAFB"/>
+                </a:solidFill>
+                <a:latin typeface="Calibri"/>
+              </a:defRPr>
+            </a:pPr>
+            <a:r>
+              <a:t>Accesible desde Ajustes &gt; Backups</a:t>
+            </a:r>
+          </a:p>
+        </p:txBody>
+      </p:sp>
+      <p:sp>
+        <p:nvSpPr>
+          <p:cNvPr id="6" name="CuadroTexto 5">
+            <a:extLst>
+              <a:ext uri="{FF2B5EF4-FFF2-40B4-BE49-F238E27FC236}">
+                <a16:creationId xmlns:a16="http://schemas.microsoft.com/office/drawing/2014/main" id="{42DB2274-427E-1EC9-0C79-C133B22C534E}"/>
+              </a:ext>
+            </a:extLst>
+          </p:cNvPr>
           <p:cNvSpPr txBox="1"/>
           <p:nvPr/>
         </p:nvSpPr>
         <p:spPr>
           <a:xfrm>
-            <a:off x="6400800" y="1463040"/>
-            <a:ext cx="4572000" cy="457200"/>
+            <a:off x="7540378" y="2425012"/>
+            <a:ext cx="3106941" cy="2646878"/>
           </a:xfrm>
           <a:prstGeom prst="rect">
             <a:avLst/>
@@ -4328,156 +4443,14 @@
           <a:noFill/>
         </p:spPr>
         <p:txBody>
-          <a:bodyPr wrap="square">
+          <a:bodyPr wrap="none" rtlCol="0">
             <a:spAutoFit/>
           </a:bodyPr>
           <a:lstStyle/>
           <a:p>
-            <a:pPr algn="l">
-              <a:defRPr sz="2200" b="1">
-                <a:solidFill>
-                  <a:srgbClr val="10B981"/>
-                </a:solidFill>
-                <a:latin typeface="Calibri"/>
-              </a:defRPr>
-            </a:pPr>
-            <a:r>
-              <a:t>Android Nativo</a:t>
-            </a:r>
-          </a:p>
-        </p:txBody>
-      </p:sp>
-      <p:sp>
-        <p:nvSpPr>
-          <p:cNvPr id="7" name="TextBox 6"/>
-          <p:cNvSpPr txBox="1"/>
-          <p:nvPr/>
-        </p:nvSpPr>
-        <p:spPr>
-          <a:xfrm>
-            <a:off x="6400800" y="2011680"/>
-            <a:ext cx="5029200" cy="4114800"/>
-          </a:xfrm>
-          <a:prstGeom prst="rect">
-            <a:avLst/>
-          </a:prstGeom>
-          <a:noFill/>
-        </p:spPr>
-        <p:txBody>
-          <a:bodyPr wrap="square">
-            <a:spAutoFit/>
-          </a:bodyPr>
-          <a:lstStyle/>
-          <a:p>
-            <a:pPr>
-              <a:spcAft>
-                <a:spcPts val="800"/>
-              </a:spcAft>
-              <a:defRPr sz="1400">
-                <a:solidFill>
-                  <a:srgbClr val="F9FAFB"/>
-                </a:solidFill>
-                <a:latin typeface="Calibri"/>
-              </a:defRPr>
-            </a:pPr>
-            <a:r>
-              <a:t>Kotlin + Jetpack Compose</a:t>
-            </a:r>
-          </a:p>
-          <a:p>
-            <a:pPr>
-              <a:spcAft>
-                <a:spcPts val="800"/>
-              </a:spcAft>
-              <a:defRPr sz="1400">
-                <a:solidFill>
-                  <a:srgbClr val="F9FAFB"/>
-                </a:solidFill>
-                <a:latin typeface="Calibri"/>
-              </a:defRPr>
-            </a:pPr>
-            <a:r>
-              <a:t>Material Design 3</a:t>
-            </a:r>
-          </a:p>
-          <a:p>
-            <a:pPr>
-              <a:spcAft>
-                <a:spcPts val="800"/>
-              </a:spcAft>
-              <a:defRPr sz="1400">
-                <a:solidFill>
-                  <a:srgbClr val="F9FAFB"/>
-                </a:solidFill>
-                <a:latin typeface="Calibri"/>
-              </a:defRPr>
-            </a:pPr>
-            <a:r>
-              <a:t>SQLite + Room para persistencia</a:t>
-            </a:r>
-          </a:p>
-          <a:p>
-            <a:pPr>
-              <a:spcAft>
-                <a:spcPts val="800"/>
-              </a:spcAft>
-              <a:defRPr sz="1400">
-                <a:solidFill>
-                  <a:srgbClr val="F9FAFB"/>
-                </a:solidFill>
-                <a:latin typeface="Calibri"/>
-              </a:defRPr>
-            </a:pPr>
-            <a:r>
-              <a:t>Icono adaptativo con gradiente de marca</a:t>
-            </a:r>
-          </a:p>
-          <a:p>
-            <a:pPr>
-              <a:spcAft>
-                <a:spcPts val="800"/>
-              </a:spcAft>
-              <a:defRPr sz="1400">
-                <a:solidFill>
-                  <a:srgbClr val="F9FAFB"/>
-                </a:solidFill>
-                <a:latin typeface="Calibri"/>
-              </a:defRPr>
-            </a:pPr>
-            <a:r>
-              <a:t>Notificaciones push del sistema</a:t>
-            </a:r>
-          </a:p>
-          <a:p>
-            <a:pPr>
-              <a:spcAft>
-                <a:spcPts val="800"/>
-              </a:spcAft>
-              <a:defRPr sz="1400">
-                <a:solidFill>
-                  <a:srgbClr val="F9FAFB"/>
-                </a:solidFill>
-                <a:latin typeface="Calibri"/>
-              </a:defRPr>
-            </a:pPr>
-            <a:r>
-              <a:t>Cambio de tema e idioma sin reinicio</a:t>
-            </a:r>
-          </a:p>
-          <a:p>
-            <a:pPr>
-              <a:spcAft>
-                <a:spcPts val="800"/>
-              </a:spcAft>
-              <a:defRPr sz="1400">
-                <a:solidFill>
-                  <a:srgbClr val="F9FAFB"/>
-                </a:solidFill>
-                <a:latin typeface="Calibri"/>
-              </a:defRPr>
-            </a:pPr>
-            <a:r>
-              <a:t>Bottom navigation con iconos</a:t>
+            <a:r>
+              <a:rPr lang="es-ES" sz="16600" dirty="0"/>
+              <a:t>💾</a:t>
             </a:r>
           </a:p>
         </p:txBody>
@@ -4530,7 +4503,7 @@
             <a:avLst/>
           </a:prstGeom>
           <a:solidFill>
-            <a:srgbClr val="2563EB"/>
+            <a:srgbClr val="7C3AED"/>
           </a:solidFill>
           <a:ln>
             <a:noFill/>
@@ -4590,7 +4563,7 @@
               </a:defRPr>
             </a:pPr>
             <a:r>
-              <a:t>Diseno Moderno y Accesible</a:t>
+              <a:t>Multiplataforma: Web + Android</a:t>
             </a:r>
           </a:p>
         </p:txBody>
@@ -4604,7 +4577,7 @@
         <p:spPr>
           <a:xfrm>
             <a:off x="731520" y="1463040"/>
-            <a:ext cx="10058400" cy="5029200"/>
+            <a:ext cx="4572000" cy="457200"/>
           </a:xfrm>
           <a:prstGeom prst="rect">
             <a:avLst/>
@@ -4617,227 +4590,326 @@
           </a:bodyPr>
           <a:lstStyle/>
           <a:p>
-            <a:pPr>
-              <a:spcAft>
-                <a:spcPts val="800"/>
-              </a:spcAft>
-              <a:defRPr sz="1600">
-                <a:solidFill>
-                  <a:srgbClr val="F9FAFB"/>
-                </a:solidFill>
-                <a:latin typeface="Calibri"/>
-              </a:defRPr>
-            </a:pPr>
-            <a:r>
-              <a:t>Interfaz limpia y minimalista — sin distracciones</a:t>
-            </a:r>
-          </a:p>
-          <a:p>
-            <a:pPr>
-              <a:spcAft>
-                <a:spcPts val="800"/>
-              </a:spcAft>
-              <a:defRPr sz="1600">
-                <a:solidFill>
-                  <a:srgbClr val="F9FAFB"/>
-                </a:solidFill>
-                <a:latin typeface="Calibri"/>
-              </a:defRPr>
-            </a:pPr>
-            <a:r>
-              <a:t>Tipografia Poppins para maxima legibilidad</a:t>
-            </a:r>
-          </a:p>
-          <a:p>
-            <a:pPr>
-              <a:spcAft>
-                <a:spcPts val="800"/>
-              </a:spcAft>
-              <a:defRPr sz="1600">
-                <a:solidFill>
-                  <a:srgbClr val="F9FAFB"/>
-                </a:solidFill>
-                <a:latin typeface="Calibri"/>
-              </a:defRPr>
-            </a:pPr>
-            <a:r>
-              <a:t>Tema claro y oscuro (cambia al instante, sin reinicio)</a:t>
-            </a:r>
-          </a:p>
-          <a:p>
-            <a:pPr>
-              <a:spcAft>
-                <a:spcPts val="800"/>
-              </a:spcAft>
-              <a:defRPr sz="1600">
-                <a:solidFill>
-                  <a:srgbClr val="F9FAFB"/>
-                </a:solidFill>
-                <a:latin typeface="Calibri"/>
-              </a:defRPr>
-            </a:pPr>
-            <a:r>
-              <a:t>Paleta de colores consistente en ambas plataformas</a:t>
-            </a:r>
-          </a:p>
-          <a:p>
-            <a:pPr>
-              <a:spcAft>
-                <a:spcPts val="800"/>
-              </a:spcAft>
-              <a:defRPr sz="1600">
-                <a:solidFill>
-                  <a:srgbClr val="F9FAFB"/>
-                </a:solidFill>
-                <a:latin typeface="Calibri"/>
-              </a:defRPr>
-            </a:pPr>
-            <a:r>
-              <a:t>Gradiente azul-purpura como identidad visual</a:t>
-            </a:r>
-          </a:p>
-          <a:p>
-            <a:pPr>
-              <a:spcAft>
-                <a:spcPts val="800"/>
-              </a:spcAft>
-              <a:defRPr sz="1600">
-                <a:solidFill>
-                  <a:srgbClr val="F9FAFB"/>
-                </a:solidFill>
-                <a:latin typeface="Calibri"/>
-              </a:defRPr>
-            </a:pPr>
-            <a:r>
-              <a:t>Iconografia uniforme estilo outline (Lucide Icons)</a:t>
-            </a:r>
-          </a:p>
-          <a:p>
-            <a:pPr>
-              <a:spcAft>
-                <a:spcPts val="800"/>
-              </a:spcAft>
-              <a:defRPr sz="1600">
-                <a:solidFill>
-                  <a:srgbClr val="F9FAFB"/>
-                </a:solidFill>
-                <a:latin typeface="Calibri"/>
-              </a:defRPr>
-            </a:pPr>
-            <a:r>
-              <a:t>Accesibilidad: contraste WCAG AA, navegacion por teclado</a:t>
-            </a:r>
-          </a:p>
-          <a:p>
-            <a:pPr>
-              <a:spcAft>
-                <a:spcPts val="800"/>
-              </a:spcAft>
-              <a:defRPr sz="1600">
-                <a:solidFill>
-                  <a:srgbClr val="F9FAFB"/>
-                </a:solidFill>
-                <a:latin typeface="Calibri"/>
-              </a:defRPr>
-            </a:pPr>
-            <a:r>
-              <a:t>Responsive: desktop, tablet y movil</a:t>
-            </a:r>
-          </a:p>
-          <a:p>
-            <a:pPr>
-              <a:spcAft>
-                <a:spcPts val="800"/>
-              </a:spcAft>
-              <a:defRPr sz="1600">
-                <a:solidFill>
-                  <a:srgbClr val="F9FAFB"/>
-                </a:solidFill>
-                <a:latin typeface="Calibri"/>
-              </a:defRPr>
-            </a:pPr>
-            <a:r>
-              <a:t>Espaciado basado en sistema de 4px</a:t>
-            </a:r>
-          </a:p>
-          <a:p>
-            <a:pPr>
-              <a:spcAft>
-                <a:spcPts val="800"/>
-              </a:spcAft>
-              <a:defRPr sz="1600">
-                <a:solidFill>
-                  <a:srgbClr val="F9FAFB"/>
-                </a:solidFill>
-                <a:latin typeface="Calibri"/>
-              </a:defRPr>
-            </a:pPr>
-            <a:r>
-              <a:t>Tarjetas con indicador de color lateral por tipo de turno</a:t>
-            </a:r>
-          </a:p>
-        </p:txBody>
-      </p:sp>
-      <p:pic>
-        <p:nvPicPr>
-          <p:cNvPr id="5" name="Imagen 4">
-            <a:extLst>
-              <a:ext uri="{FF2B5EF4-FFF2-40B4-BE49-F238E27FC236}">
-                <a16:creationId xmlns:a16="http://schemas.microsoft.com/office/drawing/2014/main" id="{AAC33C55-F66B-9B5D-5562-AB4A3C5A0DFE}"/>
-              </a:ext>
-            </a:extLst>
-          </p:cNvPr>
-          <p:cNvPicPr>
-            <a:picLocks noChangeAspect="1"/>
-          </p:cNvPicPr>
-          <p:nvPr/>
-        </p:nvPicPr>
-        <p:blipFill>
-          <a:blip r:embed="rId2"/>
-          <a:stretch>
-            <a:fillRect/>
-          </a:stretch>
-        </p:blipFill>
-        <p:spPr>
-          <a:xfrm>
-            <a:off x="5953850" y="1234435"/>
-            <a:ext cx="3754809" cy="2927520"/>
-          </a:xfrm>
-          <a:prstGeom prst="rect">
-            <a:avLst/>
-          </a:prstGeom>
-        </p:spPr>
-      </p:pic>
-      <p:pic>
-        <p:nvPicPr>
-          <p:cNvPr id="6" name="Imagen 5">
-            <a:extLst>
-              <a:ext uri="{FF2B5EF4-FFF2-40B4-BE49-F238E27FC236}">
-                <a16:creationId xmlns:a16="http://schemas.microsoft.com/office/drawing/2014/main" id="{E299E7E6-F3F1-CB38-97F1-3F9424C5CD7E}"/>
-              </a:ext>
-            </a:extLst>
-          </p:cNvPr>
-          <p:cNvPicPr>
-            <a:picLocks noChangeAspect="1"/>
-          </p:cNvPicPr>
-          <p:nvPr/>
-        </p:nvPicPr>
-        <p:blipFill>
-          <a:blip r:embed="rId3"/>
-          <a:stretch>
-            <a:fillRect/>
-          </a:stretch>
-        </p:blipFill>
-        <p:spPr>
-          <a:xfrm>
-            <a:off x="10001835" y="2918495"/>
-            <a:ext cx="1453779" cy="3230620"/>
-          </a:xfrm>
-          <a:prstGeom prst="rect">
-            <a:avLst/>
-          </a:prstGeom>
-        </p:spPr>
-      </p:pic>
+            <a:pPr algn="l">
+              <a:defRPr sz="2200" b="1">
+                <a:solidFill>
+                  <a:srgbClr val="2563EB"/>
+                </a:solidFill>
+                <a:latin typeface="Calibri"/>
+              </a:defRPr>
+            </a:pPr>
+            <a:r>
+              <a:t>Web (PWA)</a:t>
+            </a:r>
+          </a:p>
+        </p:txBody>
+      </p:sp>
+      <p:sp>
+        <p:nvSpPr>
+          <p:cNvPr id="5" name="TextBox 4"/>
+          <p:cNvSpPr txBox="1"/>
+          <p:nvPr/>
+        </p:nvSpPr>
+        <p:spPr>
+          <a:xfrm>
+            <a:off x="731520" y="2011680"/>
+            <a:ext cx="5029200" cy="4114800"/>
+          </a:xfrm>
+          <a:prstGeom prst="rect">
+            <a:avLst/>
+          </a:prstGeom>
+          <a:noFill/>
+        </p:spPr>
+        <p:txBody>
+          <a:bodyPr wrap="square">
+            <a:spAutoFit/>
+          </a:bodyPr>
+          <a:lstStyle/>
+          <a:p>
+            <a:pPr>
+              <a:spcAft>
+                <a:spcPts val="800"/>
+              </a:spcAft>
+              <a:defRPr sz="1400">
+                <a:solidFill>
+                  <a:srgbClr val="F9FAFB"/>
+                </a:solidFill>
+                <a:latin typeface="Calibri"/>
+              </a:defRPr>
+            </a:pPr>
+            <a:r>
+              <a:t>Progressive Web App instalable</a:t>
+            </a:r>
+          </a:p>
+          <a:p>
+            <a:pPr>
+              <a:spcAft>
+                <a:spcPts val="800"/>
+              </a:spcAft>
+              <a:defRPr sz="1400">
+                <a:solidFill>
+                  <a:srgbClr val="F9FAFB"/>
+                </a:solidFill>
+                <a:latin typeface="Calibri"/>
+              </a:defRPr>
+            </a:pPr>
+            <a:r>
+              <a:t>React 19 + TypeScript + Vite</a:t>
+            </a:r>
+          </a:p>
+          <a:p>
+            <a:pPr>
+              <a:spcAft>
+                <a:spcPts val="800"/>
+              </a:spcAft>
+              <a:defRPr sz="1400">
+                <a:solidFill>
+                  <a:srgbClr val="F9FAFB"/>
+                </a:solidFill>
+                <a:latin typeface="Calibri"/>
+              </a:defRPr>
+            </a:pPr>
+            <a:r>
+              <a:t>Funciona en cualquier navegador moderno</a:t>
+            </a:r>
+          </a:p>
+          <a:p>
+            <a:pPr>
+              <a:spcAft>
+                <a:spcPts val="800"/>
+              </a:spcAft>
+              <a:defRPr sz="1400">
+                <a:solidFill>
+                  <a:srgbClr val="F9FAFB"/>
+                </a:solidFill>
+                <a:latin typeface="Calibri"/>
+              </a:defRPr>
+            </a:pPr>
+            <a:r>
+              <a:t>Modo escritorio con sidebar de navegacion</a:t>
+            </a:r>
+          </a:p>
+          <a:p>
+            <a:pPr>
+              <a:spcAft>
+                <a:spcPts val="800"/>
+              </a:spcAft>
+              <a:defRPr sz="1400">
+                <a:solidFill>
+                  <a:srgbClr val="F9FAFB"/>
+                </a:solidFill>
+                <a:latin typeface="Calibri"/>
+              </a:defRPr>
+            </a:pPr>
+            <a:r>
+              <a:t>Modo movil con bottom navigation</a:t>
+            </a:r>
+          </a:p>
+          <a:p>
+            <a:pPr>
+              <a:spcAft>
+                <a:spcPts val="800"/>
+              </a:spcAft>
+              <a:defRPr sz="1400">
+                <a:solidFill>
+                  <a:srgbClr val="F9FAFB"/>
+                </a:solidFill>
+                <a:latin typeface="Calibri"/>
+              </a:defRPr>
+            </a:pPr>
+            <a:r>
+              <a:t>IndexedDB para almacenamiento persistente</a:t>
+            </a:r>
+          </a:p>
+          <a:p>
+            <a:pPr>
+              <a:spcAft>
+                <a:spcPts val="800"/>
+              </a:spcAft>
+              <a:defRPr sz="1400">
+                <a:solidFill>
+                  <a:srgbClr val="F9FAFB"/>
+                </a:solidFill>
+                <a:latin typeface="Calibri"/>
+              </a:defRPr>
+            </a:pPr>
+            <a:r>
+              <a:t>Tema claro/oscuro + bilingue ES/EN</a:t>
+            </a:r>
+          </a:p>
+        </p:txBody>
+      </p:sp>
+      <p:sp>
+        <p:nvSpPr>
+          <p:cNvPr id="6" name="TextBox 5"/>
+          <p:cNvSpPr txBox="1"/>
+          <p:nvPr/>
+        </p:nvSpPr>
+        <p:spPr>
+          <a:xfrm>
+            <a:off x="6400800" y="1463040"/>
+            <a:ext cx="4572000" cy="457200"/>
+          </a:xfrm>
+          <a:prstGeom prst="rect">
+            <a:avLst/>
+          </a:prstGeom>
+          <a:noFill/>
+        </p:spPr>
+        <p:txBody>
+          <a:bodyPr wrap="square">
+            <a:spAutoFit/>
+          </a:bodyPr>
+          <a:lstStyle/>
+          <a:p>
+            <a:pPr algn="l">
+              <a:defRPr sz="2200" b="1">
+                <a:solidFill>
+                  <a:srgbClr val="10B981"/>
+                </a:solidFill>
+                <a:latin typeface="Calibri"/>
+              </a:defRPr>
+            </a:pPr>
+            <a:r>
+              <a:t>Android Nativo</a:t>
+            </a:r>
+          </a:p>
+        </p:txBody>
+      </p:sp>
+      <p:sp>
+        <p:nvSpPr>
+          <p:cNvPr id="7" name="TextBox 6"/>
+          <p:cNvSpPr txBox="1"/>
+          <p:nvPr/>
+        </p:nvSpPr>
+        <p:spPr>
+          <a:xfrm>
+            <a:off x="6400800" y="2011680"/>
+            <a:ext cx="5029200" cy="4114800"/>
+          </a:xfrm>
+          <a:prstGeom prst="rect">
+            <a:avLst/>
+          </a:prstGeom>
+          <a:noFill/>
+        </p:spPr>
+        <p:txBody>
+          <a:bodyPr wrap="square">
+            <a:spAutoFit/>
+          </a:bodyPr>
+          <a:lstStyle/>
+          <a:p>
+            <a:pPr>
+              <a:spcAft>
+                <a:spcPts val="800"/>
+              </a:spcAft>
+              <a:defRPr sz="1400">
+                <a:solidFill>
+                  <a:srgbClr val="F9FAFB"/>
+                </a:solidFill>
+                <a:latin typeface="Calibri"/>
+              </a:defRPr>
+            </a:pPr>
+            <a:r>
+              <a:t>Kotlin + Jetpack Compose</a:t>
+            </a:r>
+          </a:p>
+          <a:p>
+            <a:pPr>
+              <a:spcAft>
+                <a:spcPts val="800"/>
+              </a:spcAft>
+              <a:defRPr sz="1400">
+                <a:solidFill>
+                  <a:srgbClr val="F9FAFB"/>
+                </a:solidFill>
+                <a:latin typeface="Calibri"/>
+              </a:defRPr>
+            </a:pPr>
+            <a:r>
+              <a:t>Material Design 3</a:t>
+            </a:r>
+          </a:p>
+          <a:p>
+            <a:pPr>
+              <a:spcAft>
+                <a:spcPts val="800"/>
+              </a:spcAft>
+              <a:defRPr sz="1400">
+                <a:solidFill>
+                  <a:srgbClr val="F9FAFB"/>
+                </a:solidFill>
+                <a:latin typeface="Calibri"/>
+              </a:defRPr>
+            </a:pPr>
+            <a:r>
+              <a:t>SQLite + Room para persistencia</a:t>
+            </a:r>
+          </a:p>
+          <a:p>
+            <a:pPr>
+              <a:spcAft>
+                <a:spcPts val="800"/>
+              </a:spcAft>
+              <a:defRPr sz="1400">
+                <a:solidFill>
+                  <a:srgbClr val="F9FAFB"/>
+                </a:solidFill>
+                <a:latin typeface="Calibri"/>
+              </a:defRPr>
+            </a:pPr>
+            <a:r>
+              <a:t>Icono adaptativo con gradiente de marca</a:t>
+            </a:r>
+          </a:p>
+          <a:p>
+            <a:pPr>
+              <a:spcAft>
+                <a:spcPts val="800"/>
+              </a:spcAft>
+              <a:defRPr sz="1400">
+                <a:solidFill>
+                  <a:srgbClr val="F9FAFB"/>
+                </a:solidFill>
+                <a:latin typeface="Calibri"/>
+              </a:defRPr>
+            </a:pPr>
+            <a:r>
+              <a:t>Notificaciones push del sistema</a:t>
+            </a:r>
+          </a:p>
+          <a:p>
+            <a:pPr>
+              <a:spcAft>
+                <a:spcPts val="800"/>
+              </a:spcAft>
+              <a:defRPr sz="1400">
+                <a:solidFill>
+                  <a:srgbClr val="F9FAFB"/>
+                </a:solidFill>
+                <a:latin typeface="Calibri"/>
+              </a:defRPr>
+            </a:pPr>
+            <a:r>
+              <a:t>Cambio de tema e idioma sin reinicio</a:t>
+            </a:r>
+          </a:p>
+          <a:p>
+            <a:pPr>
+              <a:spcAft>
+                <a:spcPts val="800"/>
+              </a:spcAft>
+              <a:defRPr sz="1400">
+                <a:solidFill>
+                  <a:srgbClr val="F9FAFB"/>
+                </a:solidFill>
+                <a:latin typeface="Calibri"/>
+              </a:defRPr>
+            </a:pPr>
+            <a:r>
+              <a:t>Bottom navigation con iconos</a:t>
+            </a:r>
+          </a:p>
+        </p:txBody>
+      </p:sp>
     </p:spTree>
   </p:cSld>
   <p:clrMapOvr>
@@ -4886,7 +4958,7 @@
             <a:avLst/>
           </a:prstGeom>
           <a:solidFill>
-            <a:srgbClr val="0B86D4"/>
+            <a:srgbClr val="2563EB"/>
           </a:solidFill>
           <a:ln>
             <a:noFill/>
@@ -4946,7 +5018,7 @@
               </a:defRPr>
             </a:pPr>
             <a:r>
-              <a:t>Notificaciones Inteligentes</a:t>
+              <a:t>Diseno Moderno y Accesible</a:t>
             </a:r>
           </a:p>
         </p:txBody>
@@ -4959,8 +5031,8 @@
         </p:nvSpPr>
         <p:spPr>
           <a:xfrm>
-            <a:off x="731520" y="1280160"/>
-            <a:ext cx="10058400" cy="731520"/>
+            <a:off x="731520" y="1463040"/>
+            <a:ext cx="10058400" cy="5029200"/>
           </a:xfrm>
           <a:prstGeom prst="rect">
             <a:avLst/>
@@ -4973,42 +5045,6 @@
           </a:bodyPr>
           <a:lstStyle/>
           <a:p>
-            <a:pPr algn="l">
-              <a:defRPr sz="1800" b="0">
-                <a:solidFill>
-                  <a:srgbClr val="9CA3AF"/>
-                </a:solidFill>
-                <a:latin typeface="Calibri"/>
-              </a:defRPr>
-            </a:pPr>
-            <a:r>
-              <a:t>Nunca pierdas un turno o evento importante con alertas configurables</a:t>
-            </a:r>
-          </a:p>
-        </p:txBody>
-      </p:sp>
-      <p:sp>
-        <p:nvSpPr>
-          <p:cNvPr id="5" name="TextBox 4"/>
-          <p:cNvSpPr txBox="1"/>
-          <p:nvPr/>
-        </p:nvSpPr>
-        <p:spPr>
-          <a:xfrm>
-            <a:off x="731520" y="2103120"/>
-            <a:ext cx="10058400" cy="4114800"/>
-          </a:xfrm>
-          <a:prstGeom prst="rect">
-            <a:avLst/>
-          </a:prstGeom>
-          <a:noFill/>
-        </p:spPr>
-        <p:txBody>
-          <a:bodyPr wrap="square">
-            <a:spAutoFit/>
-          </a:bodyPr>
-          <a:lstStyle/>
-          <a:p>
             <a:pPr>
               <a:spcAft>
                 <a:spcPts val="800"/>
@@ -5021,7 +5057,7 @@
               </a:defRPr>
             </a:pPr>
             <a:r>
-              <a:t>Alertas configurables por evento:</a:t>
+              <a:t>Interfaz limpia y minimalista — sin distracciones</a:t>
             </a:r>
           </a:p>
           <a:p>
@@ -5037,7 +5073,7 @@
               </a:defRPr>
             </a:pPr>
             <a:r>
-              <a:t>    - Al inicio del evento</a:t>
+              <a:t>Tipografia Poppins para maxima legibilidad</a:t>
             </a:r>
           </a:p>
           <a:p>
@@ -5053,7 +5089,7 @@
               </a:defRPr>
             </a:pPr>
             <a:r>
-              <a:t>    - 10 minutos antes</a:t>
+              <a:t>Tema claro y oscuro (cambia al instante, sin reinicio)</a:t>
             </a:r>
           </a:p>
           <a:p>
@@ -5069,7 +5105,7 @@
               </a:defRPr>
             </a:pPr>
             <a:r>
-              <a:t>    - 1 hora antes</a:t>
+              <a:t>Paleta de colores consistente en ambas plataformas</a:t>
             </a:r>
           </a:p>
           <a:p>
@@ -5085,7 +5121,7 @@
               </a:defRPr>
             </a:pPr>
             <a:r>
-              <a:t>    - 1 dia antes</a:t>
+              <a:t>Gradiente azul-purpura como identidad visual</a:t>
             </a:r>
           </a:p>
           <a:p>
@@ -5101,7 +5137,7 @@
               </a:defRPr>
             </a:pPr>
             <a:r>
-              <a:t>Canales: in-app, push del sistema, o ambos</a:t>
+              <a:t>Iconografia uniforme estilo outline (Lucide Icons)</a:t>
             </a:r>
           </a:p>
           <a:p>
@@ -5117,7 +5153,7 @@
               </a:defRPr>
             </a:pPr>
             <a:r>
-              <a:t>Centro de notificaciones accesible desde la campana (top bar)</a:t>
+              <a:t>Accesibilidad: contraste WCAG AA, navegacion por teclado</a:t>
             </a:r>
           </a:p>
           <a:p>
@@ -5133,7 +5169,7 @@
               </a:defRPr>
             </a:pPr>
             <a:r>
-              <a:t>Marcar todas como leidas con un toque</a:t>
+              <a:t>Responsive: desktop, tablet y movil</a:t>
             </a:r>
           </a:p>
           <a:p>
@@ -5149,7 +5185,7 @@
               </a:defRPr>
             </a:pPr>
             <a:r>
-              <a:t>Limpieza automatica de notificaciones pasadas</a:t>
+              <a:t>Espaciado basado en sistema de 4px</a:t>
             </a:r>
           </a:p>
           <a:p>
@@ -5165,46 +5201,71 @@
               </a:defRPr>
             </a:pPr>
             <a:r>
-              <a:t>Configuracion global en Ajustes &gt; Notificaciones</a:t>
-            </a:r>
-          </a:p>
-        </p:txBody>
-      </p:sp>
-      <p:sp>
-        <p:nvSpPr>
-          <p:cNvPr id="6" name="CuadroTexto 5">
+              <a:t>Tarjetas con indicador de color lateral por tipo de turno</a:t>
+            </a:r>
+          </a:p>
+        </p:txBody>
+      </p:sp>
+      <p:pic>
+        <p:nvPicPr>
+          <p:cNvPr id="5" name="Imagen 4">
             <a:extLst>
               <a:ext uri="{FF2B5EF4-FFF2-40B4-BE49-F238E27FC236}">
-                <a16:creationId xmlns:a16="http://schemas.microsoft.com/office/drawing/2014/main" id="{31B27F47-B060-64EB-52FB-680436350FC4}"/>
+                <a16:creationId xmlns:a16="http://schemas.microsoft.com/office/drawing/2014/main" id="{AAC33C55-F66B-9B5D-5562-AB4A3C5A0DFE}"/>
               </a:ext>
             </a:extLst>
           </p:cNvPr>
-          <p:cNvSpPr txBox="1"/>
-          <p:nvPr/>
-        </p:nvSpPr>
-        <p:spPr>
-          <a:xfrm>
-            <a:off x="7491147" y="2414016"/>
-            <a:ext cx="3106941" cy="2646878"/>
-          </a:xfrm>
-          <a:prstGeom prst="rect">
-            <a:avLst/>
-          </a:prstGeom>
-          <a:noFill/>
-        </p:spPr>
-        <p:txBody>
-          <a:bodyPr wrap="none" rtlCol="0">
-            <a:spAutoFit/>
-          </a:bodyPr>
-          <a:lstStyle/>
-          <a:p>
-            <a:r>
-              <a:rPr lang="es-ES" sz="16600" dirty="0"/>
-              <a:t>🔔</a:t>
-            </a:r>
-          </a:p>
-        </p:txBody>
-      </p:sp>
+          <p:cNvPicPr>
+            <a:picLocks noChangeAspect="1"/>
+          </p:cNvPicPr>
+          <p:nvPr/>
+        </p:nvPicPr>
+        <p:blipFill>
+          <a:blip r:embed="rId2"/>
+          <a:stretch>
+            <a:fillRect/>
+          </a:stretch>
+        </p:blipFill>
+        <p:spPr>
+          <a:xfrm>
+            <a:off x="5953850" y="1234435"/>
+            <a:ext cx="3754809" cy="2927520"/>
+          </a:xfrm>
+          <a:prstGeom prst="rect">
+            <a:avLst/>
+          </a:prstGeom>
+        </p:spPr>
+      </p:pic>
+      <p:pic>
+        <p:nvPicPr>
+          <p:cNvPr id="6" name="Imagen 5">
+            <a:extLst>
+              <a:ext uri="{FF2B5EF4-FFF2-40B4-BE49-F238E27FC236}">
+                <a16:creationId xmlns:a16="http://schemas.microsoft.com/office/drawing/2014/main" id="{E299E7E6-F3F1-CB38-97F1-3F9424C5CD7E}"/>
+              </a:ext>
+            </a:extLst>
+          </p:cNvPr>
+          <p:cNvPicPr>
+            <a:picLocks noChangeAspect="1"/>
+          </p:cNvPicPr>
+          <p:nvPr/>
+        </p:nvPicPr>
+        <p:blipFill>
+          <a:blip r:embed="rId3"/>
+          <a:stretch>
+            <a:fillRect/>
+          </a:stretch>
+        </p:blipFill>
+        <p:spPr>
+          <a:xfrm>
+            <a:off x="10001835" y="2918495"/>
+            <a:ext cx="1453779" cy="3230620"/>
+          </a:xfrm>
+          <a:prstGeom prst="rect">
+            <a:avLst/>
+          </a:prstGeom>
+        </p:spPr>
+      </p:pic>
     </p:spTree>
   </p:cSld>
   <p:clrMapOvr>
@@ -5253,7 +5314,7 @@
             <a:avLst/>
           </a:prstGeom>
           <a:solidFill>
-            <a:srgbClr val="7C3AED"/>
+            <a:srgbClr val="0B86D4"/>
           </a:solidFill>
           <a:ln>
             <a:noFill/>
@@ -5313,7 +5374,7 @@
               </a:defRPr>
             </a:pPr>
             <a:r>
-              <a:t>Personalizable a Tu Medida</a:t>
+              <a:t>Notificaciones Inteligentes</a:t>
             </a:r>
           </a:p>
         </p:txBody>
@@ -5326,8 +5387,8 @@
         </p:nvSpPr>
         <p:spPr>
           <a:xfrm>
-            <a:off x="731520" y="1463040"/>
-            <a:ext cx="10058400" cy="5029200"/>
+            <a:off x="731520" y="1280160"/>
+            <a:ext cx="10058400" cy="731520"/>
           </a:xfrm>
           <a:prstGeom prst="rect">
             <a:avLst/>
@@ -5340,6 +5401,42 @@
           </a:bodyPr>
           <a:lstStyle/>
           <a:p>
+            <a:pPr algn="l">
+              <a:defRPr sz="1800" b="0">
+                <a:solidFill>
+                  <a:srgbClr val="9CA3AF"/>
+                </a:solidFill>
+                <a:latin typeface="Calibri"/>
+              </a:defRPr>
+            </a:pPr>
+            <a:r>
+              <a:t>Nunca pierdas un turno o evento importante con alertas configurables</a:t>
+            </a:r>
+          </a:p>
+        </p:txBody>
+      </p:sp>
+      <p:sp>
+        <p:nvSpPr>
+          <p:cNvPr id="5" name="TextBox 4"/>
+          <p:cNvSpPr txBox="1"/>
+          <p:nvPr/>
+        </p:nvSpPr>
+        <p:spPr>
+          <a:xfrm>
+            <a:off x="731520" y="2103120"/>
+            <a:ext cx="10058400" cy="4114800"/>
+          </a:xfrm>
+          <a:prstGeom prst="rect">
+            <a:avLst/>
+          </a:prstGeom>
+          <a:noFill/>
+        </p:spPr>
+        <p:txBody>
+          <a:bodyPr wrap="square">
+            <a:spAutoFit/>
+          </a:bodyPr>
+          <a:lstStyle/>
+          <a:p>
             <a:pPr>
               <a:spcAft>
                 <a:spcPts val="800"/>
@@ -5352,7 +5449,7 @@
               </a:defRPr>
             </a:pPr>
             <a:r>
-              <a:t>Tema: Claro, Oscuro o Sistema (se aplica al instante)</a:t>
+              <a:t>Alertas configurables por evento:</a:t>
             </a:r>
           </a:p>
           <a:p>
@@ -5368,7 +5465,7 @@
               </a:defRPr>
             </a:pPr>
             <a:r>
-              <a:t>Idioma: Espanol / Ingles (cambio inmediato sin reinicio)</a:t>
+              <a:t>    - Al inicio del evento</a:t>
             </a:r>
           </a:p>
           <a:p>
@@ -5384,7 +5481,7 @@
               </a:defRPr>
             </a:pPr>
             <a:r>
-              <a:t>Intervalo de sincronizacion personalizable (5-60 min)</a:t>
+              <a:t>    - 10 minutos antes</a:t>
             </a:r>
           </a:p>
           <a:p>
@@ -5400,7 +5497,7 @@
               </a:defRPr>
             </a:pPr>
             <a:r>
-              <a:t>Configuracion de canal de notificaciones</a:t>
+              <a:t>    - 1 hora antes</a:t>
             </a:r>
           </a:p>
           <a:p>
@@ -5416,7 +5513,7 @@
               </a:defRPr>
             </a:pPr>
             <a:r>
-              <a:t>Servidor de sincronizacion con URL personalizable</a:t>
+              <a:t>    - 1 dia antes</a:t>
             </a:r>
           </a:p>
           <a:p>
@@ -5432,7 +5529,7 @@
               </a:defRPr>
             </a:pPr>
             <a:r>
-              <a:t>Backups manuales y restauracion</a:t>
+              <a:t>Canales: in-app, push del sistema, o ambos</a:t>
             </a:r>
           </a:p>
           <a:p>
@@ -5448,7 +5545,7 @@
               </a:defRPr>
             </a:pPr>
             <a:r>
-              <a:t>Reset de aplicacion (zona de peligro) para limpiar datos</a:t>
+              <a:t>Centro de notificaciones accesible desde la campana (top bar)</a:t>
             </a:r>
           </a:p>
           <a:p>
@@ -5464,41 +5561,78 @@
               </a:defRPr>
             </a:pPr>
             <a:r>
-              <a:t>Todas las preferencias persisten localmente</a:t>
-            </a:r>
-          </a:p>
-        </p:txBody>
-      </p:sp>
-      <p:pic>
-        <p:nvPicPr>
-          <p:cNvPr id="6" name="Imagen 5">
+              <a:t>Marcar todas como leidas con un toque</a:t>
+            </a:r>
+          </a:p>
+          <a:p>
+            <a:pPr>
+              <a:spcAft>
+                <a:spcPts val="800"/>
+              </a:spcAft>
+              <a:defRPr sz="1600">
+                <a:solidFill>
+                  <a:srgbClr val="F9FAFB"/>
+                </a:solidFill>
+                <a:latin typeface="Calibri"/>
+              </a:defRPr>
+            </a:pPr>
+            <a:r>
+              <a:t>Limpieza automatica de notificaciones pasadas</a:t>
+            </a:r>
+          </a:p>
+          <a:p>
+            <a:pPr>
+              <a:spcAft>
+                <a:spcPts val="800"/>
+              </a:spcAft>
+              <a:defRPr sz="1600">
+                <a:solidFill>
+                  <a:srgbClr val="F9FAFB"/>
+                </a:solidFill>
+                <a:latin typeface="Calibri"/>
+              </a:defRPr>
+            </a:pPr>
+            <a:r>
+              <a:t>Configuracion global en Ajustes &gt; Notificaciones</a:t>
+            </a:r>
+          </a:p>
+        </p:txBody>
+      </p:sp>
+      <p:sp>
+        <p:nvSpPr>
+          <p:cNvPr id="6" name="CuadroTexto 5">
             <a:extLst>
               <a:ext uri="{FF2B5EF4-FFF2-40B4-BE49-F238E27FC236}">
-                <a16:creationId xmlns:a16="http://schemas.microsoft.com/office/drawing/2014/main" id="{938D4EC7-A2C0-EF42-2A5F-72F86EFD6B73}"/>
+                <a16:creationId xmlns:a16="http://schemas.microsoft.com/office/drawing/2014/main" id="{31B27F47-B060-64EB-52FB-680436350FC4}"/>
               </a:ext>
             </a:extLst>
           </p:cNvPr>
-          <p:cNvPicPr>
-            <a:picLocks noChangeAspect="1"/>
-          </p:cNvPicPr>
-          <p:nvPr/>
-        </p:nvPicPr>
-        <p:blipFill>
-          <a:blip r:embed="rId2"/>
-          <a:stretch>
-            <a:fillRect/>
-          </a:stretch>
-        </p:blipFill>
-        <p:spPr>
-          <a:xfrm>
-            <a:off x="7770555" y="1238868"/>
-            <a:ext cx="2159329" cy="4798509"/>
-          </a:xfrm>
-          <a:prstGeom prst="rect">
-            <a:avLst/>
-          </a:prstGeom>
-        </p:spPr>
-      </p:pic>
+          <p:cNvSpPr txBox="1"/>
+          <p:nvPr/>
+        </p:nvSpPr>
+        <p:spPr>
+          <a:xfrm>
+            <a:off x="7491147" y="2414016"/>
+            <a:ext cx="3106941" cy="2646878"/>
+          </a:xfrm>
+          <a:prstGeom prst="rect">
+            <a:avLst/>
+          </a:prstGeom>
+          <a:noFill/>
+        </p:spPr>
+        <p:txBody>
+          <a:bodyPr wrap="none" rtlCol="0">
+            <a:spAutoFit/>
+          </a:bodyPr>
+          <a:lstStyle/>
+          <a:p>
+            <a:r>
+              <a:rPr lang="es-ES" sz="16600" dirty="0"/>
+              <a:t>🔔</a:t>
+            </a:r>
+          </a:p>
+        </p:txBody>
+      </p:sp>
     </p:spTree>
   </p:cSld>
   <p:clrMapOvr>
@@ -5547,7 +5681,7 @@
             <a:avLst/>
           </a:prstGeom>
           <a:solidFill>
-            <a:srgbClr val="0B86D4"/>
+            <a:srgbClr val="7C3AED"/>
           </a:solidFill>
           <a:ln>
             <a:noFill/>
@@ -5607,7 +5741,7 @@
               </a:defRPr>
             </a:pPr>
             <a:r>
-              <a:t>Arquitectura y Tecnologia</a:t>
+              <a:t>Personalizable a Tu Medida</a:t>
             </a:r>
           </a:p>
         </p:txBody>
@@ -5620,8 +5754,8 @@
         </p:nvSpPr>
         <p:spPr>
           <a:xfrm>
-            <a:off x="457200" y="1463040"/>
-            <a:ext cx="3474720" cy="457200"/>
+            <a:off x="731520" y="1463040"/>
+            <a:ext cx="10058400" cy="5029200"/>
           </a:xfrm>
           <a:prstGeom prst="rect">
             <a:avLst/>
@@ -5634,443 +5768,141 @@
           </a:bodyPr>
           <a:lstStyle/>
           <a:p>
-            <a:pPr algn="l">
-              <a:defRPr sz="1800" b="1">
-                <a:solidFill>
-                  <a:srgbClr val="2563EB"/>
-                </a:solidFill>
-                <a:latin typeface="Calibri"/>
-              </a:defRPr>
-            </a:pPr>
-            <a:r>
-              <a:t>Backend (API)</a:t>
-            </a:r>
-          </a:p>
-        </p:txBody>
-      </p:sp>
-      <p:sp>
-        <p:nvSpPr>
-          <p:cNvPr id="5" name="TextBox 4"/>
-          <p:cNvSpPr txBox="1"/>
-          <p:nvPr/>
-        </p:nvSpPr>
-        <p:spPr>
-          <a:xfrm>
-            <a:off x="457200" y="2011680"/>
-            <a:ext cx="3474720" cy="3657600"/>
-          </a:xfrm>
-          <a:prstGeom prst="rect">
-            <a:avLst/>
-          </a:prstGeom>
-          <a:noFill/>
-        </p:spPr>
-        <p:txBody>
-          <a:bodyPr wrap="square">
-            <a:spAutoFit/>
-          </a:bodyPr>
-          <a:lstStyle/>
-          <a:p>
-            <a:pPr>
-              <a:spcAft>
-                <a:spcPts val="800"/>
-              </a:spcAft>
-              <a:defRPr sz="1400">
-                <a:solidFill>
-                  <a:srgbClr val="F9FAFB"/>
-                </a:solidFill>
-                <a:latin typeface="Calibri"/>
-              </a:defRPr>
-            </a:pPr>
-            <a:r>
-              <a:t>.NET 10 (C#)</a:t>
-            </a:r>
-          </a:p>
-          <a:p>
-            <a:pPr>
-              <a:spcAft>
-                <a:spcPts val="800"/>
-              </a:spcAft>
-              <a:defRPr sz="1400">
-                <a:solidFill>
-                  <a:srgbClr val="F9FAFB"/>
-                </a:solidFill>
-                <a:latin typeface="Calibri"/>
-              </a:defRPr>
-            </a:pPr>
-            <a:r>
-              <a:t>REST API + Docker</a:t>
-            </a:r>
-          </a:p>
-          <a:p>
-            <a:pPr>
-              <a:spcAft>
-                <a:spcPts val="800"/>
-              </a:spcAft>
-              <a:defRPr sz="1400">
-                <a:solidFill>
-                  <a:srgbClr val="F9FAFB"/>
-                </a:solidFill>
-                <a:latin typeface="Calibri"/>
-              </a:defRPr>
-            </a:pPr>
-            <a:r>
-              <a:t>MySQL / EF Core</a:t>
-            </a:r>
-          </a:p>
-          <a:p>
-            <a:pPr>
-              <a:spcAft>
-                <a:spcPts val="800"/>
-              </a:spcAft>
-              <a:defRPr sz="1400">
-                <a:solidFill>
-                  <a:srgbClr val="F9FAFB"/>
-                </a:solidFill>
-                <a:latin typeface="Calibri"/>
-              </a:defRPr>
-            </a:pPr>
-            <a:r>
-              <a:t>API Key auth</a:t>
-            </a:r>
-          </a:p>
-          <a:p>
-            <a:pPr>
-              <a:spcAft>
-                <a:spcPts val="800"/>
-              </a:spcAft>
-              <a:defRPr sz="1400">
-                <a:solidFill>
-                  <a:srgbClr val="F9FAFB"/>
-                </a:solidFill>
-                <a:latin typeface="Calibri"/>
-              </a:defRPr>
-            </a:pPr>
-            <a:r>
-              <a:t>Auto-hospedable</a:t>
-            </a:r>
-          </a:p>
-        </p:txBody>
-      </p:sp>
-      <p:sp>
-        <p:nvSpPr>
-          <p:cNvPr id="6" name="TextBox 5"/>
-          <p:cNvSpPr txBox="1"/>
-          <p:nvPr/>
-        </p:nvSpPr>
-        <p:spPr>
-          <a:xfrm>
-            <a:off x="4389120" y="1463040"/>
-            <a:ext cx="3474720" cy="457200"/>
-          </a:xfrm>
-          <a:prstGeom prst="rect">
-            <a:avLst/>
-          </a:prstGeom>
-          <a:noFill/>
-        </p:spPr>
-        <p:txBody>
-          <a:bodyPr wrap="square">
-            <a:spAutoFit/>
-          </a:bodyPr>
-          <a:lstStyle/>
-          <a:p>
-            <a:pPr algn="l">
-              <a:defRPr sz="1800" b="1">
-                <a:solidFill>
-                  <a:srgbClr val="7C3AED"/>
-                </a:solidFill>
-                <a:latin typeface="Calibri"/>
-              </a:defRPr>
-            </a:pPr>
-            <a:r>
-              <a:t>Web (PWA)</a:t>
-            </a:r>
-          </a:p>
-        </p:txBody>
-      </p:sp>
-      <p:sp>
-        <p:nvSpPr>
-          <p:cNvPr id="7" name="TextBox 6"/>
-          <p:cNvSpPr txBox="1"/>
-          <p:nvPr/>
-        </p:nvSpPr>
-        <p:spPr>
-          <a:xfrm>
-            <a:off x="4389120" y="2011680"/>
-            <a:ext cx="3474720" cy="3657600"/>
-          </a:xfrm>
-          <a:prstGeom prst="rect">
-            <a:avLst/>
-          </a:prstGeom>
-          <a:noFill/>
-        </p:spPr>
-        <p:txBody>
-          <a:bodyPr wrap="square">
-            <a:spAutoFit/>
-          </a:bodyPr>
-          <a:lstStyle/>
-          <a:p>
-            <a:pPr>
-              <a:spcAft>
-                <a:spcPts val="800"/>
-              </a:spcAft>
-              <a:defRPr sz="1400">
-                <a:solidFill>
-                  <a:srgbClr val="F9FAFB"/>
-                </a:solidFill>
-                <a:latin typeface="Calibri"/>
-              </a:defRPr>
-            </a:pPr>
-            <a:r>
-              <a:t>React 19 + TypeScript</a:t>
-            </a:r>
-          </a:p>
-          <a:p>
-            <a:pPr>
-              <a:spcAft>
-                <a:spcPts val="800"/>
-              </a:spcAft>
-              <a:defRPr sz="1400">
-                <a:solidFill>
-                  <a:srgbClr val="F9FAFB"/>
-                </a:solidFill>
-                <a:latin typeface="Calibri"/>
-              </a:defRPr>
-            </a:pPr>
-            <a:r>
-              <a:t>Vite + Tailwind CSS v4</a:t>
-            </a:r>
-          </a:p>
-          <a:p>
-            <a:pPr>
-              <a:spcAft>
-                <a:spcPts val="800"/>
-              </a:spcAft>
-              <a:defRPr sz="1400">
-                <a:solidFill>
-                  <a:srgbClr val="F9FAFB"/>
-                </a:solidFill>
-                <a:latin typeface="Calibri"/>
-              </a:defRPr>
-            </a:pPr>
-            <a:r>
-              <a:t>IndexedDB offline</a:t>
-            </a:r>
-          </a:p>
-          <a:p>
-            <a:pPr>
-              <a:spcAft>
-                <a:spcPts val="800"/>
-              </a:spcAft>
-              <a:defRPr sz="1400">
-                <a:solidFill>
-                  <a:srgbClr val="F9FAFB"/>
-                </a:solidFill>
-                <a:latin typeface="Calibri"/>
-              </a:defRPr>
-            </a:pPr>
-            <a:r>
-              <a:t>React Router + Query</a:t>
-            </a:r>
-          </a:p>
-          <a:p>
-            <a:pPr>
-              <a:spcAft>
-                <a:spcPts val="800"/>
-              </a:spcAft>
-              <a:defRPr sz="1400">
-                <a:solidFill>
-                  <a:srgbClr val="F9FAFB"/>
-                </a:solidFill>
-                <a:latin typeface="Calibri"/>
-              </a:defRPr>
-            </a:pPr>
-            <a:r>
-              <a:t>Vitest + Playwright</a:t>
-            </a:r>
-          </a:p>
-        </p:txBody>
-      </p:sp>
-      <p:sp>
-        <p:nvSpPr>
-          <p:cNvPr id="8" name="TextBox 7"/>
-          <p:cNvSpPr txBox="1"/>
-          <p:nvPr/>
-        </p:nvSpPr>
-        <p:spPr>
-          <a:xfrm>
-            <a:off x="8321040" y="1463040"/>
-            <a:ext cx="3474720" cy="457200"/>
-          </a:xfrm>
-          <a:prstGeom prst="rect">
-            <a:avLst/>
-          </a:prstGeom>
-          <a:noFill/>
-        </p:spPr>
-        <p:txBody>
-          <a:bodyPr wrap="square">
-            <a:spAutoFit/>
-          </a:bodyPr>
-          <a:lstStyle/>
-          <a:p>
-            <a:pPr algn="l">
-              <a:defRPr sz="1800" b="1">
-                <a:solidFill>
-                  <a:srgbClr val="10B981"/>
-                </a:solidFill>
-                <a:latin typeface="Calibri"/>
-              </a:defRPr>
-            </a:pPr>
-            <a:r>
-              <a:t>Android</a:t>
-            </a:r>
-          </a:p>
-        </p:txBody>
-      </p:sp>
-      <p:sp>
-        <p:nvSpPr>
-          <p:cNvPr id="9" name="TextBox 8"/>
-          <p:cNvSpPr txBox="1"/>
-          <p:nvPr/>
-        </p:nvSpPr>
-        <p:spPr>
-          <a:xfrm>
-            <a:off x="8321040" y="2011680"/>
-            <a:ext cx="3474720" cy="3657600"/>
-          </a:xfrm>
-          <a:prstGeom prst="rect">
-            <a:avLst/>
-          </a:prstGeom>
-          <a:noFill/>
-        </p:spPr>
-        <p:txBody>
-          <a:bodyPr wrap="square">
-            <a:spAutoFit/>
-          </a:bodyPr>
-          <a:lstStyle/>
-          <a:p>
-            <a:pPr>
-              <a:spcAft>
-                <a:spcPts val="800"/>
-              </a:spcAft>
-              <a:defRPr sz="1400">
-                <a:solidFill>
-                  <a:srgbClr val="F9FAFB"/>
-                </a:solidFill>
-                <a:latin typeface="Calibri"/>
-              </a:defRPr>
-            </a:pPr>
-            <a:r>
-              <a:t>Kotlin + Compose</a:t>
-            </a:r>
-          </a:p>
-          <a:p>
-            <a:pPr>
-              <a:spcAft>
-                <a:spcPts val="800"/>
-              </a:spcAft>
-              <a:defRPr sz="1400">
-                <a:solidFill>
-                  <a:srgbClr val="F9FAFB"/>
-                </a:solidFill>
-                <a:latin typeface="Calibri"/>
-              </a:defRPr>
-            </a:pPr>
-            <a:r>
-              <a:t>Material Design 3</a:t>
-            </a:r>
-          </a:p>
-          <a:p>
-            <a:pPr>
-              <a:spcAft>
-                <a:spcPts val="800"/>
-              </a:spcAft>
-              <a:defRPr sz="1400">
-                <a:solidFill>
-                  <a:srgbClr val="F9FAFB"/>
-                </a:solidFill>
-                <a:latin typeface="Calibri"/>
-              </a:defRPr>
-            </a:pPr>
-            <a:r>
-              <a:t>Room (SQLite)</a:t>
-            </a:r>
-          </a:p>
-          <a:p>
-            <a:pPr>
-              <a:spcAft>
-                <a:spcPts val="800"/>
-              </a:spcAft>
-              <a:defRPr sz="1400">
-                <a:solidFill>
-                  <a:srgbClr val="F9FAFB"/>
-                </a:solidFill>
-                <a:latin typeface="Calibri"/>
-              </a:defRPr>
-            </a:pPr>
-            <a:r>
-              <a:t>Retrofit + OkHttp</a:t>
-            </a:r>
-          </a:p>
-          <a:p>
-            <a:pPr>
-              <a:spcAft>
-                <a:spcPts val="800"/>
-              </a:spcAft>
-              <a:defRPr sz="1400">
-                <a:solidFill>
-                  <a:srgbClr val="F9FAFB"/>
-                </a:solidFill>
-                <a:latin typeface="Calibri"/>
-              </a:defRPr>
-            </a:pPr>
-            <a:r>
-              <a:t>DataStore prefs</a:t>
-            </a:r>
-          </a:p>
-        </p:txBody>
-      </p:sp>
-      <p:sp>
-        <p:nvSpPr>
-          <p:cNvPr id="10" name="TextBox 9"/>
-          <p:cNvSpPr txBox="1"/>
-          <p:nvPr/>
-        </p:nvSpPr>
-        <p:spPr>
-          <a:xfrm>
-            <a:off x="731520" y="5669280"/>
-            <a:ext cx="10058400" cy="548640"/>
-          </a:xfrm>
-          <a:prstGeom prst="rect">
-            <a:avLst/>
-          </a:prstGeom>
-          <a:noFill/>
-        </p:spPr>
-        <p:txBody>
-          <a:bodyPr wrap="square">
-            <a:spAutoFit/>
-          </a:bodyPr>
-          <a:lstStyle/>
-          <a:p>
-            <a:pPr algn="l">
-              <a:defRPr sz="1400" b="1">
-                <a:solidFill>
-                  <a:srgbClr val="9CA3AF"/>
-                </a:solidFill>
-                <a:latin typeface="Calibri"/>
-              </a:defRPr>
-            </a:pPr>
-            <a:r>
-              <a:t>Arquitectura offline-first: los clientes operan independientemente. El backend es solo un hub de sincronizacion opcional.</a:t>
+            <a:pPr>
+              <a:spcAft>
+                <a:spcPts val="800"/>
+              </a:spcAft>
+              <a:defRPr sz="1600">
+                <a:solidFill>
+                  <a:srgbClr val="F9FAFB"/>
+                </a:solidFill>
+                <a:latin typeface="Calibri"/>
+              </a:defRPr>
+            </a:pPr>
+            <a:r>
+              <a:t>Tema: Claro, Oscuro o Sistema (se aplica al instante)</a:t>
+            </a:r>
+          </a:p>
+          <a:p>
+            <a:pPr>
+              <a:spcAft>
+                <a:spcPts val="800"/>
+              </a:spcAft>
+              <a:defRPr sz="1600">
+                <a:solidFill>
+                  <a:srgbClr val="F9FAFB"/>
+                </a:solidFill>
+                <a:latin typeface="Calibri"/>
+              </a:defRPr>
+            </a:pPr>
+            <a:r>
+              <a:t>Idioma: Espanol / Ingles (cambio inmediato sin reinicio)</a:t>
+            </a:r>
+          </a:p>
+          <a:p>
+            <a:pPr>
+              <a:spcAft>
+                <a:spcPts val="800"/>
+              </a:spcAft>
+              <a:defRPr sz="1600">
+                <a:solidFill>
+                  <a:srgbClr val="F9FAFB"/>
+                </a:solidFill>
+                <a:latin typeface="Calibri"/>
+              </a:defRPr>
+            </a:pPr>
+            <a:r>
+              <a:t>Intervalo de sincronizacion personalizable (5-60 min)</a:t>
+            </a:r>
+          </a:p>
+          <a:p>
+            <a:pPr>
+              <a:spcAft>
+                <a:spcPts val="800"/>
+              </a:spcAft>
+              <a:defRPr sz="1600">
+                <a:solidFill>
+                  <a:srgbClr val="F9FAFB"/>
+                </a:solidFill>
+                <a:latin typeface="Calibri"/>
+              </a:defRPr>
+            </a:pPr>
+            <a:r>
+              <a:t>Configuracion de canal de notificaciones</a:t>
+            </a:r>
+          </a:p>
+          <a:p>
+            <a:pPr>
+              <a:spcAft>
+                <a:spcPts val="800"/>
+              </a:spcAft>
+              <a:defRPr sz="1600">
+                <a:solidFill>
+                  <a:srgbClr val="F9FAFB"/>
+                </a:solidFill>
+                <a:latin typeface="Calibri"/>
+              </a:defRPr>
+            </a:pPr>
+            <a:r>
+              <a:t>Servidor de sincronizacion con URL personalizable</a:t>
+            </a:r>
+          </a:p>
+          <a:p>
+            <a:pPr>
+              <a:spcAft>
+                <a:spcPts val="800"/>
+              </a:spcAft>
+              <a:defRPr sz="1600">
+                <a:solidFill>
+                  <a:srgbClr val="F9FAFB"/>
+                </a:solidFill>
+                <a:latin typeface="Calibri"/>
+              </a:defRPr>
+            </a:pPr>
+            <a:r>
+              <a:t>Backups manuales y restauracion</a:t>
+            </a:r>
+          </a:p>
+          <a:p>
+            <a:pPr>
+              <a:spcAft>
+                <a:spcPts val="800"/>
+              </a:spcAft>
+              <a:defRPr sz="1600">
+                <a:solidFill>
+                  <a:srgbClr val="F9FAFB"/>
+                </a:solidFill>
+                <a:latin typeface="Calibri"/>
+              </a:defRPr>
+            </a:pPr>
+            <a:r>
+              <a:t>Reset de aplicacion (zona de peligro) para limpiar datos</a:t>
+            </a:r>
+          </a:p>
+          <a:p>
+            <a:pPr>
+              <a:spcAft>
+                <a:spcPts val="800"/>
+              </a:spcAft>
+              <a:defRPr sz="1600">
+                <a:solidFill>
+                  <a:srgbClr val="F9FAFB"/>
+                </a:solidFill>
+                <a:latin typeface="Calibri"/>
+              </a:defRPr>
+            </a:pPr>
+            <a:r>
+              <a:t>Todas las preferencias persisten localmente</a:t>
             </a:r>
           </a:p>
         </p:txBody>
       </p:sp>
       <p:pic>
         <p:nvPicPr>
-          <p:cNvPr id="11" name="Imagen 10" descr="Archivo:Microsoft .NET logo.png">
+          <p:cNvPr id="6" name="Imagen 5">
             <a:extLst>
               <a:ext uri="{FF2B5EF4-FFF2-40B4-BE49-F238E27FC236}">
-                <a16:creationId xmlns:a16="http://schemas.microsoft.com/office/drawing/2014/main" id="{1B6B9DBE-F187-D333-1494-51359BAC60B8}"/>
+                <a16:creationId xmlns:a16="http://schemas.microsoft.com/office/drawing/2014/main" id="{938D4EC7-A2C0-EF42-2A5F-72F86EFD6B73}"/>
               </a:ext>
             </a:extLst>
           </p:cNvPr>
@@ -6087,68 +5919,8 @@
         </p:blipFill>
         <p:spPr>
           <a:xfrm>
-            <a:off x="833417" y="3948731"/>
-            <a:ext cx="1391077" cy="1391077"/>
-          </a:xfrm>
-          <a:prstGeom prst="rect">
-            <a:avLst/>
-          </a:prstGeom>
-        </p:spPr>
-      </p:pic>
-      <p:pic>
-        <p:nvPicPr>
-          <p:cNvPr id="13" name="Imagen 12">
-            <a:extLst>
-              <a:ext uri="{FF2B5EF4-FFF2-40B4-BE49-F238E27FC236}">
-                <a16:creationId xmlns:a16="http://schemas.microsoft.com/office/drawing/2014/main" id="{8466586A-82F1-84CA-BBEF-1E2EE5422FA5}"/>
-              </a:ext>
-            </a:extLst>
-          </p:cNvPr>
-          <p:cNvPicPr>
-            <a:picLocks noChangeAspect="1"/>
-          </p:cNvPicPr>
-          <p:nvPr/>
-        </p:nvPicPr>
-        <p:blipFill>
-          <a:blip r:embed="rId3"/>
-          <a:stretch>
-            <a:fillRect/>
-          </a:stretch>
-        </p:blipFill>
-        <p:spPr>
-          <a:xfrm>
-            <a:off x="4523857" y="3948731"/>
-            <a:ext cx="1429995" cy="1391462"/>
-          </a:xfrm>
-          <a:prstGeom prst="rect">
-            <a:avLst/>
-          </a:prstGeom>
-        </p:spPr>
-      </p:pic>
-      <p:pic>
-        <p:nvPicPr>
-          <p:cNvPr id="14" name="Imagen 13" descr="Icono Android">
-            <a:extLst>
-              <a:ext uri="{FF2B5EF4-FFF2-40B4-BE49-F238E27FC236}">
-                <a16:creationId xmlns:a16="http://schemas.microsoft.com/office/drawing/2014/main" id="{E31EC0D8-5393-9284-AE49-9DB828D419FD}"/>
-              </a:ext>
-            </a:extLst>
-          </p:cNvPr>
-          <p:cNvPicPr>
-            <a:picLocks noChangeAspect="1"/>
-          </p:cNvPicPr>
-          <p:nvPr/>
-        </p:nvPicPr>
-        <p:blipFill>
-          <a:blip r:embed="rId4"/>
-          <a:stretch>
-            <a:fillRect/>
-          </a:stretch>
-        </p:blipFill>
-        <p:spPr>
-          <a:xfrm>
-            <a:off x="8265069" y="3948731"/>
-            <a:ext cx="1391077" cy="1391077"/>
+            <a:off x="7770555" y="1238868"/>
+            <a:ext cx="2159329" cy="4798509"/>
           </a:xfrm>
           <a:prstGeom prst="rect">
             <a:avLst/>
@@ -6203,7 +5975,7 @@
             <a:avLst/>
           </a:prstGeom>
           <a:solidFill>
-            <a:srgbClr val="10B981"/>
+            <a:srgbClr val="0B86D4"/>
           </a:solidFill>
           <a:ln>
             <a:noFill/>
@@ -6263,7 +6035,7 @@
               </a:defRPr>
             </a:pPr>
             <a:r>
-              <a:t>Para Quien es Planixor?</a:t>
+              <a:t>Arquitectura y Tecnologia</a:t>
             </a:r>
           </a:p>
         </p:txBody>
@@ -6276,8 +6048,8 @@
         </p:nvSpPr>
         <p:spPr>
           <a:xfrm>
-            <a:off x="731520" y="1463040"/>
-            <a:ext cx="10058400" cy="3657600"/>
+            <a:off x="457200" y="1463040"/>
+            <a:ext cx="3474720" cy="457200"/>
           </a:xfrm>
           <a:prstGeom prst="rect">
             <a:avLst/>
@@ -6290,115 +6062,16 @@
           </a:bodyPr>
           <a:lstStyle/>
           <a:p>
-            <a:pPr>
-              <a:spcAft>
-                <a:spcPts val="800"/>
-              </a:spcAft>
-              <a:defRPr sz="1800">
-                <a:solidFill>
-                  <a:srgbClr val="F9FAFB"/>
-                </a:solidFill>
-                <a:latin typeface="Calibri"/>
-              </a:defRPr>
-            </a:pPr>
-            <a:r>
-              <a:t>Profesionales con turnos rotativos (salud, seguridad, hosteleria)</a:t>
-            </a:r>
-          </a:p>
-          <a:p>
-            <a:pPr>
-              <a:spcAft>
-                <a:spcPts val="800"/>
-              </a:spcAft>
-              <a:defRPr sz="1800">
-                <a:solidFill>
-                  <a:srgbClr val="F9FAFB"/>
-                </a:solidFill>
-                <a:latin typeface="Calibri"/>
-              </a:defRPr>
-            </a:pPr>
-            <a:r>
-              <a:t>Freelancers que necesitan control de horas trabajadas</a:t>
-            </a:r>
-          </a:p>
-          <a:p>
-            <a:pPr>
-              <a:spcAft>
-                <a:spcPts val="800"/>
-              </a:spcAft>
-              <a:defRPr sz="1800">
-                <a:solidFill>
-                  <a:srgbClr val="F9FAFB"/>
-                </a:solidFill>
-                <a:latin typeface="Calibri"/>
-              </a:defRPr>
-            </a:pPr>
-            <a:r>
-              <a:t>Equipos pequenos que comparten horarios</a:t>
-            </a:r>
-          </a:p>
-          <a:p>
-            <a:pPr>
-              <a:spcAft>
-                <a:spcPts val="800"/>
-              </a:spcAft>
-              <a:defRPr sz="1800">
-                <a:solidFill>
-                  <a:srgbClr val="F9FAFB"/>
-                </a:solidFill>
-                <a:latin typeface="Calibri"/>
-              </a:defRPr>
-            </a:pPr>
-            <a:r>
-              <a:t>Personas preocupadas por la privacidad de sus datos</a:t>
-            </a:r>
-          </a:p>
-          <a:p>
-            <a:pPr>
-              <a:spcAft>
-                <a:spcPts val="800"/>
-              </a:spcAft>
-              <a:defRPr sz="1800">
-                <a:solidFill>
-                  <a:srgbClr val="F9FAFB"/>
-                </a:solidFill>
-                <a:latin typeface="Calibri"/>
-              </a:defRPr>
-            </a:pPr>
-            <a:r>
-              <a:t>Usuarios en zonas con conectividad limitada</a:t>
-            </a:r>
-          </a:p>
-          <a:p>
-            <a:pPr>
-              <a:spcAft>
-                <a:spcPts val="800"/>
-              </a:spcAft>
-              <a:defRPr sz="1800">
-                <a:solidFill>
-                  <a:srgbClr val="F9FAFB"/>
-                </a:solidFill>
-                <a:latin typeface="Calibri"/>
-              </a:defRPr>
-            </a:pPr>
-            <a:r>
-              <a:t>Organizaciones que prefieren infraestructura propia (self-hosted)</a:t>
-            </a:r>
-          </a:p>
-          <a:p>
-            <a:pPr>
-              <a:spcAft>
-                <a:spcPts val="800"/>
-              </a:spcAft>
-              <a:defRPr sz="1800">
-                <a:solidFill>
-                  <a:srgbClr val="F9FAFB"/>
-                </a:solidFill>
-                <a:latin typeface="Calibri"/>
-              </a:defRPr>
-            </a:pPr>
-            <a:r>
-              <a:t>Cualquiera que quiera unificar turnos + calendario + recordatorios</a:t>
+            <a:pPr algn="l">
+              <a:defRPr sz="1800" b="1">
+                <a:solidFill>
+                  <a:srgbClr val="2563EB"/>
+                </a:solidFill>
+                <a:latin typeface="Calibri"/>
+              </a:defRPr>
+            </a:pPr>
+            <a:r>
+              <a:t>Backend (API)</a:t>
             </a:r>
           </a:p>
         </p:txBody>
@@ -6411,8 +6084,8 @@
         </p:nvSpPr>
         <p:spPr>
           <a:xfrm>
-            <a:off x="1371600" y="5303520"/>
-            <a:ext cx="9144000" cy="914400"/>
+            <a:off x="457200" y="2011680"/>
+            <a:ext cx="3474720" cy="3657600"/>
           </a:xfrm>
           <a:prstGeom prst="rect">
             <a:avLst/>
@@ -6425,26 +6098,407 @@
           </a:bodyPr>
           <a:lstStyle/>
           <a:p>
-            <a:pPr algn="ctr">
+            <a:pPr>
+              <a:spcAft>
+                <a:spcPts val="800"/>
+              </a:spcAft>
+              <a:defRPr sz="1400">
+                <a:solidFill>
+                  <a:srgbClr val="F9FAFB"/>
+                </a:solidFill>
+                <a:latin typeface="Calibri"/>
+              </a:defRPr>
+            </a:pPr>
+            <a:r>
+              <a:t>.NET 10 (C#)</a:t>
+            </a:r>
+          </a:p>
+          <a:p>
+            <a:pPr>
+              <a:spcAft>
+                <a:spcPts val="800"/>
+              </a:spcAft>
+              <a:defRPr sz="1400">
+                <a:solidFill>
+                  <a:srgbClr val="F9FAFB"/>
+                </a:solidFill>
+                <a:latin typeface="Calibri"/>
+              </a:defRPr>
+            </a:pPr>
+            <a:r>
+              <a:t>REST API + Docker</a:t>
+            </a:r>
+          </a:p>
+          <a:p>
+            <a:pPr>
+              <a:spcAft>
+                <a:spcPts val="800"/>
+              </a:spcAft>
+              <a:defRPr sz="1400">
+                <a:solidFill>
+                  <a:srgbClr val="F9FAFB"/>
+                </a:solidFill>
+                <a:latin typeface="Calibri"/>
+              </a:defRPr>
+            </a:pPr>
+            <a:r>
+              <a:t>MySQL / EF Core</a:t>
+            </a:r>
+          </a:p>
+          <a:p>
+            <a:pPr>
+              <a:spcAft>
+                <a:spcPts val="800"/>
+              </a:spcAft>
+              <a:defRPr sz="1400">
+                <a:solidFill>
+                  <a:srgbClr val="F9FAFB"/>
+                </a:solidFill>
+                <a:latin typeface="Calibri"/>
+              </a:defRPr>
+            </a:pPr>
+            <a:r>
+              <a:t>API Key auth</a:t>
+            </a:r>
+          </a:p>
+          <a:p>
+            <a:pPr>
+              <a:spcAft>
+                <a:spcPts val="800"/>
+              </a:spcAft>
+              <a:defRPr sz="1400">
+                <a:solidFill>
+                  <a:srgbClr val="F9FAFB"/>
+                </a:solidFill>
+                <a:latin typeface="Calibri"/>
+              </a:defRPr>
+            </a:pPr>
+            <a:r>
+              <a:t>Auto-hospedable</a:t>
+            </a:r>
+          </a:p>
+        </p:txBody>
+      </p:sp>
+      <p:sp>
+        <p:nvSpPr>
+          <p:cNvPr id="6" name="TextBox 5"/>
+          <p:cNvSpPr txBox="1"/>
+          <p:nvPr/>
+        </p:nvSpPr>
+        <p:spPr>
+          <a:xfrm>
+            <a:off x="4389120" y="1463040"/>
+            <a:ext cx="3474720" cy="457200"/>
+          </a:xfrm>
+          <a:prstGeom prst="rect">
+            <a:avLst/>
+          </a:prstGeom>
+          <a:noFill/>
+        </p:spPr>
+        <p:txBody>
+          <a:bodyPr wrap="square">
+            <a:spAutoFit/>
+          </a:bodyPr>
+          <a:lstStyle/>
+          <a:p>
+            <a:pPr algn="l">
               <a:defRPr sz="1800" b="1">
                 <a:solidFill>
-                  <a:srgbClr val="0B86D4"/>
-                </a:solidFill>
-                <a:latin typeface="Calibri"/>
-              </a:defRPr>
-            </a:pPr>
-            <a:r>
-              <a:t>"Si trabajas por turnos y valoras tu privacidad, Planixor es tu herramienta."</a:t>
+                  <a:srgbClr val="7C3AED"/>
+                </a:solidFill>
+                <a:latin typeface="Calibri"/>
+              </a:defRPr>
+            </a:pPr>
+            <a:r>
+              <a:t>Web (PWA)</a:t>
+            </a:r>
+          </a:p>
+        </p:txBody>
+      </p:sp>
+      <p:sp>
+        <p:nvSpPr>
+          <p:cNvPr id="7" name="TextBox 6"/>
+          <p:cNvSpPr txBox="1"/>
+          <p:nvPr/>
+        </p:nvSpPr>
+        <p:spPr>
+          <a:xfrm>
+            <a:off x="4389120" y="2011680"/>
+            <a:ext cx="3474720" cy="3657600"/>
+          </a:xfrm>
+          <a:prstGeom prst="rect">
+            <a:avLst/>
+          </a:prstGeom>
+          <a:noFill/>
+        </p:spPr>
+        <p:txBody>
+          <a:bodyPr wrap="square">
+            <a:spAutoFit/>
+          </a:bodyPr>
+          <a:lstStyle/>
+          <a:p>
+            <a:pPr>
+              <a:spcAft>
+                <a:spcPts val="800"/>
+              </a:spcAft>
+              <a:defRPr sz="1400">
+                <a:solidFill>
+                  <a:srgbClr val="F9FAFB"/>
+                </a:solidFill>
+                <a:latin typeface="Calibri"/>
+              </a:defRPr>
+            </a:pPr>
+            <a:r>
+              <a:t>React 19 + TypeScript</a:t>
+            </a:r>
+          </a:p>
+          <a:p>
+            <a:pPr>
+              <a:spcAft>
+                <a:spcPts val="800"/>
+              </a:spcAft>
+              <a:defRPr sz="1400">
+                <a:solidFill>
+                  <a:srgbClr val="F9FAFB"/>
+                </a:solidFill>
+                <a:latin typeface="Calibri"/>
+              </a:defRPr>
+            </a:pPr>
+            <a:r>
+              <a:t>Vite + Tailwind CSS v4</a:t>
+            </a:r>
+          </a:p>
+          <a:p>
+            <a:pPr>
+              <a:spcAft>
+                <a:spcPts val="800"/>
+              </a:spcAft>
+              <a:defRPr sz="1400">
+                <a:solidFill>
+                  <a:srgbClr val="F9FAFB"/>
+                </a:solidFill>
+                <a:latin typeface="Calibri"/>
+              </a:defRPr>
+            </a:pPr>
+            <a:r>
+              <a:t>IndexedDB offline</a:t>
+            </a:r>
+          </a:p>
+          <a:p>
+            <a:pPr>
+              <a:spcAft>
+                <a:spcPts val="800"/>
+              </a:spcAft>
+              <a:defRPr sz="1400">
+                <a:solidFill>
+                  <a:srgbClr val="F9FAFB"/>
+                </a:solidFill>
+                <a:latin typeface="Calibri"/>
+              </a:defRPr>
+            </a:pPr>
+            <a:r>
+              <a:t>React Router + Query</a:t>
+            </a:r>
+          </a:p>
+          <a:p>
+            <a:pPr>
+              <a:spcAft>
+                <a:spcPts val="800"/>
+              </a:spcAft>
+              <a:defRPr sz="1400">
+                <a:solidFill>
+                  <a:srgbClr val="F9FAFB"/>
+                </a:solidFill>
+                <a:latin typeface="Calibri"/>
+              </a:defRPr>
+            </a:pPr>
+            <a:r>
+              <a:t>Vitest + Playwright</a:t>
+            </a:r>
+          </a:p>
+        </p:txBody>
+      </p:sp>
+      <p:sp>
+        <p:nvSpPr>
+          <p:cNvPr id="8" name="TextBox 7"/>
+          <p:cNvSpPr txBox="1"/>
+          <p:nvPr/>
+        </p:nvSpPr>
+        <p:spPr>
+          <a:xfrm>
+            <a:off x="8321040" y="1463040"/>
+            <a:ext cx="3474720" cy="457200"/>
+          </a:xfrm>
+          <a:prstGeom prst="rect">
+            <a:avLst/>
+          </a:prstGeom>
+          <a:noFill/>
+        </p:spPr>
+        <p:txBody>
+          <a:bodyPr wrap="square">
+            <a:spAutoFit/>
+          </a:bodyPr>
+          <a:lstStyle/>
+          <a:p>
+            <a:pPr algn="l">
+              <a:defRPr sz="1800" b="1">
+                <a:solidFill>
+                  <a:srgbClr val="10B981"/>
+                </a:solidFill>
+                <a:latin typeface="Calibri"/>
+              </a:defRPr>
+            </a:pPr>
+            <a:r>
+              <a:t>Android</a:t>
+            </a:r>
+          </a:p>
+        </p:txBody>
+      </p:sp>
+      <p:sp>
+        <p:nvSpPr>
+          <p:cNvPr id="9" name="TextBox 8"/>
+          <p:cNvSpPr txBox="1"/>
+          <p:nvPr/>
+        </p:nvSpPr>
+        <p:spPr>
+          <a:xfrm>
+            <a:off x="8321040" y="2011680"/>
+            <a:ext cx="3474720" cy="3657600"/>
+          </a:xfrm>
+          <a:prstGeom prst="rect">
+            <a:avLst/>
+          </a:prstGeom>
+          <a:noFill/>
+        </p:spPr>
+        <p:txBody>
+          <a:bodyPr wrap="square">
+            <a:spAutoFit/>
+          </a:bodyPr>
+          <a:lstStyle/>
+          <a:p>
+            <a:pPr>
+              <a:spcAft>
+                <a:spcPts val="800"/>
+              </a:spcAft>
+              <a:defRPr sz="1400">
+                <a:solidFill>
+                  <a:srgbClr val="F9FAFB"/>
+                </a:solidFill>
+                <a:latin typeface="Calibri"/>
+              </a:defRPr>
+            </a:pPr>
+            <a:r>
+              <a:t>Kotlin + Compose</a:t>
+            </a:r>
+          </a:p>
+          <a:p>
+            <a:pPr>
+              <a:spcAft>
+                <a:spcPts val="800"/>
+              </a:spcAft>
+              <a:defRPr sz="1400">
+                <a:solidFill>
+                  <a:srgbClr val="F9FAFB"/>
+                </a:solidFill>
+                <a:latin typeface="Calibri"/>
+              </a:defRPr>
+            </a:pPr>
+            <a:r>
+              <a:t>Material Design 3</a:t>
+            </a:r>
+          </a:p>
+          <a:p>
+            <a:pPr>
+              <a:spcAft>
+                <a:spcPts val="800"/>
+              </a:spcAft>
+              <a:defRPr sz="1400">
+                <a:solidFill>
+                  <a:srgbClr val="F9FAFB"/>
+                </a:solidFill>
+                <a:latin typeface="Calibri"/>
+              </a:defRPr>
+            </a:pPr>
+            <a:r>
+              <a:t>Room (SQLite)</a:t>
+            </a:r>
+          </a:p>
+          <a:p>
+            <a:pPr>
+              <a:spcAft>
+                <a:spcPts val="800"/>
+              </a:spcAft>
+              <a:defRPr sz="1400">
+                <a:solidFill>
+                  <a:srgbClr val="F9FAFB"/>
+                </a:solidFill>
+                <a:latin typeface="Calibri"/>
+              </a:defRPr>
+            </a:pPr>
+            <a:r>
+              <a:t>Retrofit + OkHttp</a:t>
+            </a:r>
+          </a:p>
+          <a:p>
+            <a:pPr>
+              <a:spcAft>
+                <a:spcPts val="800"/>
+              </a:spcAft>
+              <a:defRPr sz="1400">
+                <a:solidFill>
+                  <a:srgbClr val="F9FAFB"/>
+                </a:solidFill>
+                <a:latin typeface="Calibri"/>
+              </a:defRPr>
+            </a:pPr>
+            <a:r>
+              <a:t>DataStore prefs</a:t>
+            </a:r>
+          </a:p>
+        </p:txBody>
+      </p:sp>
+      <p:sp>
+        <p:nvSpPr>
+          <p:cNvPr id="10" name="TextBox 9"/>
+          <p:cNvSpPr txBox="1"/>
+          <p:nvPr/>
+        </p:nvSpPr>
+        <p:spPr>
+          <a:xfrm>
+            <a:off x="731520" y="5669280"/>
+            <a:ext cx="10058400" cy="548640"/>
+          </a:xfrm>
+          <a:prstGeom prst="rect">
+            <a:avLst/>
+          </a:prstGeom>
+          <a:noFill/>
+        </p:spPr>
+        <p:txBody>
+          <a:bodyPr wrap="square">
+            <a:spAutoFit/>
+          </a:bodyPr>
+          <a:lstStyle/>
+          <a:p>
+            <a:pPr algn="l">
+              <a:defRPr sz="1400" b="1">
+                <a:solidFill>
+                  <a:srgbClr val="9CA3AF"/>
+                </a:solidFill>
+                <a:latin typeface="Calibri"/>
+              </a:defRPr>
+            </a:pPr>
+            <a:r>
+              <a:t>Arquitectura offline-first: los clientes operan independientemente. El backend es solo un hub de sincronizacion opcional.</a:t>
             </a:r>
           </a:p>
         </p:txBody>
       </p:sp>
       <p:pic>
         <p:nvPicPr>
-          <p:cNvPr id="6" name="Imagen 5">
+          <p:cNvPr id="11" name="Imagen 10" descr="Archivo:Microsoft .NET logo.png">
             <a:extLst>
               <a:ext uri="{FF2B5EF4-FFF2-40B4-BE49-F238E27FC236}">
-                <a16:creationId xmlns:a16="http://schemas.microsoft.com/office/drawing/2014/main" id="{F6668AB1-26FD-6831-854A-E3938A8EF15F}"/>
+                <a16:creationId xmlns:a16="http://schemas.microsoft.com/office/drawing/2014/main" id="{1B6B9DBE-F187-D333-1494-51359BAC60B8}"/>
               </a:ext>
             </a:extLst>
           </p:cNvPr>
@@ -6461,8 +6515,68 @@
         </p:blipFill>
         <p:spPr>
           <a:xfrm>
-            <a:off x="9052560" y="954995"/>
-            <a:ext cx="1645920" cy="3657600"/>
+            <a:off x="833417" y="3948731"/>
+            <a:ext cx="1391077" cy="1391077"/>
+          </a:xfrm>
+          <a:prstGeom prst="rect">
+            <a:avLst/>
+          </a:prstGeom>
+        </p:spPr>
+      </p:pic>
+      <p:pic>
+        <p:nvPicPr>
+          <p:cNvPr id="13" name="Imagen 12">
+            <a:extLst>
+              <a:ext uri="{FF2B5EF4-FFF2-40B4-BE49-F238E27FC236}">
+                <a16:creationId xmlns:a16="http://schemas.microsoft.com/office/drawing/2014/main" id="{8466586A-82F1-84CA-BBEF-1E2EE5422FA5}"/>
+              </a:ext>
+            </a:extLst>
+          </p:cNvPr>
+          <p:cNvPicPr>
+            <a:picLocks noChangeAspect="1"/>
+          </p:cNvPicPr>
+          <p:nvPr/>
+        </p:nvPicPr>
+        <p:blipFill>
+          <a:blip r:embed="rId3"/>
+          <a:stretch>
+            <a:fillRect/>
+          </a:stretch>
+        </p:blipFill>
+        <p:spPr>
+          <a:xfrm>
+            <a:off x="4523857" y="3948731"/>
+            <a:ext cx="1429995" cy="1391462"/>
+          </a:xfrm>
+          <a:prstGeom prst="rect">
+            <a:avLst/>
+          </a:prstGeom>
+        </p:spPr>
+      </p:pic>
+      <p:pic>
+        <p:nvPicPr>
+          <p:cNvPr id="14" name="Imagen 13" descr="Icono Android">
+            <a:extLst>
+              <a:ext uri="{FF2B5EF4-FFF2-40B4-BE49-F238E27FC236}">
+                <a16:creationId xmlns:a16="http://schemas.microsoft.com/office/drawing/2014/main" id="{E31EC0D8-5393-9284-AE49-9DB828D419FD}"/>
+              </a:ext>
+            </a:extLst>
+          </p:cNvPr>
+          <p:cNvPicPr>
+            <a:picLocks noChangeAspect="1"/>
+          </p:cNvPicPr>
+          <p:nvPr/>
+        </p:nvPicPr>
+        <p:blipFill>
+          <a:blip r:embed="rId4"/>
+          <a:stretch>
+            <a:fillRect/>
+          </a:stretch>
+        </p:blipFill>
+        <p:spPr>
+          <a:xfrm>
+            <a:off x="8265069" y="3948731"/>
+            <a:ext cx="1391077" cy="1391077"/>
           </a:xfrm>
           <a:prstGeom prst="rect">
             <a:avLst/>
@@ -6517,7 +6631,7 @@
             <a:avLst/>
           </a:prstGeom>
           <a:solidFill>
-            <a:srgbClr val="2563EB"/>
+            <a:srgbClr val="10B981"/>
           </a:solidFill>
           <a:ln>
             <a:noFill/>
@@ -6577,7 +6691,7 @@
               </a:defRPr>
             </a:pPr>
             <a:r>
-              <a:t>Ventajas Competitivas</a:t>
+              <a:t>Para Quien es Planixor?</a:t>
             </a:r>
           </a:p>
         </p:txBody>
@@ -6590,8 +6704,8 @@
         </p:nvSpPr>
         <p:spPr>
           <a:xfrm>
-            <a:off x="731520" y="1371600"/>
-            <a:ext cx="3657600" cy="457200"/>
+            <a:off x="731520" y="1463040"/>
+            <a:ext cx="10058400" cy="3657600"/>
           </a:xfrm>
           <a:prstGeom prst="rect">
             <a:avLst/>
@@ -6604,16 +6718,115 @@
           </a:bodyPr>
           <a:lstStyle/>
           <a:p>
-            <a:pPr algn="l">
-              <a:defRPr sz="2000" b="1">
-                <a:solidFill>
-                  <a:srgbClr val="10B981"/>
-                </a:solidFill>
-                <a:latin typeface="Calibri"/>
-              </a:defRPr>
-            </a:pPr>
-            <a:r>
-              <a:t>Planixor</a:t>
+            <a:pPr>
+              <a:spcAft>
+                <a:spcPts val="800"/>
+              </a:spcAft>
+              <a:defRPr sz="1800">
+                <a:solidFill>
+                  <a:srgbClr val="F9FAFB"/>
+                </a:solidFill>
+                <a:latin typeface="Calibri"/>
+              </a:defRPr>
+            </a:pPr>
+            <a:r>
+              <a:t>Profesionales con turnos rotativos (salud, seguridad, hosteleria)</a:t>
+            </a:r>
+          </a:p>
+          <a:p>
+            <a:pPr>
+              <a:spcAft>
+                <a:spcPts val="800"/>
+              </a:spcAft>
+              <a:defRPr sz="1800">
+                <a:solidFill>
+                  <a:srgbClr val="F9FAFB"/>
+                </a:solidFill>
+                <a:latin typeface="Calibri"/>
+              </a:defRPr>
+            </a:pPr>
+            <a:r>
+              <a:t>Freelancers que necesitan control de horas trabajadas</a:t>
+            </a:r>
+          </a:p>
+          <a:p>
+            <a:pPr>
+              <a:spcAft>
+                <a:spcPts val="800"/>
+              </a:spcAft>
+              <a:defRPr sz="1800">
+                <a:solidFill>
+                  <a:srgbClr val="F9FAFB"/>
+                </a:solidFill>
+                <a:latin typeface="Calibri"/>
+              </a:defRPr>
+            </a:pPr>
+            <a:r>
+              <a:t>Equipos pequenos que comparten horarios</a:t>
+            </a:r>
+          </a:p>
+          <a:p>
+            <a:pPr>
+              <a:spcAft>
+                <a:spcPts val="800"/>
+              </a:spcAft>
+              <a:defRPr sz="1800">
+                <a:solidFill>
+                  <a:srgbClr val="F9FAFB"/>
+                </a:solidFill>
+                <a:latin typeface="Calibri"/>
+              </a:defRPr>
+            </a:pPr>
+            <a:r>
+              <a:t>Personas preocupadas por la privacidad de sus datos</a:t>
+            </a:r>
+          </a:p>
+          <a:p>
+            <a:pPr>
+              <a:spcAft>
+                <a:spcPts val="800"/>
+              </a:spcAft>
+              <a:defRPr sz="1800">
+                <a:solidFill>
+                  <a:srgbClr val="F9FAFB"/>
+                </a:solidFill>
+                <a:latin typeface="Calibri"/>
+              </a:defRPr>
+            </a:pPr>
+            <a:r>
+              <a:t>Usuarios en zonas con conectividad limitada</a:t>
+            </a:r>
+          </a:p>
+          <a:p>
+            <a:pPr>
+              <a:spcAft>
+                <a:spcPts val="800"/>
+              </a:spcAft>
+              <a:defRPr sz="1800">
+                <a:solidFill>
+                  <a:srgbClr val="F9FAFB"/>
+                </a:solidFill>
+                <a:latin typeface="Calibri"/>
+              </a:defRPr>
+            </a:pPr>
+            <a:r>
+              <a:t>Organizaciones que prefieren infraestructura propia (self-hosted)</a:t>
+            </a:r>
+          </a:p>
+          <a:p>
+            <a:pPr>
+              <a:spcAft>
+                <a:spcPts val="800"/>
+              </a:spcAft>
+              <a:defRPr sz="1800">
+                <a:solidFill>
+                  <a:srgbClr val="F9FAFB"/>
+                </a:solidFill>
+                <a:latin typeface="Calibri"/>
+              </a:defRPr>
+            </a:pPr>
+            <a:r>
+              <a:t>Cualquiera que quiera unificar turnos + calendario + recordatorios</a:t>
             </a:r>
           </a:p>
         </p:txBody>
@@ -6626,8 +6839,8 @@
         </p:nvSpPr>
         <p:spPr>
           <a:xfrm>
-            <a:off x="6400800" y="1371600"/>
-            <a:ext cx="4572000" cy="457200"/>
+            <a:off x="1371600" y="5303520"/>
+            <a:ext cx="9144000" cy="914400"/>
           </a:xfrm>
           <a:prstGeom prst="rect">
             <a:avLst/>
@@ -6640,290 +6853,50 @@
           </a:bodyPr>
           <a:lstStyle/>
           <a:p>
-            <a:pPr algn="l">
-              <a:defRPr sz="2000" b="1">
-                <a:solidFill>
-                  <a:srgbClr val="EF4444"/>
-                </a:solidFill>
-                <a:latin typeface="Calibri"/>
-              </a:defRPr>
-            </a:pPr>
-            <a:r>
-              <a:t>Competencia tipica</a:t>
-            </a:r>
-          </a:p>
-        </p:txBody>
-      </p:sp>
-      <p:sp>
-        <p:nvSpPr>
-          <p:cNvPr id="6" name="TextBox 5"/>
-          <p:cNvSpPr txBox="1"/>
-          <p:nvPr/>
-        </p:nvSpPr>
-        <p:spPr>
-          <a:xfrm>
-            <a:off x="731520" y="1920240"/>
-            <a:ext cx="5029200" cy="4114800"/>
-          </a:xfrm>
-          <a:prstGeom prst="rect">
-            <a:avLst/>
-          </a:prstGeom>
-          <a:noFill/>
-        </p:spPr>
-        <p:txBody>
-          <a:bodyPr wrap="square">
-            <a:spAutoFit/>
-          </a:bodyPr>
-          <a:lstStyle/>
-          <a:p>
-            <a:pPr>
-              <a:spcAft>
-                <a:spcPts val="800"/>
-              </a:spcAft>
-              <a:defRPr sz="1400">
-                <a:solidFill>
-                  <a:srgbClr val="F9FAFB"/>
-                </a:solidFill>
-                <a:latin typeface="Calibri"/>
-              </a:defRPr>
-            </a:pPr>
-            <a:r>
-              <a:t>100% offline, sin dependencia de internet</a:t>
-            </a:r>
-          </a:p>
-          <a:p>
-            <a:pPr>
-              <a:spcAft>
-                <a:spcPts val="800"/>
-              </a:spcAft>
-              <a:defRPr sz="1400">
-                <a:solidFill>
-                  <a:srgbClr val="F9FAFB"/>
-                </a:solidFill>
-                <a:latin typeface="Calibri"/>
-              </a:defRPr>
-            </a:pPr>
-            <a:r>
-              <a:t>Datos solo en tu dispositivo</a:t>
-            </a:r>
-          </a:p>
-          <a:p>
-            <a:pPr>
-              <a:spcAft>
-                <a:spcPts val="800"/>
-              </a:spcAft>
-              <a:defRPr sz="1400">
-                <a:solidFill>
-                  <a:srgbClr val="F9FAFB"/>
-                </a:solidFill>
-                <a:latin typeface="Calibri"/>
-              </a:defRPr>
-            </a:pPr>
-            <a:r>
-              <a:t>Sync con TU servidor (self-hosted)</a:t>
-            </a:r>
-          </a:p>
-          <a:p>
-            <a:pPr>
-              <a:spcAft>
-                <a:spcPts val="800"/>
-              </a:spcAft>
-              <a:defRPr sz="1400">
-                <a:solidFill>
-                  <a:srgbClr val="F9FAFB"/>
-                </a:solidFill>
-                <a:latin typeface="Calibri"/>
-              </a:defRPr>
-            </a:pPr>
-            <a:r>
-              <a:t>Sin suscripcion mensual para nube</a:t>
-            </a:r>
-          </a:p>
-          <a:p>
-            <a:pPr>
-              <a:spcAft>
-                <a:spcPts val="800"/>
-              </a:spcAft>
-              <a:defRPr sz="1400">
-                <a:solidFill>
-                  <a:srgbClr val="F9FAFB"/>
-                </a:solidFill>
-                <a:latin typeface="Calibri"/>
-              </a:defRPr>
-            </a:pPr>
-            <a:r>
-              <a:t>Codigo multiplataforma (web + Android)</a:t>
-            </a:r>
-          </a:p>
-          <a:p>
-            <a:pPr>
-              <a:spcAft>
-                <a:spcPts val="800"/>
-              </a:spcAft>
-              <a:defRPr sz="1400">
-                <a:solidFill>
-                  <a:srgbClr val="F9FAFB"/>
-                </a:solidFill>
-                <a:latin typeface="Calibri"/>
-              </a:defRPr>
-            </a:pPr>
-            <a:r>
-              <a:t>Open-source / auto-desplegable</a:t>
-            </a:r>
-          </a:p>
-          <a:p>
-            <a:pPr>
-              <a:spcAft>
-                <a:spcPts val="800"/>
-              </a:spcAft>
-              <a:defRPr sz="1400">
-                <a:solidFill>
-                  <a:srgbClr val="F9FAFB"/>
-                </a:solidFill>
-                <a:latin typeface="Calibri"/>
-              </a:defRPr>
-            </a:pPr>
-            <a:r>
-              <a:t>Privacidad por diseno (GDPR friendly)</a:t>
-            </a:r>
-          </a:p>
-        </p:txBody>
-      </p:sp>
-      <p:sp>
-        <p:nvSpPr>
-          <p:cNvPr id="7" name="TextBox 6"/>
-          <p:cNvSpPr txBox="1"/>
-          <p:nvPr/>
-        </p:nvSpPr>
-        <p:spPr>
-          <a:xfrm>
-            <a:off x="6400800" y="1920240"/>
-            <a:ext cx="5029200" cy="4114800"/>
-          </a:xfrm>
-          <a:prstGeom prst="rect">
-            <a:avLst/>
-          </a:prstGeom>
-          <a:noFill/>
-        </p:spPr>
-        <p:txBody>
-          <a:bodyPr wrap="square">
-            <a:spAutoFit/>
-          </a:bodyPr>
-          <a:lstStyle/>
-          <a:p>
-            <a:pPr>
-              <a:spcAft>
-                <a:spcPts val="800"/>
-              </a:spcAft>
-              <a:defRPr sz="1400">
-                <a:solidFill>
-                  <a:srgbClr val="9CA3AF"/>
-                </a:solidFill>
-                <a:latin typeface="Calibri"/>
-              </a:defRPr>
-            </a:pPr>
-            <a:r>
-              <a:t>Requiere internet para funcionar</a:t>
-            </a:r>
-          </a:p>
-          <a:p>
-            <a:pPr>
-              <a:spcAft>
-                <a:spcPts val="800"/>
-              </a:spcAft>
-              <a:defRPr sz="1400">
-                <a:solidFill>
-                  <a:srgbClr val="9CA3AF"/>
-                </a:solidFill>
-                <a:latin typeface="Calibri"/>
-              </a:defRPr>
-            </a:pPr>
-            <a:r>
-              <a:t>Datos en servidores de terceros</a:t>
-            </a:r>
-          </a:p>
-          <a:p>
-            <a:pPr>
-              <a:spcAft>
-                <a:spcPts val="800"/>
-              </a:spcAft>
-              <a:defRPr sz="1400">
-                <a:solidFill>
-                  <a:srgbClr val="9CA3AF"/>
-                </a:solidFill>
-                <a:latin typeface="Calibri"/>
-              </a:defRPr>
-            </a:pPr>
-            <a:r>
-              <a:t>Sync con servidores del proveedor</a:t>
-            </a:r>
-          </a:p>
-          <a:p>
-            <a:pPr>
-              <a:spcAft>
-                <a:spcPts val="800"/>
-              </a:spcAft>
-              <a:defRPr sz="1400">
-                <a:solidFill>
-                  <a:srgbClr val="9CA3AF"/>
-                </a:solidFill>
-                <a:latin typeface="Calibri"/>
-              </a:defRPr>
-            </a:pPr>
-            <a:r>
-              <a:t>Suscripciones de $5-15/mes</a:t>
-            </a:r>
-          </a:p>
-          <a:p>
-            <a:pPr>
-              <a:spcAft>
-                <a:spcPts val="800"/>
-              </a:spcAft>
-              <a:defRPr sz="1400">
-                <a:solidFill>
-                  <a:srgbClr val="9CA3AF"/>
-                </a:solidFill>
-                <a:latin typeface="Calibri"/>
-              </a:defRPr>
-            </a:pPr>
-            <a:r>
-              <a:t>Solo una plataforma o web basica</a:t>
-            </a:r>
-          </a:p>
-          <a:p>
-            <a:pPr>
-              <a:spcAft>
-                <a:spcPts val="800"/>
-              </a:spcAft>
-              <a:defRPr sz="1400">
-                <a:solidFill>
-                  <a:srgbClr val="9CA3AF"/>
-                </a:solidFill>
-                <a:latin typeface="Calibri"/>
-              </a:defRPr>
-            </a:pPr>
-            <a:r>
-              <a:t>SaaS cerrado, sin control</a:t>
-            </a:r>
-          </a:p>
-          <a:p>
-            <a:pPr>
-              <a:spcAft>
-                <a:spcPts val="800"/>
-              </a:spcAft>
-              <a:defRPr sz="1400">
-                <a:solidFill>
-                  <a:srgbClr val="9CA3AF"/>
-                </a:solidFill>
-                <a:latin typeface="Calibri"/>
-              </a:defRPr>
-            </a:pPr>
-            <a:r>
-              <a:t>Politicas de privacidad ambiguas</a:t>
-            </a:r>
-          </a:p>
-        </p:txBody>
-      </p:sp>
+            <a:pPr algn="ctr">
+              <a:defRPr sz="1800" b="1">
+                <a:solidFill>
+                  <a:srgbClr val="0B86D4"/>
+                </a:solidFill>
+                <a:latin typeface="Calibri"/>
+              </a:defRPr>
+            </a:pPr>
+            <a:r>
+              <a:t>"Si trabajas por turnos y valoras tu privacidad, Planixor es tu herramienta."</a:t>
+            </a:r>
+          </a:p>
+        </p:txBody>
+      </p:sp>
+      <p:pic>
+        <p:nvPicPr>
+          <p:cNvPr id="6" name="Imagen 5">
+            <a:extLst>
+              <a:ext uri="{FF2B5EF4-FFF2-40B4-BE49-F238E27FC236}">
+                <a16:creationId xmlns:a16="http://schemas.microsoft.com/office/drawing/2014/main" id="{F6668AB1-26FD-6831-854A-E3938A8EF15F}"/>
+              </a:ext>
+            </a:extLst>
+          </p:cNvPr>
+          <p:cNvPicPr>
+            <a:picLocks noChangeAspect="1"/>
+          </p:cNvPicPr>
+          <p:nvPr/>
+        </p:nvPicPr>
+        <p:blipFill>
+          <a:blip r:embed="rId2"/>
+          <a:stretch>
+            <a:fillRect/>
+          </a:stretch>
+        </p:blipFill>
+        <p:spPr>
+          <a:xfrm>
+            <a:off x="9052560" y="954995"/>
+            <a:ext cx="1645920" cy="3657600"/>
+          </a:xfrm>
+          <a:prstGeom prst="rect">
+            <a:avLst/>
+          </a:prstGeom>
+        </p:spPr>
+      </p:pic>
     </p:spTree>
   </p:cSld>
   <p:clrMapOvr>
@@ -6966,7 +6939,7 @@
         <p:spPr>
           <a:xfrm>
             <a:off x="0" y="0"/>
-            <a:ext cx="12191695" cy="73152"/>
+            <a:ext cx="12191695" cy="54864"/>
           </a:xfrm>
           <a:prstGeom prst="rect">
             <a:avLst/>
@@ -7009,8 +6982,8 @@
         </p:nvSpPr>
         <p:spPr>
           <a:xfrm>
-            <a:off x="4114800" y="1371600"/>
-            <a:ext cx="4114800" cy="914400"/>
+            <a:off x="731520" y="457200"/>
+            <a:ext cx="9144000" cy="731520"/>
           </a:xfrm>
           <a:prstGeom prst="rect">
             <a:avLst/>
@@ -7023,8 +6996,8 @@
           </a:bodyPr>
           <a:lstStyle/>
           <a:p>
-            <a:pPr algn="ctr">
-              <a:defRPr sz="5200" b="1">
+            <a:pPr algn="l">
+              <a:defRPr sz="3600" b="1">
                 <a:solidFill>
                   <a:srgbClr val="FFFFFF"/>
                 </a:solidFill>
@@ -7032,7 +7005,7 @@
               </a:defRPr>
             </a:pPr>
             <a:r>
-              <a:t>Planixor</a:t>
+              <a:t>Ventajas Competitivas</a:t>
             </a:r>
           </a:p>
         </p:txBody>
@@ -7045,8 +7018,8 @@
         </p:nvSpPr>
         <p:spPr>
           <a:xfrm>
-            <a:off x="2286000" y="2560320"/>
-            <a:ext cx="7772400" cy="731520"/>
+            <a:off x="731520" y="1371600"/>
+            <a:ext cx="3657600" cy="457200"/>
           </a:xfrm>
           <a:prstGeom prst="rect">
             <a:avLst/>
@@ -7059,92 +7032,30 @@
           </a:bodyPr>
           <a:lstStyle/>
           <a:p>
-            <a:pPr algn="ctr">
-              <a:defRPr sz="2800" b="0">
-                <a:solidFill>
-                  <a:srgbClr val="9CA3AF"/>
-                </a:solidFill>
-                <a:latin typeface="Calibri"/>
-              </a:defRPr>
-            </a:pPr>
-            <a:r>
-              <a:t>Organiza tu tiempo. Potencia tu dia.</a:t>
-            </a:r>
-          </a:p>
-        </p:txBody>
-      </p:sp>
-      <p:sp>
-        <p:nvSpPr>
-          <p:cNvPr id="5" name="Rounded Rectangle 4"/>
-          <p:cNvSpPr/>
-          <p:nvPr/>
-        </p:nvSpPr>
-        <p:spPr>
-          <a:xfrm>
-            <a:off x="3200400" y="3657600"/>
-            <a:ext cx="5760720" cy="1097280"/>
-          </a:xfrm>
-          <a:prstGeom prst="roundRect">
-            <a:avLst/>
-          </a:prstGeom>
-          <a:solidFill>
-            <a:srgbClr val="2563EB"/>
-          </a:solidFill>
-          <a:ln>
-            <a:noFill/>
-          </a:ln>
-        </p:spPr>
-        <p:style>
-          <a:lnRef idx="1">
-            <a:schemeClr val="accent1"/>
-          </a:lnRef>
-          <a:fillRef idx="3">
-            <a:schemeClr val="accent1"/>
-          </a:fillRef>
-          <a:effectRef idx="2">
-            <a:schemeClr val="accent1"/>
-          </a:effectRef>
-          <a:fontRef idx="minor">
-            <a:schemeClr val="lt1"/>
-          </a:fontRef>
-        </p:style>
-        <p:txBody>
-          <a:bodyPr rtlCol="0" anchor="ctr"/>
-          <a:lstStyle/>
-          <a:p>
-            <a:pPr algn="ctr">
-              <a:defRPr sz="2200" b="1">
-                <a:solidFill>
-                  <a:srgbClr val="FFFFFF"/>
-                </a:solidFill>
-              </a:defRPr>
-            </a:pPr>
-            <a:r>
-              <a:rPr dirty="0" err="1"/>
-              <a:t>Comienza</a:t>
-            </a:r>
-            <a:r>
-              <a:rPr dirty="0"/>
-              <a:t> hoy — 100% gratis, 100% </a:t>
-            </a:r>
-            <a:r>
-              <a:rPr dirty="0" err="1"/>
-              <a:t>tuyo</a:t>
-            </a:r>
-            <a:endParaRPr dirty="0"/>
-          </a:p>
-        </p:txBody>
-      </p:sp>
-      <p:sp>
-        <p:nvSpPr>
-          <p:cNvPr id="6" name="TextBox 5"/>
+            <a:pPr algn="l">
+              <a:defRPr sz="2000" b="1">
+                <a:solidFill>
+                  <a:srgbClr val="10B981"/>
+                </a:solidFill>
+                <a:latin typeface="Calibri"/>
+              </a:defRPr>
+            </a:pPr>
+            <a:r>
+              <a:t>Planixor</a:t>
+            </a:r>
+          </a:p>
+        </p:txBody>
+      </p:sp>
+      <p:sp>
+        <p:nvSpPr>
+          <p:cNvPr id="5" name="TextBox 4"/>
           <p:cNvSpPr txBox="1"/>
           <p:nvPr/>
         </p:nvSpPr>
         <p:spPr>
           <a:xfrm>
-            <a:off x="2286000" y="5303520"/>
-            <a:ext cx="7772400" cy="338554"/>
+            <a:off x="6400800" y="1371600"/>
+            <a:ext cx="4572000" cy="457200"/>
           </a:xfrm>
           <a:prstGeom prst="rect">
             <a:avLst/>
@@ -7157,52 +7068,30 @@
           </a:bodyPr>
           <a:lstStyle/>
           <a:p>
-            <a:pPr algn="ctr">
-              <a:defRPr sz="1600" b="0">
-                <a:solidFill>
-                  <a:srgbClr val="9CA3AF"/>
-                </a:solidFill>
-                <a:latin typeface="Calibri"/>
-              </a:defRPr>
-            </a:pPr>
-            <a:r>
-              <a:rPr lang="es-ES" dirty="0"/>
-              <a:t>p</a:t>
-            </a:r>
-            <a:r>
-              <a:rPr dirty="0" err="1"/>
-              <a:t>lanixor</a:t>
-            </a:r>
-            <a:r>
-              <a:rPr lang="es-ES" dirty="0"/>
-              <a:t>.</a:t>
-            </a:r>
-            <a:r>
-              <a:rPr lang="es-ES" dirty="0" err="1"/>
-              <a:t>codenized</a:t>
-            </a:r>
-            <a:r>
-              <a:rPr dirty="0"/>
-              <a:t>.com  |  by </a:t>
-            </a:r>
-            <a:r>
-              <a:rPr dirty="0" err="1"/>
-              <a:t>Codenized</a:t>
-            </a:r>
-            <a:endParaRPr dirty="0"/>
-          </a:p>
-        </p:txBody>
-      </p:sp>
-      <p:sp>
-        <p:nvSpPr>
-          <p:cNvPr id="7" name="TextBox 6"/>
+            <a:pPr algn="l">
+              <a:defRPr sz="2000" b="1">
+                <a:solidFill>
+                  <a:srgbClr val="EF4444"/>
+                </a:solidFill>
+                <a:latin typeface="Calibri"/>
+              </a:defRPr>
+            </a:pPr>
+            <a:r>
+              <a:t>Competencia tipica</a:t>
+            </a:r>
+          </a:p>
+        </p:txBody>
+      </p:sp>
+      <p:sp>
+        <p:nvSpPr>
+          <p:cNvPr id="6" name="TextBox 5"/>
           <p:cNvSpPr txBox="1"/>
           <p:nvPr/>
         </p:nvSpPr>
         <p:spPr>
           <a:xfrm>
-            <a:off x="2286000" y="5852160"/>
-            <a:ext cx="7772400" cy="457200"/>
+            <a:off x="731520" y="1920240"/>
+            <a:ext cx="5029200" cy="4114800"/>
           </a:xfrm>
           <a:prstGeom prst="rect">
             <a:avLst/>
@@ -7215,8 +7104,146 @@
           </a:bodyPr>
           <a:lstStyle/>
           <a:p>
-            <a:pPr algn="ctr">
-              <a:defRPr sz="1400" b="0">
+            <a:pPr>
+              <a:spcAft>
+                <a:spcPts val="800"/>
+              </a:spcAft>
+              <a:defRPr sz="1400">
+                <a:solidFill>
+                  <a:srgbClr val="F9FAFB"/>
+                </a:solidFill>
+                <a:latin typeface="Calibri"/>
+              </a:defRPr>
+            </a:pPr>
+            <a:r>
+              <a:t>100% offline, sin dependencia de internet</a:t>
+            </a:r>
+          </a:p>
+          <a:p>
+            <a:pPr>
+              <a:spcAft>
+                <a:spcPts val="800"/>
+              </a:spcAft>
+              <a:defRPr sz="1400">
+                <a:solidFill>
+                  <a:srgbClr val="F9FAFB"/>
+                </a:solidFill>
+                <a:latin typeface="Calibri"/>
+              </a:defRPr>
+            </a:pPr>
+            <a:r>
+              <a:t>Datos solo en tu dispositivo</a:t>
+            </a:r>
+          </a:p>
+          <a:p>
+            <a:pPr>
+              <a:spcAft>
+                <a:spcPts val="800"/>
+              </a:spcAft>
+              <a:defRPr sz="1400">
+                <a:solidFill>
+                  <a:srgbClr val="F9FAFB"/>
+                </a:solidFill>
+                <a:latin typeface="Calibri"/>
+              </a:defRPr>
+            </a:pPr>
+            <a:r>
+              <a:t>Sync con TU servidor (self-hosted)</a:t>
+            </a:r>
+          </a:p>
+          <a:p>
+            <a:pPr>
+              <a:spcAft>
+                <a:spcPts val="800"/>
+              </a:spcAft>
+              <a:defRPr sz="1400">
+                <a:solidFill>
+                  <a:srgbClr val="F9FAFB"/>
+                </a:solidFill>
+                <a:latin typeface="Calibri"/>
+              </a:defRPr>
+            </a:pPr>
+            <a:r>
+              <a:t>Sin suscripcion mensual para nube</a:t>
+            </a:r>
+          </a:p>
+          <a:p>
+            <a:pPr>
+              <a:spcAft>
+                <a:spcPts val="800"/>
+              </a:spcAft>
+              <a:defRPr sz="1400">
+                <a:solidFill>
+                  <a:srgbClr val="F9FAFB"/>
+                </a:solidFill>
+                <a:latin typeface="Calibri"/>
+              </a:defRPr>
+            </a:pPr>
+            <a:r>
+              <a:t>Codigo multiplataforma (web + Android)</a:t>
+            </a:r>
+          </a:p>
+          <a:p>
+            <a:pPr>
+              <a:spcAft>
+                <a:spcPts val="800"/>
+              </a:spcAft>
+              <a:defRPr sz="1400">
+                <a:solidFill>
+                  <a:srgbClr val="F9FAFB"/>
+                </a:solidFill>
+                <a:latin typeface="Calibri"/>
+              </a:defRPr>
+            </a:pPr>
+            <a:r>
+              <a:t>Open-source / auto-desplegable</a:t>
+            </a:r>
+          </a:p>
+          <a:p>
+            <a:pPr>
+              <a:spcAft>
+                <a:spcPts val="800"/>
+              </a:spcAft>
+              <a:defRPr sz="1400">
+                <a:solidFill>
+                  <a:srgbClr val="F9FAFB"/>
+                </a:solidFill>
+                <a:latin typeface="Calibri"/>
+              </a:defRPr>
+            </a:pPr>
+            <a:r>
+              <a:t>Privacidad por diseno (GDPR friendly)</a:t>
+            </a:r>
+          </a:p>
+        </p:txBody>
+      </p:sp>
+      <p:sp>
+        <p:nvSpPr>
+          <p:cNvPr id="7" name="TextBox 6"/>
+          <p:cNvSpPr txBox="1"/>
+          <p:nvPr/>
+        </p:nvSpPr>
+        <p:spPr>
+          <a:xfrm>
+            <a:off x="6400800" y="1920240"/>
+            <a:ext cx="5029200" cy="4114800"/>
+          </a:xfrm>
+          <a:prstGeom prst="rect">
+            <a:avLst/>
+          </a:prstGeom>
+          <a:noFill/>
+        </p:spPr>
+        <p:txBody>
+          <a:bodyPr wrap="square">
+            <a:spAutoFit/>
+          </a:bodyPr>
+          <a:lstStyle/>
+          <a:p>
+            <a:pPr>
+              <a:spcAft>
+                <a:spcPts val="800"/>
+              </a:spcAft>
+              <a:defRPr sz="1400">
                 <a:solidFill>
                   <a:srgbClr val="9CA3AF"/>
                 </a:solidFill>
@@ -7224,47 +7251,107 @@
               </a:defRPr>
             </a:pPr>
             <a:r>
-              <a:t>Web (PWA) + Android  |  Offline-First  |  Self-Hosted Sync</a:t>
-            </a:r>
-          </a:p>
-        </p:txBody>
-      </p:sp>
-      <p:pic>
-        <p:nvPicPr>
-          <p:cNvPr id="9" name="Gráfico 8">
-            <a:extLst>
-              <a:ext uri="{FF2B5EF4-FFF2-40B4-BE49-F238E27FC236}">
-                <a16:creationId xmlns:a16="http://schemas.microsoft.com/office/drawing/2014/main" id="{B5CBB795-3A3F-87E5-18E3-1534BABFB5EF}"/>
-              </a:ext>
-            </a:extLst>
-          </p:cNvPr>
-          <p:cNvPicPr>
-            <a:picLocks noChangeAspect="1"/>
-          </p:cNvPicPr>
-          <p:nvPr/>
-        </p:nvPicPr>
-        <p:blipFill>
-          <a:blip>
-            <a:extLst>
-              <a:ext uri="{96DAC541-7B7A-43D3-8B79-37D633B846F1}">
-                <asvg:svgBlip xmlns:asvg="http://schemas.microsoft.com/office/drawing/2016/SVG/main" r:embed="rId2"/>
-              </a:ext>
-            </a:extLst>
-          </a:blip>
-          <a:stretch>
-            <a:fillRect/>
-          </a:stretch>
-        </p:blipFill>
-        <p:spPr>
-          <a:xfrm>
-            <a:off x="4030742" y="1371600"/>
-            <a:ext cx="885695" cy="885695"/>
-          </a:xfrm>
-          <a:prstGeom prst="rect">
-            <a:avLst/>
-          </a:prstGeom>
-        </p:spPr>
-      </p:pic>
+              <a:t>Requiere internet para funcionar</a:t>
+            </a:r>
+          </a:p>
+          <a:p>
+            <a:pPr>
+              <a:spcAft>
+                <a:spcPts val="800"/>
+              </a:spcAft>
+              <a:defRPr sz="1400">
+                <a:solidFill>
+                  <a:srgbClr val="9CA3AF"/>
+                </a:solidFill>
+                <a:latin typeface="Calibri"/>
+              </a:defRPr>
+            </a:pPr>
+            <a:r>
+              <a:t>Datos en servidores de terceros</a:t>
+            </a:r>
+          </a:p>
+          <a:p>
+            <a:pPr>
+              <a:spcAft>
+                <a:spcPts val="800"/>
+              </a:spcAft>
+              <a:defRPr sz="1400">
+                <a:solidFill>
+                  <a:srgbClr val="9CA3AF"/>
+                </a:solidFill>
+                <a:latin typeface="Calibri"/>
+              </a:defRPr>
+            </a:pPr>
+            <a:r>
+              <a:t>Sync con servidores del proveedor</a:t>
+            </a:r>
+          </a:p>
+          <a:p>
+            <a:pPr>
+              <a:spcAft>
+                <a:spcPts val="800"/>
+              </a:spcAft>
+              <a:defRPr sz="1400">
+                <a:solidFill>
+                  <a:srgbClr val="9CA3AF"/>
+                </a:solidFill>
+                <a:latin typeface="Calibri"/>
+              </a:defRPr>
+            </a:pPr>
+            <a:r>
+              <a:t>Suscripciones de $5-15/mes</a:t>
+            </a:r>
+          </a:p>
+          <a:p>
+            <a:pPr>
+              <a:spcAft>
+                <a:spcPts val="800"/>
+              </a:spcAft>
+              <a:defRPr sz="1400">
+                <a:solidFill>
+                  <a:srgbClr val="9CA3AF"/>
+                </a:solidFill>
+                <a:latin typeface="Calibri"/>
+              </a:defRPr>
+            </a:pPr>
+            <a:r>
+              <a:t>Solo una plataforma o web basica</a:t>
+            </a:r>
+          </a:p>
+          <a:p>
+            <a:pPr>
+              <a:spcAft>
+                <a:spcPts val="800"/>
+              </a:spcAft>
+              <a:defRPr sz="1400">
+                <a:solidFill>
+                  <a:srgbClr val="9CA3AF"/>
+                </a:solidFill>
+                <a:latin typeface="Calibri"/>
+              </a:defRPr>
+            </a:pPr>
+            <a:r>
+              <a:t>SaaS cerrado, sin control</a:t>
+            </a:r>
+          </a:p>
+          <a:p>
+            <a:pPr>
+              <a:spcAft>
+                <a:spcPts val="800"/>
+              </a:spcAft>
+              <a:defRPr sz="1400">
+                <a:solidFill>
+                  <a:srgbClr val="9CA3AF"/>
+                </a:solidFill>
+                <a:latin typeface="Calibri"/>
+              </a:defRPr>
+            </a:pPr>
+            <a:r>
+              <a:t>Politicas de privacidad ambiguas</a:t>
+            </a:r>
+          </a:p>
+        </p:txBody>
+      </p:sp>
     </p:spTree>
   </p:cSld>
   <p:clrMapOvr>
@@ -7533,6 +7620,347 @@
           </a:p>
         </p:txBody>
       </p:sp>
+    </p:spTree>
+  </p:cSld>
+  <p:clrMapOvr>
+    <a:masterClrMapping/>
+  </p:clrMapOvr>
+</p:sld>
+</file>
+
+<file path=ppt/slides/slide20.xml><?xml version="1.0" encoding="utf-8"?>
+<p:sld xmlns:a="http://schemas.openxmlformats.org/drawingml/2006/main" xmlns:r="http://schemas.openxmlformats.org/officeDocument/2006/relationships" xmlns:p="http://schemas.openxmlformats.org/presentationml/2006/main">
+  <p:cSld>
+    <p:bg>
+      <p:bgPr>
+        <a:solidFill>
+          <a:srgbClr val="0F172A"/>
+        </a:solidFill>
+        <a:effectLst/>
+      </p:bgPr>
+    </p:bg>
+    <p:spTree>
+      <p:nvGrpSpPr>
+        <p:cNvPr id="1" name=""/>
+        <p:cNvGrpSpPr/>
+        <p:nvPr/>
+      </p:nvGrpSpPr>
+      <p:grpSpPr>
+        <a:xfrm>
+          <a:off x="0" y="0"/>
+          <a:ext cx="0" cy="0"/>
+          <a:chOff x="0" y="0"/>
+          <a:chExt cx="0" cy="0"/>
+        </a:xfrm>
+      </p:grpSpPr>
+      <p:sp>
+        <p:nvSpPr>
+          <p:cNvPr id="2" name="Rectangle 1"/>
+          <p:cNvSpPr/>
+          <p:nvPr/>
+        </p:nvSpPr>
+        <p:spPr>
+          <a:xfrm>
+            <a:off x="0" y="0"/>
+            <a:ext cx="12191695" cy="73152"/>
+          </a:xfrm>
+          <a:prstGeom prst="rect">
+            <a:avLst/>
+          </a:prstGeom>
+          <a:solidFill>
+            <a:srgbClr val="2563EB"/>
+          </a:solidFill>
+          <a:ln>
+            <a:noFill/>
+          </a:ln>
+        </p:spPr>
+        <p:style>
+          <a:lnRef idx="1">
+            <a:schemeClr val="accent1"/>
+          </a:lnRef>
+          <a:fillRef idx="3">
+            <a:schemeClr val="accent1"/>
+          </a:fillRef>
+          <a:effectRef idx="2">
+            <a:schemeClr val="accent1"/>
+          </a:effectRef>
+          <a:fontRef idx="minor">
+            <a:schemeClr val="lt1"/>
+          </a:fontRef>
+        </p:style>
+        <p:txBody>
+          <a:bodyPr rtlCol="0" anchor="ctr"/>
+          <a:lstStyle/>
+          <a:p>
+            <a:pPr algn="ctr"/>
+            <a:endParaRPr/>
+          </a:p>
+        </p:txBody>
+      </p:sp>
+      <p:sp>
+        <p:nvSpPr>
+          <p:cNvPr id="3" name="TextBox 2"/>
+          <p:cNvSpPr txBox="1"/>
+          <p:nvPr/>
+        </p:nvSpPr>
+        <p:spPr>
+          <a:xfrm>
+            <a:off x="4114800" y="1371600"/>
+            <a:ext cx="4114800" cy="914400"/>
+          </a:xfrm>
+          <a:prstGeom prst="rect">
+            <a:avLst/>
+          </a:prstGeom>
+          <a:noFill/>
+        </p:spPr>
+        <p:txBody>
+          <a:bodyPr wrap="square">
+            <a:spAutoFit/>
+          </a:bodyPr>
+          <a:lstStyle/>
+          <a:p>
+            <a:pPr algn="ctr">
+              <a:defRPr sz="5200" b="1">
+                <a:solidFill>
+                  <a:srgbClr val="FFFFFF"/>
+                </a:solidFill>
+                <a:latin typeface="Calibri"/>
+              </a:defRPr>
+            </a:pPr>
+            <a:r>
+              <a:t>Planixor</a:t>
+            </a:r>
+          </a:p>
+        </p:txBody>
+      </p:sp>
+      <p:sp>
+        <p:nvSpPr>
+          <p:cNvPr id="4" name="TextBox 3"/>
+          <p:cNvSpPr txBox="1"/>
+          <p:nvPr/>
+        </p:nvSpPr>
+        <p:spPr>
+          <a:xfrm>
+            <a:off x="2286000" y="2560320"/>
+            <a:ext cx="7772400" cy="731520"/>
+          </a:xfrm>
+          <a:prstGeom prst="rect">
+            <a:avLst/>
+          </a:prstGeom>
+          <a:noFill/>
+        </p:spPr>
+        <p:txBody>
+          <a:bodyPr wrap="square">
+            <a:spAutoFit/>
+          </a:bodyPr>
+          <a:lstStyle/>
+          <a:p>
+            <a:pPr algn="ctr">
+              <a:defRPr sz="2800" b="0">
+                <a:solidFill>
+                  <a:srgbClr val="9CA3AF"/>
+                </a:solidFill>
+                <a:latin typeface="Calibri"/>
+              </a:defRPr>
+            </a:pPr>
+            <a:r>
+              <a:t>Organiza tu tiempo. Potencia tu dia.</a:t>
+            </a:r>
+          </a:p>
+        </p:txBody>
+      </p:sp>
+      <p:sp>
+        <p:nvSpPr>
+          <p:cNvPr id="5" name="Rounded Rectangle 4"/>
+          <p:cNvSpPr/>
+          <p:nvPr/>
+        </p:nvSpPr>
+        <p:spPr>
+          <a:xfrm>
+            <a:off x="3200400" y="3657600"/>
+            <a:ext cx="5760720" cy="1097280"/>
+          </a:xfrm>
+          <a:prstGeom prst="roundRect">
+            <a:avLst/>
+          </a:prstGeom>
+          <a:solidFill>
+            <a:srgbClr val="2563EB"/>
+          </a:solidFill>
+          <a:ln>
+            <a:noFill/>
+          </a:ln>
+        </p:spPr>
+        <p:style>
+          <a:lnRef idx="1">
+            <a:schemeClr val="accent1"/>
+          </a:lnRef>
+          <a:fillRef idx="3">
+            <a:schemeClr val="accent1"/>
+          </a:fillRef>
+          <a:effectRef idx="2">
+            <a:schemeClr val="accent1"/>
+          </a:effectRef>
+          <a:fontRef idx="minor">
+            <a:schemeClr val="lt1"/>
+          </a:fontRef>
+        </p:style>
+        <p:txBody>
+          <a:bodyPr rtlCol="0" anchor="ctr"/>
+          <a:lstStyle/>
+          <a:p>
+            <a:pPr algn="ctr">
+              <a:defRPr sz="2200" b="1">
+                <a:solidFill>
+                  <a:srgbClr val="FFFFFF"/>
+                </a:solidFill>
+              </a:defRPr>
+            </a:pPr>
+            <a:r>
+              <a:rPr dirty="0" err="1"/>
+              <a:t>Comienza</a:t>
+            </a:r>
+            <a:r>
+              <a:rPr dirty="0"/>
+              <a:t> hoy — 100% gratis, 100% </a:t>
+            </a:r>
+            <a:r>
+              <a:rPr dirty="0" err="1"/>
+              <a:t>tuyo</a:t>
+            </a:r>
+            <a:endParaRPr dirty="0"/>
+          </a:p>
+        </p:txBody>
+      </p:sp>
+      <p:sp>
+        <p:nvSpPr>
+          <p:cNvPr id="6" name="TextBox 5"/>
+          <p:cNvSpPr txBox="1"/>
+          <p:nvPr/>
+        </p:nvSpPr>
+        <p:spPr>
+          <a:xfrm>
+            <a:off x="2286000" y="5303520"/>
+            <a:ext cx="7772400" cy="338554"/>
+          </a:xfrm>
+          <a:prstGeom prst="rect">
+            <a:avLst/>
+          </a:prstGeom>
+          <a:noFill/>
+        </p:spPr>
+        <p:txBody>
+          <a:bodyPr wrap="square">
+            <a:spAutoFit/>
+          </a:bodyPr>
+          <a:lstStyle/>
+          <a:p>
+            <a:pPr algn="ctr">
+              <a:defRPr sz="1600" b="0">
+                <a:solidFill>
+                  <a:srgbClr val="9CA3AF"/>
+                </a:solidFill>
+                <a:latin typeface="Calibri"/>
+              </a:defRPr>
+            </a:pPr>
+            <a:r>
+              <a:rPr lang="es-ES" dirty="0"/>
+              <a:t>p</a:t>
+            </a:r>
+            <a:r>
+              <a:rPr dirty="0" err="1"/>
+              <a:t>lanixor</a:t>
+            </a:r>
+            <a:r>
+              <a:rPr lang="es-ES" dirty="0"/>
+              <a:t>.</a:t>
+            </a:r>
+            <a:r>
+              <a:rPr lang="es-ES" dirty="0" err="1"/>
+              <a:t>codenized</a:t>
+            </a:r>
+            <a:r>
+              <a:rPr dirty="0"/>
+              <a:t>.com  |  by </a:t>
+            </a:r>
+            <a:r>
+              <a:rPr dirty="0" err="1"/>
+              <a:t>Codenized</a:t>
+            </a:r>
+            <a:endParaRPr dirty="0"/>
+          </a:p>
+        </p:txBody>
+      </p:sp>
+      <p:sp>
+        <p:nvSpPr>
+          <p:cNvPr id="7" name="TextBox 6"/>
+          <p:cNvSpPr txBox="1"/>
+          <p:nvPr/>
+        </p:nvSpPr>
+        <p:spPr>
+          <a:xfrm>
+            <a:off x="2286000" y="5852160"/>
+            <a:ext cx="7772400" cy="457200"/>
+          </a:xfrm>
+          <a:prstGeom prst="rect">
+            <a:avLst/>
+          </a:prstGeom>
+          <a:noFill/>
+        </p:spPr>
+        <p:txBody>
+          <a:bodyPr wrap="square">
+            <a:spAutoFit/>
+          </a:bodyPr>
+          <a:lstStyle/>
+          <a:p>
+            <a:pPr algn="ctr">
+              <a:defRPr sz="1400" b="0">
+                <a:solidFill>
+                  <a:srgbClr val="9CA3AF"/>
+                </a:solidFill>
+                <a:latin typeface="Calibri"/>
+              </a:defRPr>
+            </a:pPr>
+            <a:r>
+              <a:t>Web (PWA) + Android  |  Offline-First  |  Self-Hosted Sync</a:t>
+            </a:r>
+          </a:p>
+        </p:txBody>
+      </p:sp>
+      <p:pic>
+        <p:nvPicPr>
+          <p:cNvPr id="9" name="Gráfico 8">
+            <a:extLst>
+              <a:ext uri="{FF2B5EF4-FFF2-40B4-BE49-F238E27FC236}">
+                <a16:creationId xmlns:a16="http://schemas.microsoft.com/office/drawing/2014/main" id="{B5CBB795-3A3F-87E5-18E3-1534BABFB5EF}"/>
+              </a:ext>
+            </a:extLst>
+          </p:cNvPr>
+          <p:cNvPicPr>
+            <a:picLocks noChangeAspect="1"/>
+          </p:cNvPicPr>
+          <p:nvPr/>
+        </p:nvPicPr>
+        <p:blipFill>
+          <a:blip>
+            <a:extLst>
+              <a:ext uri="{96DAC541-7B7A-43D3-8B79-37D633B846F1}">
+                <asvg:svgBlip xmlns:asvg="http://schemas.microsoft.com/office/drawing/2016/SVG/main" r:embed="rId2"/>
+              </a:ext>
+            </a:extLst>
+          </a:blip>
+          <a:stretch>
+            <a:fillRect/>
+          </a:stretch>
+        </p:blipFill>
+        <p:spPr>
+          <a:xfrm>
+            <a:off x="4030742" y="1371600"/>
+            <a:ext cx="885695" cy="885695"/>
+          </a:xfrm>
+          <a:prstGeom prst="rect">
+            <a:avLst/>
+          </a:prstGeom>
+        </p:spPr>
+      </p:pic>
     </p:spTree>
   </p:cSld>
   <p:clrMapOvr>
@@ -10247,7 +10675,13 @@
     </p:bg>
     <p:spTree>
       <p:nvGrpSpPr>
-        <p:cNvPr id="1" name=""/>
+        <p:cNvPr id="1" name="">
+          <a:extLst>
+            <a:ext uri="{FF2B5EF4-FFF2-40B4-BE49-F238E27FC236}">
+              <a16:creationId xmlns:a16="http://schemas.microsoft.com/office/drawing/2014/main" id="{D1D39527-4D1B-A980-3CD9-EC62B3550DC6}"/>
+            </a:ext>
+          </a:extLst>
+        </p:cNvPr>
         <p:cNvGrpSpPr/>
         <p:nvPr/>
       </p:nvGrpSpPr>
@@ -10261,7 +10695,13 @@
       </p:grpSpPr>
       <p:sp>
         <p:nvSpPr>
-          <p:cNvPr id="2" name="Rectangle 1"/>
+          <p:cNvPr id="2" name="Rectangle 1">
+            <a:extLst>
+              <a:ext uri="{FF2B5EF4-FFF2-40B4-BE49-F238E27FC236}">
+                <a16:creationId xmlns:a16="http://schemas.microsoft.com/office/drawing/2014/main" id="{A56D54D9-A496-84DE-A888-9234AFAC2BDB}"/>
+              </a:ext>
+            </a:extLst>
+          </p:cNvPr>
           <p:cNvSpPr/>
           <p:nvPr/>
         </p:nvSpPr>
@@ -10274,7 +10714,7 @@
             <a:avLst/>
           </a:prstGeom>
           <a:solidFill>
-            <a:srgbClr val="0B86D4"/>
+            <a:srgbClr val="10B981"/>
           </a:solidFill>
           <a:ln>
             <a:noFill/>
@@ -10305,14 +10745,20 @@
       </p:sp>
       <p:sp>
         <p:nvSpPr>
-          <p:cNvPr id="3" name="TextBox 2"/>
+          <p:cNvPr id="3" name="TextBox 2">
+            <a:extLst>
+              <a:ext uri="{FF2B5EF4-FFF2-40B4-BE49-F238E27FC236}">
+                <a16:creationId xmlns:a16="http://schemas.microsoft.com/office/drawing/2014/main" id="{DC2D3E66-5C8B-D3C0-949D-B1DBE8B1A499}"/>
+              </a:ext>
+            </a:extLst>
+          </p:cNvPr>
           <p:cNvSpPr txBox="1"/>
           <p:nvPr/>
         </p:nvSpPr>
         <p:spPr>
           <a:xfrm>
             <a:off x="731520" y="457200"/>
-            <a:ext cx="9144000" cy="731520"/>
+            <a:ext cx="9144000" cy="646331"/>
           </a:xfrm>
           <a:prstGeom prst="rect">
             <a:avLst/>
@@ -10325,7 +10771,7 @@
           </a:bodyPr>
           <a:lstStyle/>
           <a:p>
-            <a:pPr algn="l">
+            <a:pPr>
               <a:defRPr sz="3600" b="1">
                 <a:solidFill>
                   <a:srgbClr val="FFFFFF"/>
@@ -10334,21 +10780,29 @@
               </a:defRPr>
             </a:pPr>
             <a:r>
-              <a:t>Offline-First: Privacidad por Diseno</a:t>
-            </a:r>
-          </a:p>
-        </p:txBody>
-      </p:sp>
-      <p:sp>
-        <p:nvSpPr>
-          <p:cNvPr id="4" name="TextBox 3"/>
+              <a:rPr lang="es-ES" sz="3600" b="1" dirty="0"/>
+              <a:t>Modo Turno — Simplifica tu calendario</a:t>
+            </a:r>
+            <a:endParaRPr dirty="0"/>
+          </a:p>
+        </p:txBody>
+      </p:sp>
+      <p:sp>
+        <p:nvSpPr>
+          <p:cNvPr id="4" name="TextBox 3">
+            <a:extLst>
+              <a:ext uri="{FF2B5EF4-FFF2-40B4-BE49-F238E27FC236}">
+                <a16:creationId xmlns:a16="http://schemas.microsoft.com/office/drawing/2014/main" id="{EE226B14-B6E7-1F51-7029-446D0CE730D5}"/>
+              </a:ext>
+            </a:extLst>
+          </p:cNvPr>
           <p:cNvSpPr txBox="1"/>
           <p:nvPr/>
         </p:nvSpPr>
         <p:spPr>
           <a:xfrm>
-            <a:off x="731520" y="1371600"/>
-            <a:ext cx="10058400" cy="914400"/>
+            <a:off x="731520" y="1280160"/>
+            <a:ext cx="10058400" cy="369332"/>
           </a:xfrm>
           <a:prstGeom prst="rect">
             <a:avLst/>
@@ -10361,30 +10815,38 @@
           </a:bodyPr>
           <a:lstStyle/>
           <a:p>
-            <a:pPr algn="l">
-              <a:defRPr sz="2000" b="0">
-                <a:solidFill>
-                  <a:srgbClr val="F9FAFB"/>
-                </a:solidFill>
-                <a:latin typeface="Calibri"/>
-              </a:defRPr>
-            </a:pPr>
-            <a:r>
-              <a:t>Planixor funciona completamente sin internet. Tus datos nunca salen de tu dispositivo a menos que tu lo decidas.</a:t>
-            </a:r>
-          </a:p>
-        </p:txBody>
-      </p:sp>
-      <p:sp>
-        <p:nvSpPr>
-          <p:cNvPr id="5" name="TextBox 4"/>
+            <a:pPr>
+              <a:defRPr sz="1800" b="0">
+                <a:solidFill>
+                  <a:srgbClr val="9CA3AF"/>
+                </a:solidFill>
+                <a:latin typeface="Calibri"/>
+              </a:defRPr>
+            </a:pPr>
+            <a:r>
+              <a:rPr lang="es-ES" i="1" dirty="0"/>
+              <a:t>Un modo especializado para quienes gestionan turnos de trabajo</a:t>
+            </a:r>
+            <a:endParaRPr dirty="0"/>
+          </a:p>
+        </p:txBody>
+      </p:sp>
+      <p:sp>
+        <p:nvSpPr>
+          <p:cNvPr id="5" name="TextBox 4">
+            <a:extLst>
+              <a:ext uri="{FF2B5EF4-FFF2-40B4-BE49-F238E27FC236}">
+                <a16:creationId xmlns:a16="http://schemas.microsoft.com/office/drawing/2014/main" id="{67BAEE02-CD73-DC49-ED70-B0FEA491172B}"/>
+              </a:ext>
+            </a:extLst>
+          </p:cNvPr>
           <p:cNvSpPr txBox="1"/>
           <p:nvPr/>
         </p:nvSpPr>
         <p:spPr>
           <a:xfrm>
-            <a:off x="731520" y="2560320"/>
-            <a:ext cx="4572000" cy="457200"/>
+            <a:off x="731519" y="2103120"/>
+            <a:ext cx="10890637" cy="2800767"/>
           </a:xfrm>
           <a:prstGeom prst="rect">
             <a:avLst/>
@@ -10397,263 +10859,138 @@
           </a:bodyPr>
           <a:lstStyle/>
           <a:p>
-            <a:pPr algn="l">
-              <a:defRPr sz="2000" b="1">
-                <a:solidFill>
-                  <a:srgbClr val="0B86D4"/>
-                </a:solidFill>
-                <a:latin typeface="Calibri"/>
-              </a:defRPr>
-            </a:pPr>
-            <a:r>
-              <a:t>Como funciona</a:t>
-            </a:r>
-          </a:p>
-        </p:txBody>
-      </p:sp>
-      <p:sp>
-        <p:nvSpPr>
-          <p:cNvPr id="6" name="TextBox 5"/>
-          <p:cNvSpPr txBox="1"/>
-          <p:nvPr/>
-        </p:nvSpPr>
-        <p:spPr>
-          <a:xfrm>
-            <a:off x="731520" y="3108960"/>
-            <a:ext cx="5029200" cy="3200400"/>
-          </a:xfrm>
-          <a:prstGeom prst="rect">
-            <a:avLst/>
-          </a:prstGeom>
-          <a:noFill/>
-        </p:spPr>
-        <p:txBody>
-          <a:bodyPr wrap="square">
-            <a:spAutoFit/>
-          </a:bodyPr>
-          <a:lstStyle/>
-          <a:p>
-            <a:pPr>
-              <a:spcAft>
-                <a:spcPts val="800"/>
-              </a:spcAft>
-              <a:defRPr sz="1500">
-                <a:solidFill>
-                  <a:srgbClr val="F9FAFB"/>
-                </a:solidFill>
-                <a:latin typeface="Calibri"/>
-              </a:defRPr>
-            </a:pPr>
-            <a:r>
-              <a:t>Web: datos en IndexedDB (navegador)</a:t>
-            </a:r>
-          </a:p>
-          <a:p>
-            <a:pPr>
-              <a:spcAft>
-                <a:spcPts val="800"/>
-              </a:spcAft>
-              <a:defRPr sz="1500">
-                <a:solidFill>
-                  <a:srgbClr val="F9FAFB"/>
-                </a:solidFill>
-                <a:latin typeface="Calibri"/>
-              </a:defRPr>
-            </a:pPr>
-            <a:r>
-              <a:t>Android: datos en SQLite (dispositivo)</a:t>
-            </a:r>
-          </a:p>
-          <a:p>
-            <a:pPr>
-              <a:spcAft>
-                <a:spcPts val="800"/>
-              </a:spcAft>
-              <a:defRPr sz="1500">
-                <a:solidFill>
-                  <a:srgbClr val="F9FAFB"/>
-                </a:solidFill>
-                <a:latin typeface="Calibri"/>
-              </a:defRPr>
-            </a:pPr>
-            <a:r>
-              <a:t>Sin cuenta, sin registro, sin servidor</a:t>
-            </a:r>
-          </a:p>
-          <a:p>
-            <a:pPr>
-              <a:spcAft>
-                <a:spcPts val="800"/>
-              </a:spcAft>
-              <a:defRPr sz="1500">
-                <a:solidFill>
-                  <a:srgbClr val="F9FAFB"/>
-                </a:solidFill>
-                <a:latin typeface="Calibri"/>
-              </a:defRPr>
-            </a:pPr>
-            <a:r>
-              <a:t>Funcionalidad completa sin conexion</a:t>
-            </a:r>
-          </a:p>
-          <a:p>
-            <a:pPr>
-              <a:spcAft>
-                <a:spcPts val="800"/>
-              </a:spcAft>
-              <a:defRPr sz="1500">
-                <a:solidFill>
-                  <a:srgbClr val="F9FAFB"/>
-                </a:solidFill>
-                <a:latin typeface="Calibri"/>
-              </a:defRPr>
-            </a:pPr>
-            <a:r>
-              <a:t>Tus datos = solo tuyos</a:t>
-            </a:r>
-          </a:p>
-        </p:txBody>
-      </p:sp>
-      <p:sp>
-        <p:nvSpPr>
-          <p:cNvPr id="7" name="TextBox 6"/>
-          <p:cNvSpPr txBox="1"/>
-          <p:nvPr/>
-        </p:nvSpPr>
-        <p:spPr>
-          <a:xfrm>
-            <a:off x="6400800" y="2560320"/>
-            <a:ext cx="4572000" cy="457200"/>
-          </a:xfrm>
-          <a:prstGeom prst="rect">
-            <a:avLst/>
-          </a:prstGeom>
-          <a:noFill/>
-        </p:spPr>
-        <p:txBody>
-          <a:bodyPr wrap="square">
-            <a:spAutoFit/>
-          </a:bodyPr>
-          <a:lstStyle/>
-          <a:p>
-            <a:pPr algn="l">
-              <a:defRPr sz="2000" b="1">
-                <a:solidFill>
-                  <a:srgbClr val="10B981"/>
-                </a:solidFill>
-                <a:latin typeface="Calibri"/>
-              </a:defRPr>
-            </a:pPr>
-            <a:r>
-              <a:t>Beneficios</a:t>
-            </a:r>
-          </a:p>
-        </p:txBody>
-      </p:sp>
-      <p:sp>
-        <p:nvSpPr>
-          <p:cNvPr id="8" name="TextBox 7"/>
-          <p:cNvSpPr txBox="1"/>
-          <p:nvPr/>
-        </p:nvSpPr>
-        <p:spPr>
-          <a:xfrm>
-            <a:off x="6400800" y="3108960"/>
-            <a:ext cx="5029200" cy="3200400"/>
-          </a:xfrm>
-          <a:prstGeom prst="rect">
-            <a:avLst/>
-          </a:prstGeom>
-          <a:noFill/>
-        </p:spPr>
-        <p:txBody>
-          <a:bodyPr wrap="square">
-            <a:spAutoFit/>
-          </a:bodyPr>
-          <a:lstStyle/>
-          <a:p>
-            <a:pPr>
-              <a:spcAft>
-                <a:spcPts val="800"/>
-              </a:spcAft>
-              <a:defRPr sz="1500">
-                <a:solidFill>
-                  <a:srgbClr val="F9FAFB"/>
-                </a:solidFill>
-                <a:latin typeface="Calibri"/>
-              </a:defRPr>
-            </a:pPr>
-            <a:r>
-              <a:t>Velocidad instantanea (sin latencia de red)</a:t>
-            </a:r>
-          </a:p>
-          <a:p>
-            <a:pPr>
-              <a:spcAft>
-                <a:spcPts val="800"/>
-              </a:spcAft>
-              <a:defRPr sz="1500">
-                <a:solidFill>
-                  <a:srgbClr val="F9FAFB"/>
-                </a:solidFill>
-                <a:latin typeface="Calibri"/>
-              </a:defRPr>
-            </a:pPr>
-            <a:r>
-              <a:t>Privacidad absoluta por defecto</a:t>
-            </a:r>
-          </a:p>
-          <a:p>
-            <a:pPr>
-              <a:spcAft>
-                <a:spcPts val="800"/>
-              </a:spcAft>
-              <a:defRPr sz="1500">
-                <a:solidFill>
-                  <a:srgbClr val="F9FAFB"/>
-                </a:solidFill>
-                <a:latin typeface="Calibri"/>
-              </a:defRPr>
-            </a:pPr>
-            <a:r>
-              <a:t>Funciona en aviones, metro, rural</a:t>
-            </a:r>
-          </a:p>
-          <a:p>
-            <a:pPr>
-              <a:spcAft>
-                <a:spcPts val="800"/>
-              </a:spcAft>
-              <a:defRPr sz="1500">
-                <a:solidFill>
-                  <a:srgbClr val="F9FAFB"/>
-                </a:solidFill>
-                <a:latin typeface="Calibri"/>
-              </a:defRPr>
-            </a:pPr>
-            <a:r>
-              <a:t>Sin costos de suscripcion de nube</a:t>
-            </a:r>
-          </a:p>
-          <a:p>
-            <a:pPr>
-              <a:spcAft>
-                <a:spcPts val="800"/>
-              </a:spcAft>
-              <a:defRPr sz="1500">
-                <a:solidFill>
-                  <a:srgbClr val="F9FAFB"/>
-                </a:solidFill>
-                <a:latin typeface="Calibri"/>
-              </a:defRPr>
-            </a:pPr>
-            <a:r>
-              <a:t>Cumplimiento GDPR simplificado</a:t>
-            </a:r>
+            <a:r>
+              <a:rPr lang="es-ES" sz="1600" dirty="0">
+                <a:solidFill>
+                  <a:srgbClr val="F9FAFB"/>
+                </a:solidFill>
+                <a:latin typeface="Calibri"/>
+              </a:rPr>
+              <a:t>🗓️ Solo vistas Mes y Año — Sin distracciones del Día y Semana</a:t>
+            </a:r>
+          </a:p>
+          <a:p>
+            <a:endParaRPr lang="es-ES" sz="1600" dirty="0">
+              <a:solidFill>
+                <a:srgbClr val="F9FAFB"/>
+              </a:solidFill>
+              <a:latin typeface="Calibri"/>
+            </a:endParaRPr>
+          </a:p>
+          <a:p>
+            <a:r>
+              <a:rPr lang="es-ES" sz="1600" dirty="0">
+                <a:solidFill>
+                  <a:srgbClr val="F9FAFB"/>
+                </a:solidFill>
+                <a:latin typeface="Calibri"/>
+              </a:rPr>
+              <a:t>👆 Toca un día para actuar — Día vacío → crear evento. Día con turnos → ver y editar</a:t>
+            </a:r>
+          </a:p>
+          <a:p>
+            <a:endParaRPr lang="es-ES" sz="1600" dirty="0">
+              <a:solidFill>
+                <a:srgbClr val="F9FAFB"/>
+              </a:solidFill>
+              <a:latin typeface="Calibri"/>
+            </a:endParaRPr>
+          </a:p>
+          <a:p>
+            <a:r>
+              <a:rPr lang="es-ES" sz="1600" dirty="0">
+                <a:solidFill>
+                  <a:srgbClr val="F9FAFB"/>
+                </a:solidFill>
+                <a:latin typeface="Calibri"/>
+              </a:rPr>
+              <a:t>📋 Modal de Acción del Día — Ve todos tus turnos y recordatorios de un vistazo, ordenados y con colores</a:t>
+            </a:r>
+          </a:p>
+          <a:p>
+            <a:endParaRPr lang="es-ES" sz="1600" dirty="0">
+              <a:solidFill>
+                <a:srgbClr val="F9FAFB"/>
+              </a:solidFill>
+              <a:latin typeface="Calibri"/>
+            </a:endParaRPr>
+          </a:p>
+          <a:p>
+            <a:r>
+              <a:rPr lang="es-ES" sz="1600" dirty="0">
+                <a:solidFill>
+                  <a:srgbClr val="F9FAFB"/>
+                </a:solidFill>
+                <a:latin typeface="Calibri"/>
+              </a:rPr>
+              <a:t>⚡ Creación rápida — Un toque en cualquier día abre directamente el formulario con la fecha preseleccionada</a:t>
+            </a:r>
+          </a:p>
+          <a:p>
+            <a:endParaRPr lang="es-ES" sz="1600" dirty="0">
+              <a:solidFill>
+                <a:srgbClr val="F9FAFB"/>
+              </a:solidFill>
+              <a:latin typeface="Calibri"/>
+            </a:endParaRPr>
+          </a:p>
+          <a:p>
+            <a:r>
+              <a:rPr lang="es-ES" sz="1600" dirty="0">
+                <a:solidFill>
+                  <a:srgbClr val="F9FAFB"/>
+                </a:solidFill>
+                <a:latin typeface="Calibri"/>
+              </a:rPr>
+              <a:t>🔄 Se sincroniza — La preferencia viaja entre tus dispositivos automáticamente</a:t>
+            </a:r>
+          </a:p>
+          <a:p>
+            <a:endParaRPr lang="es-ES" sz="1600" dirty="0">
+              <a:solidFill>
+                <a:srgbClr val="F9FAFB"/>
+              </a:solidFill>
+              <a:latin typeface="Calibri"/>
+            </a:endParaRPr>
+          </a:p>
+          <a:p>
+            <a:r>
+              <a:rPr lang="es-ES" sz="1600" dirty="0">
+                <a:solidFill>
+                  <a:srgbClr val="F9FAFB"/>
+                </a:solidFill>
+                <a:latin typeface="Calibri"/>
+              </a:rPr>
+              <a:t>🌗 Actívalo cuando quieras — Un simple </a:t>
+            </a:r>
+            <a:r>
+              <a:rPr lang="es-ES" sz="1600" dirty="0" err="1">
+                <a:solidFill>
+                  <a:srgbClr val="F9FAFB"/>
+                </a:solidFill>
+                <a:latin typeface="Calibri"/>
+              </a:rPr>
+              <a:t>toggle</a:t>
+            </a:r>
+            <a:r>
+              <a:rPr lang="es-ES" sz="1600" dirty="0">
+                <a:solidFill>
+                  <a:srgbClr val="F9FAFB"/>
+                </a:solidFill>
+                <a:latin typeface="Calibri"/>
+              </a:rPr>
+              <a:t> en Ajustes, efecto inmediato, sin reiniciar</a:t>
+            </a:r>
+            <a:endParaRPr dirty="0"/>
           </a:p>
         </p:txBody>
       </p:sp>
     </p:spTree>
+    <p:extLst>
+      <p:ext uri="{BB962C8B-B14F-4D97-AF65-F5344CB8AC3E}">
+        <p14:creationId xmlns:p14="http://schemas.microsoft.com/office/powerpoint/2010/main" val="354508281"/>
+      </p:ext>
+    </p:extLst>
   </p:cSld>
   <p:clrMapOvr>
     <a:masterClrMapping/>

--- a/Planixor_Marketing.pptx
+++ b/Planixor_Marketing.pptx
@@ -321,7 +321,7 @@
           <a:p>
             <a:fld id="{5BCAD085-E8A6-8845-BD4E-CB4CCA059FC4}" type="datetimeFigureOut">
               <a:rPr lang="en-US" smtClean="0"/>
-              <a:t>7/4/2026</a:t>
+              <a:t>7/7/2026</a:t>
             </a:fld>
             <a:endParaRPr lang="en-US"/>
           </a:p>
@@ -489,7 +489,7 @@
           <a:p>
             <a:fld id="{5BCAD085-E8A6-8845-BD4E-CB4CCA059FC4}" type="datetimeFigureOut">
               <a:rPr lang="en-US" smtClean="0"/>
-              <a:t>7/4/2026</a:t>
+              <a:t>7/7/2026</a:t>
             </a:fld>
             <a:endParaRPr lang="en-US"/>
           </a:p>
@@ -667,7 +667,7 @@
           <a:p>
             <a:fld id="{5BCAD085-E8A6-8845-BD4E-CB4CCA059FC4}" type="datetimeFigureOut">
               <a:rPr lang="en-US" smtClean="0"/>
-              <a:t>7/4/2026</a:t>
+              <a:t>7/7/2026</a:t>
             </a:fld>
             <a:endParaRPr lang="en-US"/>
           </a:p>
@@ -835,7 +835,7 @@
           <a:p>
             <a:fld id="{5BCAD085-E8A6-8845-BD4E-CB4CCA059FC4}" type="datetimeFigureOut">
               <a:rPr lang="en-US" smtClean="0"/>
-              <a:t>7/4/2026</a:t>
+              <a:t>7/7/2026</a:t>
             </a:fld>
             <a:endParaRPr lang="en-US"/>
           </a:p>
@@ -1080,7 +1080,7 @@
           <a:p>
             <a:fld id="{5BCAD085-E8A6-8845-BD4E-CB4CCA059FC4}" type="datetimeFigureOut">
               <a:rPr lang="en-US" smtClean="0"/>
-              <a:t>7/4/2026</a:t>
+              <a:t>7/7/2026</a:t>
             </a:fld>
             <a:endParaRPr lang="en-US"/>
           </a:p>
@@ -1365,7 +1365,7 @@
           <a:p>
             <a:fld id="{5BCAD085-E8A6-8845-BD4E-CB4CCA059FC4}" type="datetimeFigureOut">
               <a:rPr lang="en-US" smtClean="0"/>
-              <a:t>7/4/2026</a:t>
+              <a:t>7/7/2026</a:t>
             </a:fld>
             <a:endParaRPr lang="en-US"/>
           </a:p>
@@ -1784,7 +1784,7 @@
           <a:p>
             <a:fld id="{5BCAD085-E8A6-8845-BD4E-CB4CCA059FC4}" type="datetimeFigureOut">
               <a:rPr lang="en-US" smtClean="0"/>
-              <a:t>7/4/2026</a:t>
+              <a:t>7/7/2026</a:t>
             </a:fld>
             <a:endParaRPr lang="en-US"/>
           </a:p>
@@ -1901,7 +1901,7 @@
           <a:p>
             <a:fld id="{5BCAD085-E8A6-8845-BD4E-CB4CCA059FC4}" type="datetimeFigureOut">
               <a:rPr lang="en-US" smtClean="0"/>
-              <a:t>7/4/2026</a:t>
+              <a:t>7/7/2026</a:t>
             </a:fld>
             <a:endParaRPr lang="en-US"/>
           </a:p>
@@ -1996,7 +1996,7 @@
           <a:p>
             <a:fld id="{5BCAD085-E8A6-8845-BD4E-CB4CCA059FC4}" type="datetimeFigureOut">
               <a:rPr lang="en-US" smtClean="0"/>
-              <a:t>7/4/2026</a:t>
+              <a:t>7/7/2026</a:t>
             </a:fld>
             <a:endParaRPr lang="en-US"/>
           </a:p>
@@ -2271,7 +2271,7 @@
           <a:p>
             <a:fld id="{5BCAD085-E8A6-8845-BD4E-CB4CCA059FC4}" type="datetimeFigureOut">
               <a:rPr lang="en-US" smtClean="0"/>
-              <a:t>7/4/2026</a:t>
+              <a:t>7/7/2026</a:t>
             </a:fld>
             <a:endParaRPr lang="en-US"/>
           </a:p>
@@ -2523,7 +2523,7 @@
           <a:p>
             <a:fld id="{5BCAD085-E8A6-8845-BD4E-CB4CCA059FC4}" type="datetimeFigureOut">
               <a:rPr lang="en-US" smtClean="0"/>
-              <a:t>7/4/2026</a:t>
+              <a:t>7/7/2026</a:t>
             </a:fld>
             <a:endParaRPr lang="en-US"/>
           </a:p>
@@ -2734,7 +2734,7 @@
           <a:p>
             <a:fld id="{5BCAD085-E8A6-8845-BD4E-CB4CCA059FC4}" type="datetimeFigureOut">
               <a:rPr lang="en-US" smtClean="0"/>
-              <a:t>7/4/2026</a:t>
+              <a:t>7/7/2026</a:t>
             </a:fld>
             <a:endParaRPr lang="en-US"/>
           </a:p>
@@ -3157,7 +3157,7 @@
           <a:lstStyle/>
           <a:p>
             <a:pPr algn="ctr"/>
-            <a:endParaRPr/>
+            <a:endParaRPr lang="es-ES" noProof="0" dirty="0"/>
           </a:p>
         </p:txBody>
       </p:sp>
@@ -3192,6 +3192,7 @@
               </a:defRPr>
             </a:pPr>
             <a:r>
+              <a:rPr lang="es-ES" noProof="0" dirty="0"/>
               <a:t>Planixor</a:t>
             </a:r>
           </a:p>
@@ -3206,7 +3207,7 @@
         <p:spPr>
           <a:xfrm>
             <a:off x="731520" y="3474720"/>
-            <a:ext cx="9144000" cy="731520"/>
+            <a:ext cx="9144000" cy="461665"/>
           </a:xfrm>
           <a:prstGeom prst="rect">
             <a:avLst/>
@@ -3228,7 +3229,8 @@
               </a:defRPr>
             </a:pPr>
             <a:r>
-              <a:t>Organiza tu tiempo. Potencia tu dia.</a:t>
+              <a:rPr lang="es-ES" noProof="0" dirty="0"/>
+              <a:t>Organiza tu tiempo. Potencia tu día.</a:t>
             </a:r>
           </a:p>
         </p:txBody>
@@ -3264,24 +3266,8 @@
               </a:defRPr>
             </a:pPr>
             <a:r>
-              <a:rPr dirty="0"/>
-              <a:t>Tu </a:t>
-            </a:r>
-            <a:r>
-              <a:rPr dirty="0" err="1"/>
-              <a:t>calendario</a:t>
-            </a:r>
-            <a:r>
-              <a:rPr dirty="0"/>
-              <a:t>. </a:t>
-            </a:r>
-            <a:r>
-              <a:rPr lang="es-ES" dirty="0"/>
-              <a:t>Tus eventos</a:t>
-            </a:r>
-            <a:r>
-              <a:rPr dirty="0"/>
-              <a:t>. Tu control.</a:t>
+              <a:rPr lang="es-ES" noProof="0" dirty="0"/>
+              <a:t>Tu calendario. Tus eventos. Tu control.</a:t>
             </a:r>
           </a:p>
         </p:txBody>
@@ -3317,8 +3303,18 @@
               </a:defRPr>
             </a:pPr>
             <a:r>
-              <a:t>by Codenized</a:t>
-            </a:r>
+              <a:rPr lang="es-ES" noProof="0" dirty="0" err="1"/>
+              <a:t>by</a:t>
+            </a:r>
+            <a:r>
+              <a:rPr lang="es-ES" noProof="0" dirty="0"/>
+              <a:t> </a:t>
+            </a:r>
+            <a:r>
+              <a:rPr lang="es-ES" noProof="0" dirty="0" err="1"/>
+              <a:t>Codenized</a:t>
+            </a:r>
+            <a:endParaRPr lang="es-ES" noProof="0" dirty="0"/>
           </a:p>
         </p:txBody>
       </p:sp>
@@ -3431,7 +3427,7 @@
           <a:lstStyle/>
           <a:p>
             <a:pPr algn="ctr"/>
-            <a:endParaRPr/>
+            <a:endParaRPr lang="es-ES" noProof="0" dirty="0"/>
           </a:p>
         </p:txBody>
       </p:sp>
@@ -3466,8 +3462,14 @@
               </a:defRPr>
             </a:pPr>
             <a:r>
-              <a:t>Offline-First: Privacidad por Diseno</a:t>
-            </a:r>
+              <a:rPr lang="es-ES" noProof="0" dirty="0"/>
+              <a:t>Offline-First: Privacidad por </a:t>
+            </a:r>
+            <a:r>
+              <a:rPr lang="es-ES" noProof="0" dirty="0" err="1"/>
+              <a:t>Diseno</a:t>
+            </a:r>
+            <a:endParaRPr lang="es-ES" noProof="0" dirty="0"/>
           </a:p>
         </p:txBody>
       </p:sp>
@@ -3502,6 +3504,7 @@
               </a:defRPr>
             </a:pPr>
             <a:r>
+              <a:rPr lang="es-ES" noProof="0" dirty="0"/>
               <a:t>Planixor funciona completamente sin internet. Tus datos nunca salen de tu dispositivo a menos que tu lo decidas.</a:t>
             </a:r>
           </a:p>
@@ -3538,6 +3541,7 @@
               </a:defRPr>
             </a:pPr>
             <a:r>
+              <a:rPr lang="es-ES" noProof="0" dirty="0"/>
               <a:t>Como funciona</a:t>
             </a:r>
           </a:p>
@@ -3552,7 +3556,7 @@
         <p:spPr>
           <a:xfrm>
             <a:off x="731520" y="3108960"/>
-            <a:ext cx="5029200" cy="3200400"/>
+            <a:ext cx="5029200" cy="1656864"/>
           </a:xfrm>
           <a:prstGeom prst="rect">
             <a:avLst/>
@@ -3577,7 +3581,16 @@
               </a:defRPr>
             </a:pPr>
             <a:r>
-              <a:t>Web: datos en IndexedDB (navegador)</a:t>
+              <a:rPr lang="es-ES" noProof="0" dirty="0"/>
+              <a:t>Web: datos en </a:t>
+            </a:r>
+            <a:r>
+              <a:rPr lang="es-ES" noProof="0" dirty="0" err="1"/>
+              <a:t>IndexedDB</a:t>
+            </a:r>
+            <a:r>
+              <a:rPr lang="es-ES" noProof="0" dirty="0"/>
+              <a:t> (navegador)</a:t>
             </a:r>
           </a:p>
           <a:p>
@@ -3593,6 +3606,7 @@
               </a:defRPr>
             </a:pPr>
             <a:r>
+              <a:rPr lang="es-ES" noProof="0" dirty="0"/>
               <a:t>Android: datos en SQLite (dispositivo)</a:t>
             </a:r>
           </a:p>
@@ -3609,6 +3623,7 @@
               </a:defRPr>
             </a:pPr>
             <a:r>
+              <a:rPr lang="es-ES" noProof="0" dirty="0"/>
               <a:t>Sin cuenta, sin registro, sin servidor</a:t>
             </a:r>
           </a:p>
@@ -3625,7 +3640,8 @@
               </a:defRPr>
             </a:pPr>
             <a:r>
-              <a:t>Funcionalidad completa sin conexion</a:t>
+              <a:rPr lang="es-ES" noProof="0" dirty="0"/>
+              <a:t>Funcionalidad completa sin conexión</a:t>
             </a:r>
           </a:p>
           <a:p>
@@ -3641,6 +3657,7 @@
               </a:defRPr>
             </a:pPr>
             <a:r>
+              <a:rPr lang="es-ES" noProof="0" dirty="0"/>
               <a:t>Tus datos = solo tuyos</a:t>
             </a:r>
           </a:p>
@@ -3677,6 +3694,7 @@
               </a:defRPr>
             </a:pPr>
             <a:r>
+              <a:rPr lang="es-ES" noProof="0" dirty="0"/>
               <a:t>Beneficios</a:t>
             </a:r>
           </a:p>
@@ -3691,7 +3709,7 @@
         <p:spPr>
           <a:xfrm>
             <a:off x="6400800" y="3108960"/>
-            <a:ext cx="5029200" cy="3200400"/>
+            <a:ext cx="5029200" cy="1656864"/>
           </a:xfrm>
           <a:prstGeom prst="rect">
             <a:avLst/>
@@ -3716,7 +3734,8 @@
               </a:defRPr>
             </a:pPr>
             <a:r>
-              <a:t>Velocidad instantanea (sin latencia de red)</a:t>
+              <a:rPr lang="es-ES" noProof="0" dirty="0"/>
+              <a:t>Velocidad instantánea (sin latencia de red)</a:t>
             </a:r>
           </a:p>
           <a:p>
@@ -3732,6 +3751,7 @@
               </a:defRPr>
             </a:pPr>
             <a:r>
+              <a:rPr lang="es-ES" noProof="0" dirty="0"/>
               <a:t>Privacidad absoluta por defecto</a:t>
             </a:r>
           </a:p>
@@ -3748,6 +3768,7 @@
               </a:defRPr>
             </a:pPr>
             <a:r>
+              <a:rPr lang="es-ES" noProof="0" dirty="0"/>
               <a:t>Funciona en aviones, metro, rural</a:t>
             </a:r>
           </a:p>
@@ -3764,7 +3785,8 @@
               </a:defRPr>
             </a:pPr>
             <a:r>
-              <a:t>Sin costos de suscripcion de nube</a:t>
+              <a:rPr lang="es-ES" noProof="0" dirty="0"/>
+              <a:t>Sin costos de suscripción de nube</a:t>
             </a:r>
           </a:p>
           <a:p>
@@ -3780,6 +3802,7 @@
               </a:defRPr>
             </a:pPr>
             <a:r>
+              <a:rPr lang="es-ES" noProof="0" dirty="0"/>
               <a:t>Cumplimiento GDPR simplificado</a:t>
             </a:r>
           </a:p>
@@ -3858,7 +3881,7 @@
           <a:lstStyle/>
           <a:p>
             <a:pPr algn="ctr"/>
-            <a:endParaRPr/>
+            <a:endParaRPr lang="es-ES" noProof="0" dirty="0"/>
           </a:p>
         </p:txBody>
       </p:sp>
@@ -3871,7 +3894,7 @@
         <p:spPr>
           <a:xfrm>
             <a:off x="731520" y="457200"/>
-            <a:ext cx="9144000" cy="731520"/>
+            <a:ext cx="9144000" cy="646331"/>
           </a:xfrm>
           <a:prstGeom prst="rect">
             <a:avLst/>
@@ -3893,7 +3916,8 @@
               </a:defRPr>
             </a:pPr>
             <a:r>
-              <a:t>Sincronizacion: Tu Servidor, Tus Reglas</a:t>
+              <a:rPr lang="es-ES" noProof="0" dirty="0"/>
+              <a:t>Sincronización: Tu Servidor, Tus Reglas</a:t>
             </a:r>
           </a:p>
         </p:txBody>
@@ -3907,7 +3931,7 @@
         <p:spPr>
           <a:xfrm>
             <a:off x="731520" y="1280160"/>
-            <a:ext cx="10058400" cy="914400"/>
+            <a:ext cx="10058400" cy="646331"/>
           </a:xfrm>
           <a:prstGeom prst="rect">
             <a:avLst/>
@@ -3929,7 +3953,32 @@
               </a:defRPr>
             </a:pPr>
             <a:r>
-              <a:t>Sincronizacion bidireccional opcional con tu propio backend auto-hospedado. Sin terceros, sin suscripciones cloud.</a:t>
+              <a:rPr lang="es-ES" noProof="0" dirty="0"/>
+              <a:t>Sincronización bidireccional opcional con tu propio </a:t>
+            </a:r>
+            <a:r>
+              <a:rPr lang="es-ES" noProof="0" dirty="0" err="1"/>
+              <a:t>backend</a:t>
+            </a:r>
+            <a:r>
+              <a:rPr lang="es-ES" noProof="0" dirty="0"/>
+              <a:t> </a:t>
+            </a:r>
+            <a:r>
+              <a:rPr lang="es-ES" noProof="0" dirty="0" err="1"/>
+              <a:t>auto-hospedado</a:t>
+            </a:r>
+            <a:r>
+              <a:rPr lang="es-ES" noProof="0" dirty="0"/>
+              <a:t>. Sin terceros, sin suscripciones </a:t>
+            </a:r>
+            <a:r>
+              <a:rPr lang="es-ES" noProof="0" dirty="0" err="1"/>
+              <a:t>cloud</a:t>
+            </a:r>
+            <a:r>
+              <a:rPr lang="es-ES" noProof="0" dirty="0"/>
+              <a:t>.</a:t>
             </a:r>
           </a:p>
         </p:txBody>
@@ -3943,7 +3992,7 @@
         <p:spPr>
           <a:xfrm>
             <a:off x="731520" y="2286000"/>
-            <a:ext cx="10058400" cy="4114800"/>
+            <a:ext cx="10058400" cy="3129062"/>
           </a:xfrm>
           <a:prstGeom prst="rect">
             <a:avLst/>
@@ -3968,7 +4017,24 @@
               </a:defRPr>
             </a:pPr>
             <a:r>
-              <a:t>Sincronizacion bidireccional: push + pull en cada ciclo</a:t>
+              <a:rPr lang="es-ES" noProof="0" dirty="0"/>
+              <a:t>Sincronización bidireccional: </a:t>
+            </a:r>
+            <a:r>
+              <a:rPr lang="es-ES" noProof="0" dirty="0" err="1"/>
+              <a:t>push</a:t>
+            </a:r>
+            <a:r>
+              <a:rPr lang="es-ES" noProof="0" dirty="0"/>
+              <a:t> + </a:t>
+            </a:r>
+            <a:r>
+              <a:rPr lang="es-ES" noProof="0" dirty="0" err="1"/>
+              <a:t>pull</a:t>
+            </a:r>
+            <a:r>
+              <a:rPr lang="es-ES" noProof="0" dirty="0"/>
+              <a:t> en cada ciclo</a:t>
             </a:r>
           </a:p>
           <a:p>
@@ -3984,6 +4050,7 @@
               </a:defRPr>
             </a:pPr>
             <a:r>
+              <a:rPr lang="es-ES" noProof="0" dirty="0"/>
               <a:t>Intervalo configurable: 5, 10, 15, 20, 25, 30, 45 o 60 minutos</a:t>
             </a:r>
           </a:p>
@@ -4000,7 +4067,12 @@
               </a:defRPr>
             </a:pPr>
             <a:r>
-              <a:t>Sync automatico al abrir la app y al cerrarla</a:t>
+              <a:rPr lang="es-ES" noProof="0" dirty="0" err="1"/>
+              <a:t>Sync</a:t>
+            </a:r>
+            <a:r>
+              <a:rPr lang="es-ES" noProof="0" dirty="0"/>
+              <a:t> automático al abrir la app y al cerrarla</a:t>
             </a:r>
           </a:p>
           <a:p>
@@ -4016,7 +4088,8 @@
               </a:defRPr>
             </a:pPr>
             <a:r>
-              <a:t>Deteccion inteligente de conectividad</a:t>
+              <a:rPr lang="es-ES" noProof="0" dirty="0"/>
+              <a:t>Detección inteligente de conectividad</a:t>
             </a:r>
           </a:p>
           <a:p>
@@ -4032,7 +4105,12 @@
               </a:defRPr>
             </a:pPr>
             <a:r>
-              <a:t>Sync manual disponible en cualquier momento</a:t>
+              <a:rPr lang="es-ES" noProof="0" dirty="0" err="1"/>
+              <a:t>Sync</a:t>
+            </a:r>
+            <a:r>
+              <a:rPr lang="es-ES" noProof="0" dirty="0"/>
+              <a:t> manual disponible en cualquier momento</a:t>
             </a:r>
           </a:p>
           <a:p>
@@ -4048,7 +4126,8 @@
               </a:defRPr>
             </a:pPr>
             <a:r>
-              <a:t>Resolucion de conflictos: Last-Writer-Wins (LWW)</a:t>
+              <a:rPr lang="es-ES" noProof="0" dirty="0"/>
+              <a:t>Resolución de conflictos: Last-Writer-Wins (LWW)</a:t>
             </a:r>
           </a:p>
           <a:p>
@@ -4064,6 +4143,7 @@
               </a:defRPr>
             </a:pPr>
             <a:r>
+              <a:rPr lang="es-ES" noProof="0" dirty="0"/>
               <a:t>Indicador de estado en tiempo real (Activo/Fallando/Pausado)</a:t>
             </a:r>
           </a:p>
@@ -4080,7 +4160,12 @@
               </a:defRPr>
             </a:pPr>
             <a:r>
-              <a:t>Backend desplegable con Docker en minutos</a:t>
+              <a:rPr lang="es-ES" noProof="0" dirty="0" err="1"/>
+              <a:t>Backend</a:t>
+            </a:r>
+            <a:r>
+              <a:rPr lang="es-ES" noProof="0" dirty="0"/>
+              <a:t> desplegable con Docker en minutos</a:t>
             </a:r>
           </a:p>
           <a:p>
@@ -4096,7 +4181,16 @@
               </a:defRPr>
             </a:pPr>
             <a:r>
-              <a:t>API key como unica autenticacion (simple y seguro)</a:t>
+              <a:rPr lang="es-ES" noProof="0" dirty="0"/>
+              <a:t>API </a:t>
+            </a:r>
+            <a:r>
+              <a:rPr lang="es-ES" noProof="0" dirty="0" err="1"/>
+              <a:t>key</a:t>
+            </a:r>
+            <a:r>
+              <a:rPr lang="es-ES" noProof="0" dirty="0"/>
+              <a:t> como única autenticación (simple y seguro)</a:t>
             </a:r>
           </a:p>
         </p:txBody>
@@ -4130,7 +4224,7 @@
           <a:lstStyle/>
           <a:p>
             <a:r>
-              <a:rPr lang="es-ES" sz="16600" dirty="0"/>
+              <a:rPr lang="es-ES" sz="16600" noProof="0" dirty="0"/>
               <a:t>🔄️</a:t>
             </a:r>
           </a:p>
@@ -4209,7 +4303,7 @@
           <a:lstStyle/>
           <a:p>
             <a:pPr algn="ctr"/>
-            <a:endParaRPr/>
+            <a:endParaRPr lang="es-ES" noProof="0" dirty="0"/>
           </a:p>
         </p:txBody>
       </p:sp>
@@ -4222,7 +4316,7 @@
         <p:spPr>
           <a:xfrm>
             <a:off x="731520" y="457200"/>
-            <a:ext cx="9144000" cy="731520"/>
+            <a:ext cx="9144000" cy="646331"/>
           </a:xfrm>
           <a:prstGeom prst="rect">
             <a:avLst/>
@@ -4244,7 +4338,12 @@
               </a:defRPr>
             </a:pPr>
             <a:r>
-              <a:t>Backups: Tu Informacion Siempre Segura</a:t>
+              <a:rPr lang="es-ES" noProof="0" dirty="0" err="1"/>
+              <a:t>Backups</a:t>
+            </a:r>
+            <a:r>
+              <a:rPr lang="es-ES" noProof="0" dirty="0"/>
+              <a:t>: Tu Información Siempre Segura</a:t>
             </a:r>
           </a:p>
         </p:txBody>
@@ -4258,7 +4357,7 @@
         <p:spPr>
           <a:xfrm>
             <a:off x="731520" y="1280160"/>
-            <a:ext cx="10058400" cy="731520"/>
+            <a:ext cx="10058400" cy="369332"/>
           </a:xfrm>
           <a:prstGeom prst="rect">
             <a:avLst/>
@@ -4280,7 +4379,8 @@
               </a:defRPr>
             </a:pPr>
             <a:r>
-              <a:t>Exporta e importa todos tus datos sin depender de ningun servidor</a:t>
+              <a:rPr lang="es-ES" noProof="0" dirty="0"/>
+              <a:t>Exporta e importa todos tus datos sin depender de ningún servidor</a:t>
             </a:r>
           </a:p>
         </p:txBody>
@@ -4294,7 +4394,7 @@
         <p:spPr>
           <a:xfrm>
             <a:off x="731520" y="2103120"/>
-            <a:ext cx="10058400" cy="4114800"/>
+            <a:ext cx="10058400" cy="2431435"/>
           </a:xfrm>
           <a:prstGeom prst="rect">
             <a:avLst/>
@@ -4319,7 +4419,16 @@
               </a:defRPr>
             </a:pPr>
             <a:r>
-              <a:t>Exportacion completa a archivo .bak (formato JSON portable)</a:t>
+              <a:rPr lang="es-ES" noProof="0" dirty="0"/>
+              <a:t>Exportación completa a archivo .</a:t>
+            </a:r>
+            <a:r>
+              <a:rPr lang="es-ES" noProof="0" dirty="0" err="1"/>
+              <a:t>bak</a:t>
+            </a:r>
+            <a:r>
+              <a:rPr lang="es-ES" noProof="0" dirty="0"/>
+              <a:t> (formato JSON portable)</a:t>
             </a:r>
           </a:p>
           <a:p>
@@ -4335,7 +4444,8 @@
               </a:defRPr>
             </a:pPr>
             <a:r>
-              <a:t>Incluye: eventos, turnos, recordatorios, notificaciones, configuracion</a:t>
+              <a:rPr lang="es-ES" noProof="0" dirty="0"/>
+              <a:t>Incluye: eventos, turnos, recordatorios, notificaciones, configuración</a:t>
             </a:r>
           </a:p>
           <a:p>
@@ -4351,7 +4461,16 @@
               </a:defRPr>
             </a:pPr>
             <a:r>
-              <a:t>Restauracion con merge inteligente (Last-Writer-Wins)</a:t>
+              <a:rPr lang="es-ES" noProof="0" dirty="0"/>
+              <a:t>Restauración con </a:t>
+            </a:r>
+            <a:r>
+              <a:rPr lang="es-ES" noProof="0" dirty="0" err="1"/>
+              <a:t>merge</a:t>
+            </a:r>
+            <a:r>
+              <a:rPr lang="es-ES" noProof="0" dirty="0"/>
+              <a:t> inteligente (Last-Writer-Wins)</a:t>
             </a:r>
           </a:p>
           <a:p>
@@ -4367,7 +4486,16 @@
               </a:defRPr>
             </a:pPr>
             <a:r>
-              <a:t>Cross-platform: crea en web, restaura en Android (y viceversa)</a:t>
+              <a:rPr lang="es-ES" noProof="0" dirty="0"/>
+              <a:t>Cross-</a:t>
+            </a:r>
+            <a:r>
+              <a:rPr lang="es-ES" noProof="0" dirty="0" err="1"/>
+              <a:t>platform</a:t>
+            </a:r>
+            <a:r>
+              <a:rPr lang="es-ES" noProof="0" dirty="0"/>
+              <a:t>: crea en web, restaura en Android (y viceversa)</a:t>
             </a:r>
           </a:p>
           <a:p>
@@ -4383,8 +4511,22 @@
               </a:defRPr>
             </a:pPr>
             <a:r>
-              <a:t>Sin backend necesario para backups</a:t>
-            </a:r>
+              <a:rPr lang="es-ES" noProof="0" dirty="0"/>
+              <a:t>Sin </a:t>
+            </a:r>
+            <a:r>
+              <a:rPr lang="es-ES" noProof="0" dirty="0" err="1"/>
+              <a:t>backend</a:t>
+            </a:r>
+            <a:r>
+              <a:rPr lang="es-ES" noProof="0" dirty="0"/>
+              <a:t> necesario para </a:t>
+            </a:r>
+            <a:r>
+              <a:rPr lang="es-ES" noProof="0" dirty="0" err="1"/>
+              <a:t>backups</a:t>
+            </a:r>
+            <a:endParaRPr lang="es-ES" noProof="0" dirty="0"/>
           </a:p>
           <a:p>
             <a:pPr>
@@ -4399,7 +4541,8 @@
               </a:defRPr>
             </a:pPr>
             <a:r>
-              <a:t>Dialogo de confirmacion antes de sobrescribir datos existentes</a:t>
+              <a:rPr lang="es-ES" noProof="0" dirty="0"/>
+              <a:t>Dialogo de confirmación antes de sobrescribir datos existentes</a:t>
             </a:r>
           </a:p>
           <a:p>
@@ -4415,8 +4558,14 @@
               </a:defRPr>
             </a:pPr>
             <a:r>
-              <a:t>Accesible desde Ajustes &gt; Backups</a:t>
-            </a:r>
+              <a:rPr lang="es-ES" noProof="0" dirty="0"/>
+              <a:t>Accesible desde Ajustes &gt; </a:t>
+            </a:r>
+            <a:r>
+              <a:rPr lang="es-ES" noProof="0" dirty="0" err="1"/>
+              <a:t>Backups</a:t>
+            </a:r>
+            <a:endParaRPr lang="es-ES" noProof="0" dirty="0"/>
           </a:p>
         </p:txBody>
       </p:sp>
@@ -4449,7 +4598,7 @@
           <a:lstStyle/>
           <a:p>
             <a:r>
-              <a:rPr lang="es-ES" sz="16600" dirty="0"/>
+              <a:rPr lang="es-ES" sz="16600" noProof="0" dirty="0"/>
               <a:t>💾</a:t>
             </a:r>
           </a:p>
@@ -4528,7 +4677,7 @@
           <a:lstStyle/>
           <a:p>
             <a:pPr algn="ctr"/>
-            <a:endParaRPr/>
+            <a:endParaRPr lang="es-ES" noProof="0" dirty="0"/>
           </a:p>
         </p:txBody>
       </p:sp>
@@ -4563,6 +4712,7 @@
               </a:defRPr>
             </a:pPr>
             <a:r>
+              <a:rPr lang="es-ES" noProof="0" dirty="0"/>
               <a:t>Multiplataforma: Web + Android</a:t>
             </a:r>
           </a:p>
@@ -4599,6 +4749,7 @@
               </a:defRPr>
             </a:pPr>
             <a:r>
+              <a:rPr lang="es-ES" noProof="0" dirty="0"/>
               <a:t>Web (PWA)</a:t>
             </a:r>
           </a:p>
@@ -4613,7 +4764,7 @@
         <p:spPr>
           <a:xfrm>
             <a:off x="731520" y="2011680"/>
-            <a:ext cx="5029200" cy="4114800"/>
+            <a:ext cx="5029200" cy="2215991"/>
           </a:xfrm>
           <a:prstGeom prst="rect">
             <a:avLst/>
@@ -4638,7 +4789,12 @@
               </a:defRPr>
             </a:pPr>
             <a:r>
-              <a:t>Progressive Web App instalable</a:t>
+              <a:rPr lang="es-ES" noProof="0" dirty="0" err="1"/>
+              <a:t>Progressive</a:t>
+            </a:r>
+            <a:r>
+              <a:rPr lang="es-ES" noProof="0" dirty="0"/>
+              <a:t> Web App instalable</a:t>
             </a:r>
           </a:p>
           <a:p>
@@ -4654,7 +4810,20 @@
               </a:defRPr>
             </a:pPr>
             <a:r>
-              <a:t>React 19 + TypeScript + Vite</a:t>
+              <a:rPr lang="es-ES" noProof="0" dirty="0" err="1"/>
+              <a:t>React</a:t>
+            </a:r>
+            <a:r>
+              <a:rPr lang="es-ES" noProof="0" dirty="0"/>
+              <a:t> 19 + </a:t>
+            </a:r>
+            <a:r>
+              <a:rPr lang="es-ES" noProof="0" dirty="0" err="1"/>
+              <a:t>TypeScript</a:t>
+            </a:r>
+            <a:r>
+              <a:rPr lang="es-ES" noProof="0" dirty="0"/>
+              <a:t> + Vite</a:t>
             </a:r>
           </a:p>
           <a:p>
@@ -4670,6 +4839,7 @@
               </a:defRPr>
             </a:pPr>
             <a:r>
+              <a:rPr lang="es-ES" noProof="0" dirty="0"/>
               <a:t>Funciona en cualquier navegador moderno</a:t>
             </a:r>
           </a:p>
@@ -4686,7 +4856,16 @@
               </a:defRPr>
             </a:pPr>
             <a:r>
-              <a:t>Modo escritorio con sidebar de navegacion</a:t>
+              <a:rPr lang="es-ES" noProof="0" dirty="0"/>
+              <a:t>Modo escritorio con </a:t>
+            </a:r>
+            <a:r>
+              <a:rPr lang="es-ES" noProof="0" dirty="0" err="1"/>
+              <a:t>sidebar</a:t>
+            </a:r>
+            <a:r>
+              <a:rPr lang="es-ES" noProof="0" dirty="0"/>
+              <a:t> de navegación</a:t>
             </a:r>
           </a:p>
           <a:p>
@@ -4702,8 +4881,14 @@
               </a:defRPr>
             </a:pPr>
             <a:r>
-              <a:t>Modo movil con bottom navigation</a:t>
-            </a:r>
+              <a:rPr lang="es-ES" noProof="0" dirty="0"/>
+              <a:t>Modo móvil con bottom </a:t>
+            </a:r>
+            <a:r>
+              <a:rPr lang="es-ES" noProof="0" dirty="0" err="1"/>
+              <a:t>navigation</a:t>
+            </a:r>
+            <a:endParaRPr lang="es-ES" noProof="0" dirty="0"/>
           </a:p>
           <a:p>
             <a:pPr>
@@ -4718,7 +4903,12 @@
               </a:defRPr>
             </a:pPr>
             <a:r>
-              <a:t>IndexedDB para almacenamiento persistente</a:t>
+              <a:rPr lang="es-ES" noProof="0" dirty="0" err="1"/>
+              <a:t>IndexedDB</a:t>
+            </a:r>
+            <a:r>
+              <a:rPr lang="es-ES" noProof="0" dirty="0"/>
+              <a:t> para almacenamiento persistente</a:t>
             </a:r>
           </a:p>
           <a:p>
@@ -4734,7 +4924,8 @@
               </a:defRPr>
             </a:pPr>
             <a:r>
-              <a:t>Tema claro/oscuro + bilingue ES/EN</a:t>
+              <a:rPr lang="es-ES" noProof="0" dirty="0"/>
+              <a:t>Tema claro/oscuro + bilingüe ES/EN</a:t>
             </a:r>
           </a:p>
         </p:txBody>
@@ -4770,6 +4961,7 @@
               </a:defRPr>
             </a:pPr>
             <a:r>
+              <a:rPr lang="es-ES" noProof="0" dirty="0"/>
               <a:t>Android Nativo</a:t>
             </a:r>
           </a:p>
@@ -4809,8 +5001,26 @@
               </a:defRPr>
             </a:pPr>
             <a:r>
-              <a:t>Kotlin + Jetpack Compose</a:t>
-            </a:r>
+              <a:rPr lang="es-ES" noProof="0" dirty="0" err="1"/>
+              <a:t>Kotlin</a:t>
+            </a:r>
+            <a:r>
+              <a:rPr lang="es-ES" noProof="0" dirty="0"/>
+              <a:t> + </a:t>
+            </a:r>
+            <a:r>
+              <a:rPr lang="es-ES" noProof="0" dirty="0" err="1"/>
+              <a:t>Jetpack</a:t>
+            </a:r>
+            <a:r>
+              <a:rPr lang="es-ES" noProof="0" dirty="0"/>
+              <a:t> </a:t>
+            </a:r>
+            <a:r>
+              <a:rPr lang="es-ES" noProof="0" dirty="0" err="1"/>
+              <a:t>Compose</a:t>
+            </a:r>
+            <a:endParaRPr lang="es-ES" noProof="0" dirty="0"/>
           </a:p>
           <a:p>
             <a:pPr>
@@ -4825,7 +5035,16 @@
               </a:defRPr>
             </a:pPr>
             <a:r>
-              <a:t>Material Design 3</a:t>
+              <a:rPr lang="es-ES" noProof="0" dirty="0"/>
+              <a:t>Material </a:t>
+            </a:r>
+            <a:r>
+              <a:rPr lang="es-ES" noProof="0" dirty="0" err="1"/>
+              <a:t>Design</a:t>
+            </a:r>
+            <a:r>
+              <a:rPr lang="es-ES" noProof="0" dirty="0"/>
+              <a:t> 3</a:t>
             </a:r>
           </a:p>
           <a:p>
@@ -4841,6 +5060,7 @@
               </a:defRPr>
             </a:pPr>
             <a:r>
+              <a:rPr lang="es-ES" noProof="0" dirty="0"/>
               <a:t>SQLite + Room para persistencia</a:t>
             </a:r>
           </a:p>
@@ -4857,6 +5077,7 @@
               </a:defRPr>
             </a:pPr>
             <a:r>
+              <a:rPr lang="es-ES" noProof="0" dirty="0"/>
               <a:t>Icono adaptativo con gradiente de marca</a:t>
             </a:r>
           </a:p>
@@ -4873,7 +5094,16 @@
               </a:defRPr>
             </a:pPr>
             <a:r>
-              <a:t>Notificaciones push del sistema</a:t>
+              <a:rPr lang="es-ES" noProof="0" dirty="0"/>
+              <a:t>Notificaciones </a:t>
+            </a:r>
+            <a:r>
+              <a:rPr lang="es-ES" noProof="0" dirty="0" err="1"/>
+              <a:t>push</a:t>
+            </a:r>
+            <a:r>
+              <a:rPr lang="es-ES" noProof="0" dirty="0"/>
+              <a:t> del sistema</a:t>
             </a:r>
           </a:p>
           <a:p>
@@ -4889,6 +5119,7 @@
               </a:defRPr>
             </a:pPr>
             <a:r>
+              <a:rPr lang="es-ES" noProof="0" dirty="0"/>
               <a:t>Cambio de tema e idioma sin reinicio</a:t>
             </a:r>
           </a:p>
@@ -4905,7 +5136,16 @@
               </a:defRPr>
             </a:pPr>
             <a:r>
-              <a:t>Bottom navigation con iconos</a:t>
+              <a:rPr lang="es-ES" noProof="0" dirty="0"/>
+              <a:t>Bottom </a:t>
+            </a:r>
+            <a:r>
+              <a:rPr lang="es-ES" noProof="0" dirty="0" err="1"/>
+              <a:t>navigation</a:t>
+            </a:r>
+            <a:r>
+              <a:rPr lang="es-ES" noProof="0" dirty="0"/>
+              <a:t> con iconos</a:t>
             </a:r>
           </a:p>
         </p:txBody>
@@ -4983,7 +5223,7 @@
           <a:lstStyle/>
           <a:p>
             <a:pPr algn="ctr"/>
-            <a:endParaRPr/>
+            <a:endParaRPr lang="es-ES" noProof="0" dirty="0"/>
           </a:p>
         </p:txBody>
       </p:sp>
@@ -4996,7 +5236,7 @@
         <p:spPr>
           <a:xfrm>
             <a:off x="731520" y="457200"/>
-            <a:ext cx="9144000" cy="731520"/>
+            <a:ext cx="9144000" cy="646331"/>
           </a:xfrm>
           <a:prstGeom prst="rect">
             <a:avLst/>
@@ -5018,7 +5258,8 @@
               </a:defRPr>
             </a:pPr>
             <a:r>
-              <a:t>Diseno Moderno y Accesible</a:t>
+              <a:rPr lang="es-ES" noProof="0" dirty="0"/>
+              <a:t>Diseño Moderno y Accesible</a:t>
             </a:r>
           </a:p>
         </p:txBody>
@@ -5032,7 +5273,7 @@
         <p:spPr>
           <a:xfrm>
             <a:off x="731520" y="1463040"/>
-            <a:ext cx="10058400" cy="5029200"/>
+            <a:ext cx="10058400" cy="3477875"/>
           </a:xfrm>
           <a:prstGeom prst="rect">
             <a:avLst/>
@@ -5057,6 +5298,7 @@
               </a:defRPr>
             </a:pPr>
             <a:r>
+              <a:rPr lang="es-ES" noProof="0" dirty="0"/>
               <a:t>Interfaz limpia y minimalista — sin distracciones</a:t>
             </a:r>
           </a:p>
@@ -5073,7 +5315,8 @@
               </a:defRPr>
             </a:pPr>
             <a:r>
-              <a:t>Tipografia Poppins para maxima legibilidad</a:t>
+              <a:rPr lang="es-ES" noProof="0" dirty="0"/>
+              <a:t>Tipografía Poppins para máxima legibilidad</a:t>
             </a:r>
           </a:p>
           <a:p>
@@ -5089,6 +5332,7 @@
               </a:defRPr>
             </a:pPr>
             <a:r>
+              <a:rPr lang="es-ES" noProof="0" dirty="0"/>
               <a:t>Tema claro y oscuro (cambia al instante, sin reinicio)</a:t>
             </a:r>
           </a:p>
@@ -5105,6 +5349,7 @@
               </a:defRPr>
             </a:pPr>
             <a:r>
+              <a:rPr lang="es-ES" noProof="0" dirty="0"/>
               <a:t>Paleta de colores consistente en ambas plataformas</a:t>
             </a:r>
           </a:p>
@@ -5121,6 +5366,7 @@
               </a:defRPr>
             </a:pPr>
             <a:r>
+              <a:rPr lang="es-ES" noProof="0" dirty="0"/>
               <a:t>Gradiente azul-purpura como identidad visual</a:t>
             </a:r>
           </a:p>
@@ -5137,7 +5383,24 @@
               </a:defRPr>
             </a:pPr>
             <a:r>
-              <a:t>Iconografia uniforme estilo outline (Lucide Icons)</a:t>
+              <a:rPr lang="es-ES" noProof="0" dirty="0"/>
+              <a:t>Iconografía uniforme estilo </a:t>
+            </a:r>
+            <a:r>
+              <a:rPr lang="es-ES" noProof="0" dirty="0" err="1"/>
+              <a:t>outline</a:t>
+            </a:r>
+            <a:r>
+              <a:rPr lang="es-ES" noProof="0" dirty="0"/>
+              <a:t> (Lucide </a:t>
+            </a:r>
+            <a:r>
+              <a:rPr lang="es-ES" noProof="0" dirty="0" err="1"/>
+              <a:t>Icons</a:t>
+            </a:r>
+            <a:r>
+              <a:rPr lang="es-ES" noProof="0" dirty="0"/>
+              <a:t>)</a:t>
             </a:r>
           </a:p>
           <a:p>
@@ -5153,7 +5416,8 @@
               </a:defRPr>
             </a:pPr>
             <a:r>
-              <a:t>Accesibilidad: contraste WCAG AA, navegacion por teclado</a:t>
+              <a:rPr lang="es-ES" noProof="0" dirty="0"/>
+              <a:t>Accesibilidad: contraste WCAG AA, navegación por teclado</a:t>
             </a:r>
           </a:p>
           <a:p>
@@ -5169,7 +5433,16 @@
               </a:defRPr>
             </a:pPr>
             <a:r>
-              <a:t>Responsive: desktop, tablet y movil</a:t>
+              <a:rPr lang="es-ES" noProof="0" dirty="0"/>
+              <a:t>Responsive: desktop, </a:t>
+            </a:r>
+            <a:r>
+              <a:rPr lang="es-ES" noProof="0" dirty="0" err="1"/>
+              <a:t>tablet</a:t>
+            </a:r>
+            <a:r>
+              <a:rPr lang="es-ES" noProof="0" dirty="0"/>
+              <a:t> y móvil</a:t>
             </a:r>
           </a:p>
           <a:p>
@@ -5185,6 +5458,7 @@
               </a:defRPr>
             </a:pPr>
             <a:r>
+              <a:rPr lang="es-ES" noProof="0" dirty="0"/>
               <a:t>Espaciado basado en sistema de 4px</a:t>
             </a:r>
           </a:p>
@@ -5201,6 +5475,7 @@
               </a:defRPr>
             </a:pPr>
             <a:r>
+              <a:rPr lang="es-ES" noProof="0" dirty="0"/>
               <a:t>Tarjetas con indicador de color lateral por tipo de turno</a:t>
             </a:r>
           </a:p>
@@ -5339,7 +5614,7 @@
           <a:lstStyle/>
           <a:p>
             <a:pPr algn="ctr"/>
-            <a:endParaRPr/>
+            <a:endParaRPr lang="es-ES" noProof="0" dirty="0"/>
           </a:p>
         </p:txBody>
       </p:sp>
@@ -5374,6 +5649,7 @@
               </a:defRPr>
             </a:pPr>
             <a:r>
+              <a:rPr lang="es-ES" noProof="0" dirty="0"/>
               <a:t>Notificaciones Inteligentes</a:t>
             </a:r>
           </a:p>
@@ -5410,6 +5686,7 @@
               </a:defRPr>
             </a:pPr>
             <a:r>
+              <a:rPr lang="es-ES" noProof="0" dirty="0"/>
               <a:t>Nunca pierdas un turno o evento importante con alertas configurables</a:t>
             </a:r>
           </a:p>
@@ -5424,7 +5701,7 @@
         <p:spPr>
           <a:xfrm>
             <a:off x="731520" y="2103120"/>
-            <a:ext cx="10058400" cy="4114800"/>
+            <a:ext cx="10058400" cy="3477875"/>
           </a:xfrm>
           <a:prstGeom prst="rect">
             <a:avLst/>
@@ -5449,6 +5726,7 @@
               </a:defRPr>
             </a:pPr>
             <a:r>
+              <a:rPr lang="es-ES" noProof="0" dirty="0"/>
               <a:t>Alertas configurables por evento:</a:t>
             </a:r>
           </a:p>
@@ -5465,6 +5743,7 @@
               </a:defRPr>
             </a:pPr>
             <a:r>
+              <a:rPr lang="es-ES" noProof="0" dirty="0"/>
               <a:t>    - Al inicio del evento</a:t>
             </a:r>
           </a:p>
@@ -5481,6 +5760,7 @@
               </a:defRPr>
             </a:pPr>
             <a:r>
+              <a:rPr lang="es-ES" noProof="0" dirty="0"/>
               <a:t>    - 10 minutos antes</a:t>
             </a:r>
           </a:p>
@@ -5497,6 +5777,7 @@
               </a:defRPr>
             </a:pPr>
             <a:r>
+              <a:rPr lang="es-ES" noProof="0" dirty="0"/>
               <a:t>    - 1 hora antes</a:t>
             </a:r>
           </a:p>
@@ -5513,7 +5794,8 @@
               </a:defRPr>
             </a:pPr>
             <a:r>
-              <a:t>    - 1 dia antes</a:t>
+              <a:rPr lang="es-ES" noProof="0" dirty="0"/>
+              <a:t>    - 1 día antes</a:t>
             </a:r>
           </a:p>
           <a:p>
@@ -5529,7 +5811,24 @@
               </a:defRPr>
             </a:pPr>
             <a:r>
-              <a:t>Canales: in-app, push del sistema, o ambos</a:t>
+              <a:rPr lang="es-ES" noProof="0" dirty="0"/>
+              <a:t>Canales: </a:t>
+            </a:r>
+            <a:r>
+              <a:rPr lang="es-ES" noProof="0" dirty="0" err="1"/>
+              <a:t>in-app</a:t>
+            </a:r>
+            <a:r>
+              <a:rPr lang="es-ES" noProof="0" dirty="0"/>
+              <a:t>, </a:t>
+            </a:r>
+            <a:r>
+              <a:rPr lang="es-ES" noProof="0" dirty="0" err="1"/>
+              <a:t>push</a:t>
+            </a:r>
+            <a:r>
+              <a:rPr lang="es-ES" noProof="0" dirty="0"/>
+              <a:t> del sistema, o ambos</a:t>
             </a:r>
           </a:p>
           <a:p>
@@ -5545,6 +5844,7 @@
               </a:defRPr>
             </a:pPr>
             <a:r>
+              <a:rPr lang="es-ES" noProof="0" dirty="0"/>
               <a:t>Centro de notificaciones accesible desde la campana (top bar)</a:t>
             </a:r>
           </a:p>
@@ -5561,7 +5861,8 @@
               </a:defRPr>
             </a:pPr>
             <a:r>
-              <a:t>Marcar todas como leidas con un toque</a:t>
+              <a:rPr lang="es-ES" noProof="0" dirty="0"/>
+              <a:t>Marcar todas como leídas con un toque</a:t>
             </a:r>
           </a:p>
           <a:p>
@@ -5577,7 +5878,8 @@
               </a:defRPr>
             </a:pPr>
             <a:r>
-              <a:t>Limpieza automatica de notificaciones pasadas</a:t>
+              <a:rPr lang="es-ES" noProof="0" dirty="0"/>
+              <a:t>Limpieza automática de notificaciones pasadas</a:t>
             </a:r>
           </a:p>
           <a:p>
@@ -5593,7 +5895,8 @@
               </a:defRPr>
             </a:pPr>
             <a:r>
-              <a:t>Configuracion global en Ajustes &gt; Notificaciones</a:t>
+              <a:rPr lang="es-ES" noProof="0" dirty="0"/>
+              <a:t>Configuración global en Ajustes &gt; Notificaciones</a:t>
             </a:r>
           </a:p>
         </p:txBody>
@@ -5627,7 +5930,7 @@
           <a:lstStyle/>
           <a:p>
             <a:r>
-              <a:rPr lang="es-ES" sz="16600" dirty="0"/>
+              <a:rPr lang="es-ES" sz="16600" noProof="0" dirty="0"/>
               <a:t>🔔</a:t>
             </a:r>
           </a:p>
@@ -5706,7 +6009,7 @@
           <a:lstStyle/>
           <a:p>
             <a:pPr algn="ctr"/>
-            <a:endParaRPr/>
+            <a:endParaRPr lang="es-ES" noProof="0" dirty="0"/>
           </a:p>
         </p:txBody>
       </p:sp>
@@ -5741,6 +6044,7 @@
               </a:defRPr>
             </a:pPr>
             <a:r>
+              <a:rPr lang="es-ES" noProof="0" dirty="0"/>
               <a:t>Personalizable a Tu Medida</a:t>
             </a:r>
           </a:p>
@@ -5755,7 +6059,7 @@
         <p:spPr>
           <a:xfrm>
             <a:off x="731520" y="1463040"/>
-            <a:ext cx="10058400" cy="5029200"/>
+            <a:ext cx="10058400" cy="2780248"/>
           </a:xfrm>
           <a:prstGeom prst="rect">
             <a:avLst/>
@@ -5780,6 +6084,7 @@
               </a:defRPr>
             </a:pPr>
             <a:r>
+              <a:rPr lang="es-ES" noProof="0" dirty="0"/>
               <a:t>Tema: Claro, Oscuro o Sistema (se aplica al instante)</a:t>
             </a:r>
           </a:p>
@@ -5796,7 +6101,8 @@
               </a:defRPr>
             </a:pPr>
             <a:r>
-              <a:t>Idioma: Espanol / Ingles (cambio inmediato sin reinicio)</a:t>
+              <a:rPr lang="es-ES" noProof="0" dirty="0"/>
+              <a:t>Idioma: Español / Ingles (cambio inmediato sin reinicio)</a:t>
             </a:r>
           </a:p>
           <a:p>
@@ -5812,7 +6118,8 @@
               </a:defRPr>
             </a:pPr>
             <a:r>
-              <a:t>Intervalo de sincronizacion personalizable (5-60 min)</a:t>
+              <a:rPr lang="es-ES" noProof="0" dirty="0"/>
+              <a:t>Intervalo de sincronización personalizable (5-60 min)</a:t>
             </a:r>
           </a:p>
           <a:p>
@@ -5828,7 +6135,8 @@
               </a:defRPr>
             </a:pPr>
             <a:r>
-              <a:t>Configuracion de canal de notificaciones</a:t>
+              <a:rPr lang="es-ES" noProof="0" dirty="0"/>
+              <a:t>Configuración de canal de notificaciones</a:t>
             </a:r>
           </a:p>
           <a:p>
@@ -5844,7 +6152,8 @@
               </a:defRPr>
             </a:pPr>
             <a:r>
-              <a:t>Servidor de sincronizacion con URL personalizable</a:t>
+              <a:rPr lang="es-ES" noProof="0" dirty="0"/>
+              <a:t>Servidor de sincronización con URL personalizable</a:t>
             </a:r>
           </a:p>
           <a:p>
@@ -5860,7 +6169,12 @@
               </a:defRPr>
             </a:pPr>
             <a:r>
-              <a:t>Backups manuales y restauracion</a:t>
+              <a:rPr lang="es-ES" noProof="0" dirty="0" err="1"/>
+              <a:t>Backups</a:t>
+            </a:r>
+            <a:r>
+              <a:rPr lang="es-ES" noProof="0" dirty="0"/>
+              <a:t> manuales y restauración</a:t>
             </a:r>
           </a:p>
           <a:p>
@@ -5876,7 +6190,12 @@
               </a:defRPr>
             </a:pPr>
             <a:r>
-              <a:t>Reset de aplicacion (zona de peligro) para limpiar datos</a:t>
+              <a:rPr lang="es-ES" noProof="0" dirty="0" err="1"/>
+              <a:t>Reset</a:t>
+            </a:r>
+            <a:r>
+              <a:rPr lang="es-ES" noProof="0" dirty="0"/>
+              <a:t> de aplicación (zona de peligro) para limpiar datos</a:t>
             </a:r>
           </a:p>
           <a:p>
@@ -5892,6 +6211,7 @@
               </a:defRPr>
             </a:pPr>
             <a:r>
+              <a:rPr lang="es-ES" noProof="0" dirty="0"/>
               <a:t>Todas las preferencias persisten localmente</a:t>
             </a:r>
           </a:p>
@@ -6000,7 +6320,7 @@
           <a:lstStyle/>
           <a:p>
             <a:pPr algn="ctr"/>
-            <a:endParaRPr/>
+            <a:endParaRPr lang="es-ES" noProof="0" dirty="0"/>
           </a:p>
         </p:txBody>
       </p:sp>
@@ -6035,8 +6355,14 @@
               </a:defRPr>
             </a:pPr>
             <a:r>
-              <a:t>Arquitectura y Tecnologia</a:t>
-            </a:r>
+              <a:rPr lang="es-ES" noProof="0" dirty="0"/>
+              <a:t>Arquitectura y </a:t>
+            </a:r>
+            <a:r>
+              <a:rPr lang="es-ES" noProof="0" dirty="0" err="1"/>
+              <a:t>Tecnologia</a:t>
+            </a:r>
+            <a:endParaRPr lang="es-ES" noProof="0" dirty="0"/>
           </a:p>
         </p:txBody>
       </p:sp>
@@ -6071,7 +6397,12 @@
               </a:defRPr>
             </a:pPr>
             <a:r>
-              <a:t>Backend (API)</a:t>
+              <a:rPr lang="es-ES" noProof="0" dirty="0" err="1"/>
+              <a:t>Backend</a:t>
+            </a:r>
+            <a:r>
+              <a:rPr lang="es-ES" noProof="0" dirty="0"/>
+              <a:t> (API)</a:t>
             </a:r>
           </a:p>
         </p:txBody>
@@ -6110,6 +6441,7 @@
               </a:defRPr>
             </a:pPr>
             <a:r>
+              <a:rPr lang="es-ES" noProof="0" dirty="0"/>
               <a:t>.NET 10 (C#)</a:t>
             </a:r>
           </a:p>
@@ -6126,6 +6458,7 @@
               </a:defRPr>
             </a:pPr>
             <a:r>
+              <a:rPr lang="es-ES" noProof="0" dirty="0"/>
               <a:t>REST API + Docker</a:t>
             </a:r>
           </a:p>
@@ -6142,6 +6475,7 @@
               </a:defRPr>
             </a:pPr>
             <a:r>
+              <a:rPr lang="es-ES" noProof="0" dirty="0"/>
               <a:t>MySQL / EF Core</a:t>
             </a:r>
           </a:p>
@@ -6158,8 +6492,14 @@
               </a:defRPr>
             </a:pPr>
             <a:r>
-              <a:t>API Key auth</a:t>
-            </a:r>
+              <a:rPr lang="es-ES" noProof="0" dirty="0"/>
+              <a:t>API Key </a:t>
+            </a:r>
+            <a:r>
+              <a:rPr lang="es-ES" noProof="0" dirty="0" err="1"/>
+              <a:t>auth</a:t>
+            </a:r>
+            <a:endParaRPr lang="es-ES" noProof="0" dirty="0"/>
           </a:p>
           <a:p>
             <a:pPr>
@@ -6174,8 +6514,10 @@
               </a:defRPr>
             </a:pPr>
             <a:r>
+              <a:rPr lang="es-ES" noProof="0" dirty="0" err="1"/>
               <a:t>Auto-hospedable</a:t>
             </a:r>
+            <a:endParaRPr lang="es-ES" noProof="0" dirty="0"/>
           </a:p>
         </p:txBody>
       </p:sp>
@@ -6210,6 +6552,7 @@
               </a:defRPr>
             </a:pPr>
             <a:r>
+              <a:rPr lang="es-ES" noProof="0" dirty="0"/>
               <a:t>Web (PWA)</a:t>
             </a:r>
           </a:p>
@@ -6249,8 +6592,18 @@
               </a:defRPr>
             </a:pPr>
             <a:r>
-              <a:t>React 19 + TypeScript</a:t>
-            </a:r>
+              <a:rPr lang="es-ES" noProof="0" dirty="0" err="1"/>
+              <a:t>React</a:t>
+            </a:r>
+            <a:r>
+              <a:rPr lang="es-ES" noProof="0" dirty="0"/>
+              <a:t> 19 + </a:t>
+            </a:r>
+            <a:r>
+              <a:rPr lang="es-ES" noProof="0" dirty="0" err="1"/>
+              <a:t>TypeScript</a:t>
+            </a:r>
+            <a:endParaRPr lang="es-ES" noProof="0" dirty="0"/>
           </a:p>
           <a:p>
             <a:pPr>
@@ -6265,7 +6618,16 @@
               </a:defRPr>
             </a:pPr>
             <a:r>
-              <a:t>Vite + Tailwind CSS v4</a:t>
+              <a:rPr lang="es-ES" noProof="0" dirty="0"/>
+              <a:t>Vite + </a:t>
+            </a:r>
+            <a:r>
+              <a:rPr lang="es-ES" noProof="0" dirty="0" err="1"/>
+              <a:t>Tailwind</a:t>
+            </a:r>
+            <a:r>
+              <a:rPr lang="es-ES" noProof="0" dirty="0"/>
+              <a:t> CSS v4</a:t>
             </a:r>
           </a:p>
           <a:p>
@@ -6281,7 +6643,12 @@
               </a:defRPr>
             </a:pPr>
             <a:r>
-              <a:t>IndexedDB offline</a:t>
+              <a:rPr lang="es-ES" noProof="0" dirty="0" err="1"/>
+              <a:t>IndexedDB</a:t>
+            </a:r>
+            <a:r>
+              <a:rPr lang="es-ES" noProof="0" dirty="0"/>
+              <a:t> offline</a:t>
             </a:r>
           </a:p>
           <a:p>
@@ -6297,7 +6664,20 @@
               </a:defRPr>
             </a:pPr>
             <a:r>
-              <a:t>React Router + Query</a:t>
+              <a:rPr lang="es-ES" noProof="0" dirty="0" err="1"/>
+              <a:t>React</a:t>
+            </a:r>
+            <a:r>
+              <a:rPr lang="es-ES" noProof="0" dirty="0"/>
+              <a:t> </a:t>
+            </a:r>
+            <a:r>
+              <a:rPr lang="es-ES" noProof="0" dirty="0" err="1"/>
+              <a:t>Router</a:t>
+            </a:r>
+            <a:r>
+              <a:rPr lang="es-ES" noProof="0" dirty="0"/>
+              <a:t> + Query</a:t>
             </a:r>
           </a:p>
           <a:p>
@@ -6313,8 +6693,18 @@
               </a:defRPr>
             </a:pPr>
             <a:r>
-              <a:t>Vitest + Playwright</a:t>
-            </a:r>
+              <a:rPr lang="es-ES" noProof="0" dirty="0" err="1"/>
+              <a:t>Vitest</a:t>
+            </a:r>
+            <a:r>
+              <a:rPr lang="es-ES" noProof="0" dirty="0"/>
+              <a:t> + </a:t>
+            </a:r>
+            <a:r>
+              <a:rPr lang="es-ES" noProof="0" dirty="0" err="1"/>
+              <a:t>Playwright</a:t>
+            </a:r>
+            <a:endParaRPr lang="es-ES" noProof="0" dirty="0"/>
           </a:p>
         </p:txBody>
       </p:sp>
@@ -6349,6 +6739,7 @@
               </a:defRPr>
             </a:pPr>
             <a:r>
+              <a:rPr lang="es-ES" noProof="0" dirty="0"/>
               <a:t>Android</a:t>
             </a:r>
           </a:p>
@@ -6388,8 +6779,18 @@
               </a:defRPr>
             </a:pPr>
             <a:r>
-              <a:t>Kotlin + Compose</a:t>
-            </a:r>
+              <a:rPr lang="es-ES" noProof="0" dirty="0" err="1"/>
+              <a:t>Kotlin</a:t>
+            </a:r>
+            <a:r>
+              <a:rPr lang="es-ES" noProof="0" dirty="0"/>
+              <a:t> + </a:t>
+            </a:r>
+            <a:r>
+              <a:rPr lang="es-ES" noProof="0" dirty="0" err="1"/>
+              <a:t>Compose</a:t>
+            </a:r>
+            <a:endParaRPr lang="es-ES" noProof="0" dirty="0"/>
           </a:p>
           <a:p>
             <a:pPr>
@@ -6404,7 +6805,16 @@
               </a:defRPr>
             </a:pPr>
             <a:r>
-              <a:t>Material Design 3</a:t>
+              <a:rPr lang="es-ES" noProof="0" dirty="0"/>
+              <a:t>Material </a:t>
+            </a:r>
+            <a:r>
+              <a:rPr lang="es-ES" noProof="0" dirty="0" err="1"/>
+              <a:t>Design</a:t>
+            </a:r>
+            <a:r>
+              <a:rPr lang="es-ES" noProof="0" dirty="0"/>
+              <a:t> 3</a:t>
             </a:r>
           </a:p>
           <a:p>
@@ -6420,6 +6830,7 @@
               </a:defRPr>
             </a:pPr>
             <a:r>
+              <a:rPr lang="es-ES" noProof="0" dirty="0"/>
               <a:t>Room (SQLite)</a:t>
             </a:r>
           </a:p>
@@ -6436,8 +6847,18 @@
               </a:defRPr>
             </a:pPr>
             <a:r>
-              <a:t>Retrofit + OkHttp</a:t>
-            </a:r>
+              <a:rPr lang="es-ES" noProof="0" dirty="0" err="1"/>
+              <a:t>Retrofit</a:t>
+            </a:r>
+            <a:r>
+              <a:rPr lang="es-ES" noProof="0" dirty="0"/>
+              <a:t> + </a:t>
+            </a:r>
+            <a:r>
+              <a:rPr lang="es-ES" noProof="0" dirty="0" err="1"/>
+              <a:t>OkHttp</a:t>
+            </a:r>
+            <a:endParaRPr lang="es-ES" noProof="0" dirty="0"/>
           </a:p>
           <a:p>
             <a:pPr>
@@ -6452,8 +6873,18 @@
               </a:defRPr>
             </a:pPr>
             <a:r>
-              <a:t>DataStore prefs</a:t>
-            </a:r>
+              <a:rPr lang="es-ES" noProof="0" dirty="0" err="1"/>
+              <a:t>DataStore</a:t>
+            </a:r>
+            <a:r>
+              <a:rPr lang="es-ES" noProof="0" dirty="0"/>
+              <a:t> </a:t>
+            </a:r>
+            <a:r>
+              <a:rPr lang="es-ES" noProof="0" dirty="0" err="1"/>
+              <a:t>prefs</a:t>
+            </a:r>
+            <a:endParaRPr lang="es-ES" noProof="0" dirty="0"/>
           </a:p>
         </p:txBody>
       </p:sp>
@@ -6466,7 +6897,7 @@
         <p:spPr>
           <a:xfrm>
             <a:off x="731520" y="5669280"/>
-            <a:ext cx="10058400" cy="548640"/>
+            <a:ext cx="10058400" cy="307777"/>
           </a:xfrm>
           <a:prstGeom prst="rect">
             <a:avLst/>
@@ -6488,7 +6919,32 @@
               </a:defRPr>
             </a:pPr>
             <a:r>
-              <a:t>Arquitectura offline-first: los clientes operan independientemente. El backend es solo un hub de sincronizacion opcional.</a:t>
+              <a:rPr lang="es-ES" noProof="0" dirty="0"/>
+              <a:t>Arquitectura offline-</a:t>
+            </a:r>
+            <a:r>
+              <a:rPr lang="es-ES" noProof="0" dirty="0" err="1"/>
+              <a:t>first</a:t>
+            </a:r>
+            <a:r>
+              <a:rPr lang="es-ES" noProof="0" dirty="0"/>
+              <a:t>: los clientes operan independientemente. El </a:t>
+            </a:r>
+            <a:r>
+              <a:rPr lang="es-ES" noProof="0" dirty="0" err="1"/>
+              <a:t>backend</a:t>
+            </a:r>
+            <a:r>
+              <a:rPr lang="es-ES" noProof="0" dirty="0"/>
+              <a:t> es solo un </a:t>
+            </a:r>
+            <a:r>
+              <a:rPr lang="es-ES" noProof="0" dirty="0" err="1"/>
+              <a:t>hub</a:t>
+            </a:r>
+            <a:r>
+              <a:rPr lang="es-ES" noProof="0" dirty="0"/>
+              <a:t> de sincronización opcional.</a:t>
             </a:r>
           </a:p>
         </p:txBody>
@@ -6656,7 +7112,7 @@
           <a:lstStyle/>
           <a:p>
             <a:pPr algn="ctr"/>
-            <a:endParaRPr/>
+            <a:endParaRPr lang="es-ES" noProof="0" dirty="0"/>
           </a:p>
         </p:txBody>
       </p:sp>
@@ -6691,6 +7147,7 @@
               </a:defRPr>
             </a:pPr>
             <a:r>
+              <a:rPr lang="es-ES" noProof="0" dirty="0"/>
               <a:t>Para Quien es Planixor?</a:t>
             </a:r>
           </a:p>
@@ -6705,7 +7162,7 @@
         <p:spPr>
           <a:xfrm>
             <a:off x="731520" y="1463040"/>
-            <a:ext cx="10058400" cy="3657600"/>
+            <a:ext cx="10058400" cy="2646878"/>
           </a:xfrm>
           <a:prstGeom prst="rect">
             <a:avLst/>
@@ -6730,7 +7187,8 @@
               </a:defRPr>
             </a:pPr>
             <a:r>
-              <a:t>Profesionales con turnos rotativos (salud, seguridad, hosteleria)</a:t>
+              <a:rPr lang="es-ES" noProof="0" dirty="0"/>
+              <a:t>Profesionales con turnos rotativos (salud, seguridad, hostelería)</a:t>
             </a:r>
           </a:p>
           <a:p>
@@ -6746,7 +7204,12 @@
               </a:defRPr>
             </a:pPr>
             <a:r>
-              <a:t>Freelancers que necesitan control de horas trabajadas</a:t>
+              <a:rPr lang="es-ES" noProof="0" dirty="0" err="1"/>
+              <a:t>Freelancers</a:t>
+            </a:r>
+            <a:r>
+              <a:rPr lang="es-ES" noProof="0" dirty="0"/>
+              <a:t> que necesitan control de horas trabajadas</a:t>
             </a:r>
           </a:p>
           <a:p>
@@ -6762,7 +7225,8 @@
               </a:defRPr>
             </a:pPr>
             <a:r>
-              <a:t>Equipos pequenos que comparten horarios</a:t>
+              <a:rPr lang="es-ES" noProof="0" dirty="0"/>
+              <a:t>Equipos pequeños que comparten horarios</a:t>
             </a:r>
           </a:p>
           <a:p>
@@ -6778,6 +7242,7 @@
               </a:defRPr>
             </a:pPr>
             <a:r>
+              <a:rPr lang="es-ES" noProof="0" dirty="0"/>
               <a:t>Personas preocupadas por la privacidad de sus datos</a:t>
             </a:r>
           </a:p>
@@ -6794,6 +7259,7 @@
               </a:defRPr>
             </a:pPr>
             <a:r>
+              <a:rPr lang="es-ES" noProof="0" dirty="0"/>
               <a:t>Usuarios en zonas con conectividad limitada</a:t>
             </a:r>
           </a:p>
@@ -6810,7 +7276,16 @@
               </a:defRPr>
             </a:pPr>
             <a:r>
-              <a:t>Organizaciones que prefieren infraestructura propia (self-hosted)</a:t>
+              <a:rPr lang="es-ES" noProof="0" dirty="0"/>
+              <a:t>Organizaciones que prefieren infraestructura propia (</a:t>
+            </a:r>
+            <a:r>
+              <a:rPr lang="es-ES" noProof="0" dirty="0" err="1"/>
+              <a:t>self-hosted</a:t>
+            </a:r>
+            <a:r>
+              <a:rPr lang="es-ES" noProof="0" dirty="0"/>
+              <a:t>)</a:t>
             </a:r>
           </a:p>
           <a:p>
@@ -6826,6 +7301,7 @@
               </a:defRPr>
             </a:pPr>
             <a:r>
+              <a:rPr lang="es-ES" noProof="0" dirty="0"/>
               <a:t>Cualquiera que quiera unificar turnos + calendario + recordatorios</a:t>
             </a:r>
           </a:p>
@@ -6862,6 +7338,7 @@
               </a:defRPr>
             </a:pPr>
             <a:r>
+              <a:rPr lang="es-ES" noProof="0" dirty="0"/>
               <a:t>"Si trabajas por turnos y valoras tu privacidad, Planixor es tu herramienta."</a:t>
             </a:r>
           </a:p>
@@ -6970,7 +7447,7 @@
           <a:lstStyle/>
           <a:p>
             <a:pPr algn="ctr"/>
-            <a:endParaRPr/>
+            <a:endParaRPr lang="es-ES" noProof="0" dirty="0"/>
           </a:p>
         </p:txBody>
       </p:sp>
@@ -7005,6 +7482,7 @@
               </a:defRPr>
             </a:pPr>
             <a:r>
+              <a:rPr lang="es-ES" noProof="0" dirty="0"/>
               <a:t>Ventajas Competitivas</a:t>
             </a:r>
           </a:p>
@@ -7041,6 +7519,7 @@
               </a:defRPr>
             </a:pPr>
             <a:r>
+              <a:rPr lang="es-ES" noProof="0" dirty="0"/>
               <a:t>Planixor</a:t>
             </a:r>
           </a:p>
@@ -7077,8 +7556,14 @@
               </a:defRPr>
             </a:pPr>
             <a:r>
-              <a:t>Competencia tipica</a:t>
-            </a:r>
+              <a:rPr lang="es-ES" noProof="0" dirty="0"/>
+              <a:t>Competencia </a:t>
+            </a:r>
+            <a:r>
+              <a:rPr lang="es-ES" noProof="0" dirty="0" err="1"/>
+              <a:t>tipica</a:t>
+            </a:r>
+            <a:endParaRPr lang="es-ES" noProof="0" dirty="0"/>
           </a:p>
         </p:txBody>
       </p:sp>
@@ -7091,7 +7576,7 @@
         <p:spPr>
           <a:xfrm>
             <a:off x="731520" y="1920240"/>
-            <a:ext cx="5029200" cy="4114800"/>
+            <a:ext cx="5029200" cy="2215991"/>
           </a:xfrm>
           <a:prstGeom prst="rect">
             <a:avLst/>
@@ -7116,6 +7601,7 @@
               </a:defRPr>
             </a:pPr>
             <a:r>
+              <a:rPr lang="es-ES" noProof="0" dirty="0"/>
               <a:t>100% offline, sin dependencia de internet</a:t>
             </a:r>
           </a:p>
@@ -7132,6 +7618,7 @@
               </a:defRPr>
             </a:pPr>
             <a:r>
+              <a:rPr lang="es-ES" noProof="0" dirty="0"/>
               <a:t>Datos solo en tu dispositivo</a:t>
             </a:r>
           </a:p>
@@ -7148,7 +7635,20 @@
               </a:defRPr>
             </a:pPr>
             <a:r>
-              <a:t>Sync con TU servidor (self-hosted)</a:t>
+              <a:rPr lang="es-ES" noProof="0" dirty="0" err="1"/>
+              <a:t>Sync</a:t>
+            </a:r>
+            <a:r>
+              <a:rPr lang="es-ES" noProof="0" dirty="0"/>
+              <a:t> con TU servidor (</a:t>
+            </a:r>
+            <a:r>
+              <a:rPr lang="es-ES" noProof="0" dirty="0" err="1"/>
+              <a:t>self-hosted</a:t>
+            </a:r>
+            <a:r>
+              <a:rPr lang="es-ES" noProof="0" dirty="0"/>
+              <a:t>)</a:t>
             </a:r>
           </a:p>
           <a:p>
@@ -7164,7 +7664,8 @@
               </a:defRPr>
             </a:pPr>
             <a:r>
-              <a:t>Sin suscripcion mensual para nube</a:t>
+              <a:rPr lang="es-ES" noProof="0" dirty="0"/>
+              <a:t>Sin suscripción mensual para nube</a:t>
             </a:r>
           </a:p>
           <a:p>
@@ -7180,7 +7681,8 @@
               </a:defRPr>
             </a:pPr>
             <a:r>
-              <a:t>Codigo multiplataforma (web + Android)</a:t>
+              <a:rPr lang="es-ES" noProof="0" dirty="0"/>
+              <a:t>Código multiplataforma (web + Android)</a:t>
             </a:r>
           </a:p>
           <a:p>
@@ -7196,8 +7698,22 @@
               </a:defRPr>
             </a:pPr>
             <a:r>
-              <a:t>Open-source / auto-desplegable</a:t>
-            </a:r>
+              <a:rPr lang="es-ES" noProof="0" dirty="0"/>
+              <a:t>Open-</a:t>
+            </a:r>
+            <a:r>
+              <a:rPr lang="es-ES" noProof="0" dirty="0" err="1"/>
+              <a:t>source</a:t>
+            </a:r>
+            <a:r>
+              <a:rPr lang="es-ES" noProof="0" dirty="0"/>
+              <a:t> / </a:t>
+            </a:r>
+            <a:r>
+              <a:rPr lang="es-ES" noProof="0" dirty="0" err="1"/>
+              <a:t>auto-desplegable</a:t>
+            </a:r>
+            <a:endParaRPr lang="es-ES" noProof="0" dirty="0"/>
           </a:p>
           <a:p>
             <a:pPr>
@@ -7212,7 +7728,16 @@
               </a:defRPr>
             </a:pPr>
             <a:r>
-              <a:t>Privacidad por diseno (GDPR friendly)</a:t>
+              <a:rPr lang="es-ES" noProof="0" dirty="0"/>
+              <a:t>Privacidad por diseño (GDPR </a:t>
+            </a:r>
+            <a:r>
+              <a:rPr lang="es-ES" noProof="0" dirty="0" err="1"/>
+              <a:t>friendly</a:t>
+            </a:r>
+            <a:r>
+              <a:rPr lang="es-ES" noProof="0" dirty="0"/>
+              <a:t>)</a:t>
             </a:r>
           </a:p>
         </p:txBody>
@@ -7226,7 +7751,7 @@
         <p:spPr>
           <a:xfrm>
             <a:off x="6400800" y="1920240"/>
-            <a:ext cx="5029200" cy="4114800"/>
+            <a:ext cx="5029200" cy="2215991"/>
           </a:xfrm>
           <a:prstGeom prst="rect">
             <a:avLst/>
@@ -7251,6 +7776,7 @@
               </a:defRPr>
             </a:pPr>
             <a:r>
+              <a:rPr lang="es-ES" noProof="0" dirty="0"/>
               <a:t>Requiere internet para funcionar</a:t>
             </a:r>
           </a:p>
@@ -7267,6 +7793,7 @@
               </a:defRPr>
             </a:pPr>
             <a:r>
+              <a:rPr lang="es-ES" noProof="0" dirty="0"/>
               <a:t>Datos en servidores de terceros</a:t>
             </a:r>
           </a:p>
@@ -7283,7 +7810,12 @@
               </a:defRPr>
             </a:pPr>
             <a:r>
-              <a:t>Sync con servidores del proveedor</a:t>
+              <a:rPr lang="es-ES" noProof="0" dirty="0" err="1"/>
+              <a:t>Sync</a:t>
+            </a:r>
+            <a:r>
+              <a:rPr lang="es-ES" noProof="0" dirty="0"/>
+              <a:t> con servidores del proveedor</a:t>
             </a:r>
           </a:p>
           <a:p>
@@ -7299,6 +7831,7 @@
               </a:defRPr>
             </a:pPr>
             <a:r>
+              <a:rPr lang="es-ES" noProof="0" dirty="0"/>
               <a:t>Suscripciones de $5-15/mes</a:t>
             </a:r>
           </a:p>
@@ -7315,7 +7848,8 @@
               </a:defRPr>
             </a:pPr>
             <a:r>
-              <a:t>Solo una plataforma o web basica</a:t>
+              <a:rPr lang="es-ES" noProof="0" dirty="0"/>
+              <a:t>Solo una plataforma o web básica</a:t>
             </a:r>
           </a:p>
           <a:p>
@@ -7331,6 +7865,7 @@
               </a:defRPr>
             </a:pPr>
             <a:r>
+              <a:rPr lang="es-ES" noProof="0" dirty="0"/>
               <a:t>SaaS cerrado, sin control</a:t>
             </a:r>
           </a:p>
@@ -7347,7 +7882,8 @@
               </a:defRPr>
             </a:pPr>
             <a:r>
-              <a:t>Politicas de privacidad ambiguas</a:t>
+              <a:rPr lang="es-ES" noProof="0" dirty="0"/>
+              <a:t>Políticas de privacidad ambiguas</a:t>
             </a:r>
           </a:p>
         </p:txBody>
@@ -7432,7 +7968,7 @@
           <a:lstStyle/>
           <a:p>
             <a:pPr algn="ctr"/>
-            <a:endParaRPr lang="es-ES"/>
+            <a:endParaRPr lang="es-ES" noProof="0" dirty="0"/>
           </a:p>
         </p:txBody>
       </p:sp>
@@ -7476,7 +8012,7 @@
           <a:lstStyle/>
           <a:p>
             <a:pPr algn="ctr"/>
-            <a:endParaRPr/>
+            <a:endParaRPr lang="es-ES" noProof="0" dirty="0"/>
           </a:p>
         </p:txBody>
       </p:sp>
@@ -7542,80 +8078,8 @@
               </a:defRPr>
             </a:pPr>
             <a:r>
-              <a:rPr sz="2400" dirty="0"/>
-              <a:t>Los </a:t>
-            </a:r>
-            <a:r>
-              <a:rPr sz="2400" dirty="0" err="1"/>
-              <a:t>profesionales</a:t>
-            </a:r>
-            <a:r>
-              <a:rPr sz="2400" dirty="0"/>
-              <a:t> </a:t>
-            </a:r>
-            <a:r>
-              <a:rPr sz="2400" dirty="0" err="1"/>
-              <a:t>necesitan</a:t>
-            </a:r>
-            <a:r>
-              <a:rPr sz="2400" dirty="0"/>
-              <a:t> </a:t>
-            </a:r>
-            <a:r>
-              <a:rPr sz="2400" dirty="0" err="1"/>
-              <a:t>una</a:t>
-            </a:r>
-            <a:r>
-              <a:rPr sz="2400" dirty="0"/>
-              <a:t> </a:t>
-            </a:r>
-            <a:r>
-              <a:rPr sz="2400" dirty="0" err="1"/>
-              <a:t>herramienta</a:t>
-            </a:r>
-            <a:r>
-              <a:rPr sz="2400" dirty="0"/>
-              <a:t> </a:t>
-            </a:r>
-            <a:r>
-              <a:rPr sz="2400" dirty="0" err="1"/>
-              <a:t>unificada</a:t>
-            </a:r>
-            <a:r>
-              <a:rPr sz="2400" dirty="0"/>
-              <a:t>, </a:t>
-            </a:r>
-            <a:r>
-              <a:rPr sz="2400" dirty="0" err="1"/>
-              <a:t>privada</a:t>
-            </a:r>
-            <a:r>
-              <a:rPr sz="2400" dirty="0"/>
-              <a:t> y </a:t>
-            </a:r>
-            <a:r>
-              <a:rPr sz="2400" dirty="0" err="1"/>
-              <a:t>que</a:t>
-            </a:r>
-            <a:r>
-              <a:rPr sz="2400" dirty="0"/>
-              <a:t> </a:t>
-            </a:r>
-            <a:r>
-              <a:rPr sz="2400" dirty="0" err="1"/>
-              <a:t>funcione</a:t>
-            </a:r>
-            <a:r>
-              <a:rPr sz="2400" dirty="0"/>
-              <a:t> </a:t>
-            </a:r>
-            <a:r>
-              <a:rPr sz="2400" dirty="0" err="1"/>
-              <a:t>siempre</a:t>
-            </a:r>
-            <a:r>
-              <a:rPr sz="2400" dirty="0"/>
-              <a:t>.</a:t>
+              <a:rPr lang="es-ES" sz="2400" noProof="0" dirty="0"/>
+              <a:t>Los profesionales necesitan una herramienta unificada, privada y que funcione siempre.</a:t>
             </a:r>
           </a:p>
         </p:txBody>
@@ -7693,7 +8157,7 @@
           <a:lstStyle/>
           <a:p>
             <a:pPr algn="ctr"/>
-            <a:endParaRPr/>
+            <a:endParaRPr lang="es-ES" noProof="0" dirty="0"/>
           </a:p>
         </p:txBody>
       </p:sp>
@@ -7728,6 +8192,7 @@
               </a:defRPr>
             </a:pPr>
             <a:r>
+              <a:rPr lang="es-ES" noProof="0" dirty="0"/>
               <a:t>Planixor</a:t>
             </a:r>
           </a:p>
@@ -7742,7 +8207,7 @@
         <p:spPr>
           <a:xfrm>
             <a:off x="2286000" y="2560320"/>
-            <a:ext cx="7772400" cy="731520"/>
+            <a:ext cx="7772400" cy="523220"/>
           </a:xfrm>
           <a:prstGeom prst="rect">
             <a:avLst/>
@@ -7764,7 +8229,8 @@
               </a:defRPr>
             </a:pPr>
             <a:r>
-              <a:t>Organiza tu tiempo. Potencia tu dia.</a:t>
+              <a:rPr lang="es-ES" noProof="0" dirty="0"/>
+              <a:t>Organiza tu tiempo. Potencia tu día.</a:t>
             </a:r>
           </a:p>
         </p:txBody>
@@ -7816,18 +8282,9 @@
               </a:defRPr>
             </a:pPr>
             <a:r>
-              <a:rPr dirty="0" err="1"/>
-              <a:t>Comienza</a:t>
-            </a:r>
-            <a:r>
-              <a:rPr dirty="0"/>
-              <a:t> hoy — 100% gratis, 100% </a:t>
-            </a:r>
-            <a:r>
-              <a:rPr dirty="0" err="1"/>
-              <a:t>tuyo</a:t>
-            </a:r>
-            <a:endParaRPr dirty="0"/>
+              <a:rPr lang="es-ES" noProof="0" dirty="0"/>
+              <a:t>Comienza hoy — 100% gratis, 100% tuyo</a:t>
+            </a:r>
           </a:p>
         </p:txBody>
       </p:sp>
@@ -7862,30 +8319,22 @@
               </a:defRPr>
             </a:pPr>
             <a:r>
-              <a:rPr lang="es-ES" dirty="0"/>
-              <a:t>p</a:t>
-            </a:r>
-            <a:r>
-              <a:rPr dirty="0" err="1"/>
-              <a:t>lanixor</a:t>
-            </a:r>
-            <a:r>
-              <a:rPr lang="es-ES" dirty="0"/>
-              <a:t>.</a:t>
-            </a:r>
-            <a:r>
-              <a:rPr lang="es-ES" dirty="0" err="1"/>
-              <a:t>codenized</a:t>
-            </a:r>
-            <a:r>
-              <a:rPr dirty="0"/>
-              <a:t>.com  |  by </a:t>
-            </a:r>
-            <a:r>
-              <a:rPr dirty="0" err="1"/>
+              <a:rPr lang="es-ES" noProof="0" dirty="0"/>
+              <a:t>planixor.codenized.com  |  </a:t>
+            </a:r>
+            <a:r>
+              <a:rPr lang="es-ES" noProof="0" dirty="0" err="1"/>
+              <a:t>by</a:t>
+            </a:r>
+            <a:r>
+              <a:rPr lang="es-ES" noProof="0" dirty="0"/>
+              <a:t> </a:t>
+            </a:r>
+            <a:r>
+              <a:rPr lang="es-ES" noProof="0" dirty="0" err="1"/>
               <a:t>Codenized</a:t>
             </a:r>
-            <a:endParaRPr dirty="0"/>
+            <a:endParaRPr lang="es-ES" noProof="0" dirty="0"/>
           </a:p>
         </p:txBody>
       </p:sp>
@@ -7920,8 +8369,22 @@
               </a:defRPr>
             </a:pPr>
             <a:r>
-              <a:t>Web (PWA) + Android  |  Offline-First  |  Self-Hosted Sync</a:t>
-            </a:r>
+              <a:rPr lang="es-ES" noProof="0" dirty="0"/>
+              <a:t>Web (PWA) + Android  |  Offline-First  |  Self-</a:t>
+            </a:r>
+            <a:r>
+              <a:rPr lang="es-ES" noProof="0" dirty="0" err="1"/>
+              <a:t>Hosted</a:t>
+            </a:r>
+            <a:r>
+              <a:rPr lang="es-ES" noProof="0" dirty="0"/>
+              <a:t> </a:t>
+            </a:r>
+            <a:r>
+              <a:rPr lang="es-ES" noProof="0" dirty="0" err="1"/>
+              <a:t>Sync</a:t>
+            </a:r>
+            <a:endParaRPr lang="es-ES" noProof="0" dirty="0"/>
           </a:p>
         </p:txBody>
       </p:sp>
@@ -8034,7 +8497,7 @@
           <a:lstStyle/>
           <a:p>
             <a:pPr algn="ctr"/>
-            <a:endParaRPr/>
+            <a:endParaRPr lang="es-ES" noProof="0" dirty="0"/>
           </a:p>
         </p:txBody>
       </p:sp>
@@ -8047,7 +8510,7 @@
         <p:spPr>
           <a:xfrm>
             <a:off x="731520" y="457200"/>
-            <a:ext cx="9144000" cy="731520"/>
+            <a:ext cx="9144000" cy="646331"/>
           </a:xfrm>
           <a:prstGeom prst="rect">
             <a:avLst/>
@@ -8069,7 +8532,8 @@
               </a:defRPr>
             </a:pPr>
             <a:r>
-              <a:t>La Solucion: Planixor</a:t>
+              <a:rPr lang="es-ES" noProof="0" dirty="0"/>
+              <a:t>La Solución: Planixor</a:t>
             </a:r>
           </a:p>
         </p:txBody>
@@ -8083,7 +8547,7 @@
         <p:spPr>
           <a:xfrm>
             <a:off x="731520" y="1371600"/>
-            <a:ext cx="10058400" cy="1097280"/>
+            <a:ext cx="10058400" cy="707886"/>
           </a:xfrm>
           <a:prstGeom prst="rect">
             <a:avLst/>
@@ -8105,7 +8569,16 @@
               </a:defRPr>
             </a:pPr>
             <a:r>
-              <a:t>Una aplicacion unificada de gestion de turnos y horarios que funciona 100% offline, con sincronizacion opcional auto-hospedada. Tus datos, tu control.</a:t>
+              <a:rPr lang="es-ES" noProof="0" dirty="0"/>
+              <a:t>Una aplicación unificada de gestión de turnos y horarios que funciona 100% offline, con sincronización opcional </a:t>
+            </a:r>
+            <a:r>
+              <a:rPr lang="es-ES" noProof="0" dirty="0" err="1"/>
+              <a:t>auto-hospedada</a:t>
+            </a:r>
+            <a:r>
+              <a:rPr lang="es-ES" noProof="0" dirty="0"/>
+              <a:t>. Tus datos, tu control.</a:t>
             </a:r>
           </a:p>
         </p:txBody>
@@ -8119,7 +8592,7 @@
         <p:spPr>
           <a:xfrm>
             <a:off x="731520" y="2743200"/>
-            <a:ext cx="10058400" cy="3657600"/>
+            <a:ext cx="10058400" cy="2267287"/>
           </a:xfrm>
           <a:prstGeom prst="rect">
             <a:avLst/>
@@ -8144,6 +8617,7 @@
               </a:defRPr>
             </a:pPr>
             <a:r>
+              <a:rPr lang="es-ES" noProof="0" dirty="0"/>
               <a:t>Offline-First: funciona completamente sin internet</a:t>
             </a:r>
           </a:p>
@@ -8160,6 +8634,7 @@
               </a:defRPr>
             </a:pPr>
             <a:r>
+              <a:rPr lang="es-ES" noProof="0" dirty="0"/>
               <a:t>Privacidad total: datos almacenados solo en tu dispositivo</a:t>
             </a:r>
           </a:p>
@@ -8176,7 +8651,8 @@
               </a:defRPr>
             </a:pPr>
             <a:r>
-              <a:t>Sincronizacion opcional: tu propio servidor, tus reglas</a:t>
+              <a:rPr lang="es-ES" noProof="0" dirty="0"/>
+              <a:t>Sincronización opcional: tu propio servidor, tus reglas</a:t>
             </a:r>
           </a:p>
           <a:p>
@@ -8192,6 +8668,7 @@
               </a:defRPr>
             </a:pPr>
             <a:r>
+              <a:rPr lang="es-ES" noProof="0" dirty="0"/>
               <a:t>Multiplataforma: Web PWA + Android nativo</a:t>
             </a:r>
           </a:p>
@@ -8208,6 +8685,7 @@
               </a:defRPr>
             </a:pPr>
             <a:r>
+              <a:rPr lang="es-ES" noProof="0" dirty="0"/>
               <a:t>Interfaz moderna y limpia con modo claro/oscuro</a:t>
             </a:r>
           </a:p>
@@ -8224,7 +8702,8 @@
               </a:defRPr>
             </a:pPr>
             <a:r>
-              <a:t>Bilingue desde el primer dia: Espanol e Ingles</a:t>
+              <a:rPr lang="es-ES" noProof="0" dirty="0"/>
+              <a:t>Bilingüe desde el primer día: Español e Ingles</a:t>
             </a:r>
           </a:p>
         </p:txBody>
@@ -8332,7 +8811,7 @@
           <a:lstStyle/>
           <a:p>
             <a:pPr algn="ctr"/>
-            <a:endParaRPr/>
+            <a:endParaRPr lang="es-ES" noProof="0" dirty="0"/>
           </a:p>
         </p:txBody>
       </p:sp>
@@ -8367,18 +8846,9 @@
               </a:defRPr>
             </a:pPr>
             <a:r>
-              <a:rPr dirty="0" err="1"/>
-              <a:t>Funcionalidades</a:t>
-            </a:r>
-            <a:r>
-              <a:rPr dirty="0"/>
-              <a:t> </a:t>
-            </a:r>
-            <a:r>
-              <a:rPr dirty="0" err="1"/>
-              <a:t>Principales</a:t>
-            </a:r>
-            <a:endParaRPr dirty="0"/>
+              <a:rPr lang="es-ES" noProof="0" dirty="0"/>
+              <a:t>Funcionalidades Principales</a:t>
+            </a:r>
           </a:p>
         </p:txBody>
       </p:sp>
@@ -8425,10 +8895,9 @@
               <a:defRPr sz="1600"/>
             </a:pPr>
             <a:r>
-              <a:rPr lang="es-ES" dirty="0"/>
+              <a:rPr lang="es-ES" noProof="0" dirty="0"/>
               <a:t>🗓️</a:t>
             </a:r>
-            <a:endParaRPr dirty="0"/>
           </a:p>
         </p:txBody>
       </p:sp>
@@ -8463,6 +8932,7 @@
               </a:defRPr>
             </a:pPr>
             <a:r>
+              <a:rPr lang="es-ES" noProof="0" dirty="0"/>
               <a:t>Calendario</a:t>
             </a:r>
           </a:p>
@@ -8477,7 +8947,7 @@
         <p:spPr>
           <a:xfrm>
             <a:off x="1463040" y="1783080"/>
-            <a:ext cx="3200400" cy="548640"/>
+            <a:ext cx="3200400" cy="461665"/>
           </a:xfrm>
           <a:prstGeom prst="rect">
             <a:avLst/>
@@ -8499,7 +8969,8 @@
               </a:defRPr>
             </a:pPr>
             <a:r>
-              <a:t>Vistas Dia/Semana/Mes/Anio con navegacion intuitiva</a:t>
+              <a:rPr lang="es-ES" noProof="0" dirty="0"/>
+              <a:t>Vistas Dia/Semana/Mes/Año con navegación intuitiva</a:t>
             </a:r>
           </a:p>
         </p:txBody>
@@ -8547,10 +9018,9 @@
               <a:defRPr sz="1600"/>
             </a:pPr>
             <a:r>
-              <a:rPr lang="es-ES" dirty="0"/>
+              <a:rPr lang="es-ES" noProof="0" dirty="0"/>
               <a:t>🕓</a:t>
             </a:r>
-            <a:endParaRPr dirty="0"/>
           </a:p>
         </p:txBody>
       </p:sp>
@@ -8585,6 +9055,7 @@
               </a:defRPr>
             </a:pPr>
             <a:r>
+              <a:rPr lang="es-ES" noProof="0" dirty="0"/>
               <a:t>Turnos</a:t>
             </a:r>
           </a:p>
@@ -8621,6 +9092,7 @@
               </a:defRPr>
             </a:pPr>
             <a:r>
+              <a:rPr lang="es-ES" noProof="0" dirty="0"/>
               <a:t>Plantillas reutilizables con colores, emojis e iconos</a:t>
             </a:r>
           </a:p>
@@ -8669,10 +9141,9 @@
               <a:defRPr sz="1600"/>
             </a:pPr>
             <a:r>
-              <a:rPr lang="es-ES" dirty="0"/>
+              <a:rPr lang="es-ES" noProof="0" dirty="0"/>
               <a:t>⏰</a:t>
             </a:r>
-            <a:endParaRPr dirty="0"/>
           </a:p>
         </p:txBody>
       </p:sp>
@@ -8707,6 +9178,7 @@
               </a:defRPr>
             </a:pPr>
             <a:r>
+              <a:rPr lang="es-ES" noProof="0" dirty="0"/>
               <a:t>Recordatorios</a:t>
             </a:r>
           </a:p>
@@ -8721,7 +9193,7 @@
         <p:spPr>
           <a:xfrm>
             <a:off x="1463040" y="5074920"/>
-            <a:ext cx="3200400" cy="548640"/>
+            <a:ext cx="3200400" cy="276999"/>
           </a:xfrm>
           <a:prstGeom prst="rect">
             <a:avLst/>
@@ -8743,7 +9215,8 @@
               </a:defRPr>
             </a:pPr>
             <a:r>
-              <a:t>Templates para eventos recurrentes y tareas</a:t>
+              <a:rPr lang="es-ES" noProof="0" dirty="0"/>
+              <a:t>Plantillas para eventos recurrentes y tareas</a:t>
             </a:r>
           </a:p>
         </p:txBody>
@@ -8791,10 +9264,9 @@
               <a:defRPr sz="1600"/>
             </a:pPr>
             <a:r>
-              <a:rPr lang="es-ES" dirty="0"/>
+              <a:rPr lang="es-ES" noProof="0" dirty="0"/>
               <a:t>📣</a:t>
             </a:r>
-            <a:endParaRPr dirty="0"/>
           </a:p>
         </p:txBody>
       </p:sp>
@@ -8829,6 +9301,7 @@
               </a:defRPr>
             </a:pPr>
             <a:r>
+              <a:rPr lang="es-ES" noProof="0" dirty="0"/>
               <a:t>Eventos</a:t>
             </a:r>
           </a:p>
@@ -8865,6 +9338,7 @@
               </a:defRPr>
             </a:pPr>
             <a:r>
+              <a:rPr lang="es-ES" noProof="0" dirty="0"/>
               <a:t>Eventos vinculados a turnos o recordatorios</a:t>
             </a:r>
           </a:p>
@@ -8913,10 +9387,9 @@
               <a:defRPr sz="1600"/>
             </a:pPr>
             <a:r>
-              <a:rPr lang="es-ES" dirty="0"/>
+              <a:rPr lang="es-ES" noProof="0" dirty="0"/>
               <a:t>📊</a:t>
             </a:r>
-            <a:endParaRPr dirty="0"/>
           </a:p>
         </p:txBody>
       </p:sp>
@@ -8951,6 +9424,7 @@
               </a:defRPr>
             </a:pPr>
             <a:r>
+              <a:rPr lang="es-ES" noProof="0" dirty="0"/>
               <a:t>Informes</a:t>
             </a:r>
           </a:p>
@@ -8965,7 +9439,7 @@
         <p:spPr>
           <a:xfrm>
             <a:off x="6949440" y="3429000"/>
-            <a:ext cx="3200400" cy="548640"/>
+            <a:ext cx="3200400" cy="276999"/>
           </a:xfrm>
           <a:prstGeom prst="rect">
             <a:avLst/>
@@ -8987,7 +9461,8 @@
               </a:defRPr>
             </a:pPr>
             <a:r>
-              <a:t>Estadisticas visuales de horas trabajadas</a:t>
+              <a:rPr lang="es-ES" noProof="0" dirty="0"/>
+              <a:t>Estadísticas visuales de horas trabajadas</a:t>
             </a:r>
           </a:p>
         </p:txBody>
@@ -9035,10 +9510,9 @@
               <a:defRPr sz="1600"/>
             </a:pPr>
             <a:r>
-              <a:rPr lang="es-ES" dirty="0"/>
+              <a:rPr lang="es-ES" noProof="0" dirty="0"/>
               <a:t>📨</a:t>
             </a:r>
-            <a:endParaRPr dirty="0"/>
           </a:p>
         </p:txBody>
       </p:sp>
@@ -9073,6 +9547,7 @@
               </a:defRPr>
             </a:pPr>
             <a:r>
+              <a:rPr lang="es-ES" noProof="0" dirty="0"/>
               <a:t>Notificaciones</a:t>
             </a:r>
           </a:p>
@@ -9109,6 +9584,7 @@
               </a:defRPr>
             </a:pPr>
             <a:r>
+              <a:rPr lang="es-ES" noProof="0" dirty="0"/>
               <a:t>Alertas configurables: inicio, 10min, 1h, 1dia</a:t>
             </a:r>
           </a:p>
@@ -9187,7 +9663,7 @@
           <a:lstStyle/>
           <a:p>
             <a:pPr algn="ctr"/>
-            <a:endParaRPr/>
+            <a:endParaRPr lang="es-ES" noProof="0" dirty="0"/>
           </a:p>
         </p:txBody>
       </p:sp>
@@ -9222,6 +9698,7 @@
               </a:defRPr>
             </a:pPr>
             <a:r>
+              <a:rPr lang="es-ES" noProof="0" dirty="0"/>
               <a:t>Calendario Inteligente</a:t>
             </a:r>
           </a:p>
@@ -9236,7 +9713,7 @@
         <p:spPr>
           <a:xfrm>
             <a:off x="731520" y="1280160"/>
-            <a:ext cx="10058400" cy="731520"/>
+            <a:ext cx="10058400" cy="369332"/>
           </a:xfrm>
           <a:prstGeom prst="rect">
             <a:avLst/>
@@ -9258,7 +9735,8 @@
               </a:defRPr>
             </a:pPr>
             <a:r>
-              <a:t>Tu horario completo en una sola vista, con 4 modos de visualizacion</a:t>
+              <a:rPr lang="es-ES" noProof="0" dirty="0"/>
+              <a:t>Tu horario completo en una sola vista, con 4 modos de visualización</a:t>
             </a:r>
           </a:p>
         </p:txBody>
@@ -9272,7 +9750,7 @@
         <p:spPr>
           <a:xfrm>
             <a:off x="731520" y="2103120"/>
-            <a:ext cx="10058400" cy="4114800"/>
+            <a:ext cx="10058400" cy="3447098"/>
           </a:xfrm>
           <a:prstGeom prst="rect">
             <a:avLst/>
@@ -9297,32 +9775,8 @@
               </a:defRPr>
             </a:pPr>
             <a:r>
-              <a:rPr dirty="0"/>
-              <a:t>Vista Dia: Linea de </a:t>
-            </a:r>
-            <a:r>
-              <a:rPr dirty="0" err="1"/>
-              <a:t>tiempo</a:t>
-            </a:r>
-            <a:r>
-              <a:rPr dirty="0"/>
-              <a:t> vertical con </a:t>
-            </a:r>
-            <a:r>
-              <a:rPr dirty="0" err="1"/>
-              <a:t>indicador</a:t>
-            </a:r>
-            <a:r>
-              <a:rPr dirty="0"/>
-              <a:t> de hora actual (</a:t>
-            </a:r>
-            <a:r>
-              <a:rPr dirty="0" err="1"/>
-              <a:t>estilo</a:t>
-            </a:r>
-            <a:r>
-              <a:rPr dirty="0"/>
-              <a:t> Google Calendar)</a:t>
+              <a:rPr lang="es-ES" noProof="0" dirty="0"/>
+              <a:t>Vista Dia: Línea de tiempo vertical con indicador de hora actual (estilo Google Calendar)</a:t>
             </a:r>
           </a:p>
           <a:p>
@@ -9338,48 +9792,8 @@
               </a:defRPr>
             </a:pPr>
             <a:r>
-              <a:rPr dirty="0"/>
-              <a:t>Vista Semana: </a:t>
-            </a:r>
-            <a:r>
-              <a:rPr dirty="0" err="1"/>
-              <a:t>Cuadricula</a:t>
-            </a:r>
-            <a:r>
-              <a:rPr dirty="0"/>
-              <a:t> de 7 </a:t>
-            </a:r>
-            <a:r>
-              <a:rPr dirty="0" err="1"/>
-              <a:t>dias</a:t>
-            </a:r>
-            <a:r>
-              <a:rPr dirty="0"/>
-              <a:t> con </a:t>
-            </a:r>
-            <a:r>
-              <a:rPr dirty="0" err="1"/>
-              <a:t>bloques</a:t>
-            </a:r>
-            <a:r>
-              <a:rPr dirty="0"/>
-              <a:t> de </a:t>
-            </a:r>
-            <a:r>
-              <a:rPr dirty="0" err="1"/>
-              <a:t>eventos</a:t>
-            </a:r>
-            <a:r>
-              <a:rPr dirty="0"/>
-              <a:t> </a:t>
-            </a:r>
-            <a:r>
-              <a:rPr dirty="0" err="1"/>
-              <a:t>por</a:t>
-            </a:r>
-            <a:r>
-              <a:rPr dirty="0"/>
-              <a:t> hora</a:t>
+              <a:rPr lang="es-ES" noProof="0" dirty="0"/>
+              <a:t>Vista Semana: Cuadricula de 7 días con bloques de eventos por hora</a:t>
             </a:r>
           </a:p>
           <a:p>
@@ -9395,38 +9809,9 @@
               </a:defRPr>
             </a:pPr>
             <a:r>
-              <a:rPr dirty="0"/>
-              <a:t>Vista Mes: Vista </a:t>
-            </a:r>
-            <a:r>
-              <a:rPr dirty="0" err="1"/>
-              <a:t>mensual</a:t>
-            </a:r>
-            <a:r>
-              <a:rPr dirty="0"/>
-              <a:t> con </a:t>
-            </a:r>
-            <a:r>
-              <a:rPr dirty="0" err="1"/>
-              <a:t>indicadores</a:t>
-            </a:r>
-            <a:r>
-              <a:rPr dirty="0"/>
-              <a:t> de color </a:t>
-            </a:r>
-            <a:r>
-              <a:rPr dirty="0" err="1"/>
-              <a:t>por</a:t>
-            </a:r>
-            <a:r>
-              <a:rPr dirty="0"/>
-              <a:t> </a:t>
-            </a:r>
-            <a:r>
-              <a:rPr dirty="0" err="1"/>
-              <a:t>dia</a:t>
-            </a:r>
-            <a:endParaRPr dirty="0"/>
+              <a:rPr lang="es-ES" noProof="0" dirty="0"/>
+              <a:t>Vista Mes: Vista mensual con indicadores de color por día</a:t>
+            </a:r>
           </a:p>
           <a:p>
             <a:pPr>
@@ -9441,38 +9826,9 @@
               </a:defRPr>
             </a:pPr>
             <a:r>
-              <a:rPr dirty="0"/>
-              <a:t>Vista Anio: Panorama </a:t>
-            </a:r>
-            <a:r>
-              <a:rPr dirty="0" err="1"/>
-              <a:t>anual</a:t>
-            </a:r>
-            <a:r>
-              <a:rPr dirty="0"/>
-              <a:t> </a:t>
-            </a:r>
-            <a:r>
-              <a:rPr dirty="0" err="1"/>
-              <a:t>compacto</a:t>
-            </a:r>
-            <a:r>
-              <a:rPr dirty="0"/>
-              <a:t> para </a:t>
-            </a:r>
-            <a:r>
-              <a:rPr dirty="0" err="1"/>
-              <a:t>planificacion</a:t>
-            </a:r>
-            <a:r>
-              <a:rPr dirty="0"/>
-              <a:t> a largo </a:t>
-            </a:r>
-            <a:r>
-              <a:rPr dirty="0" err="1"/>
-              <a:t>plazo</a:t>
-            </a:r>
-            <a:endParaRPr dirty="0"/>
+              <a:rPr lang="es-ES" noProof="0" dirty="0"/>
+              <a:t>Vista Año: Panorama anual compacto para planificación a largo plazo</a:t>
+            </a:r>
           </a:p>
           <a:p>
             <a:pPr>
@@ -9487,36 +9843,8 @@
               </a:defRPr>
             </a:pPr>
             <a:r>
-              <a:rPr dirty="0" err="1"/>
-              <a:t>Navegacion</a:t>
-            </a:r>
-            <a:r>
-              <a:rPr dirty="0"/>
-              <a:t> </a:t>
-            </a:r>
-            <a:r>
-              <a:rPr dirty="0" err="1"/>
-              <a:t>rapida</a:t>
-            </a:r>
-            <a:r>
-              <a:rPr dirty="0"/>
-              <a:t> con </a:t>
-            </a:r>
-            <a:r>
-              <a:rPr dirty="0" err="1"/>
-              <a:t>flechas</a:t>
-            </a:r>
-            <a:r>
-              <a:rPr dirty="0"/>
-              <a:t> y </a:t>
-            </a:r>
-            <a:r>
-              <a:rPr dirty="0" err="1"/>
-              <a:t>boton</a:t>
-            </a:r>
-            <a:r>
-              <a:rPr dirty="0"/>
-              <a:t> 'Hoy'</a:t>
+              <a:rPr lang="es-ES" noProof="0" dirty="0"/>
+              <a:t>Navegación rápida con flechas y botón 'Hoy'</a:t>
             </a:r>
           </a:p>
           <a:p>
@@ -9532,42 +9860,9 @@
               </a:defRPr>
             </a:pPr>
             <a:r>
-              <a:rPr dirty="0" err="1"/>
-              <a:t>Eventos</a:t>
-            </a:r>
-            <a:r>
-              <a:rPr dirty="0"/>
-              <a:t> con </a:t>
-            </a:r>
-            <a:r>
-              <a:rPr dirty="0" err="1"/>
-              <a:t>bloques</a:t>
-            </a:r>
-            <a:r>
-              <a:rPr dirty="0"/>
-              <a:t> de color </a:t>
-            </a:r>
-            <a:r>
-              <a:rPr dirty="0" err="1"/>
-              <a:t>segun</a:t>
-            </a:r>
-            <a:r>
-              <a:rPr dirty="0"/>
-              <a:t> </a:t>
-            </a:r>
-            <a:r>
-              <a:rPr dirty="0" err="1"/>
-              <a:t>tipo</a:t>
-            </a:r>
-            <a:r>
-              <a:rPr dirty="0"/>
-              <a:t> de </a:t>
-            </a:r>
-            <a:r>
-              <a:rPr dirty="0" err="1"/>
-              <a:t>turno</a:t>
-            </a:r>
-            <a:endParaRPr dirty="0"/>
+              <a:rPr lang="es-ES" noProof="0" dirty="0"/>
+              <a:t>Eventos con bloques de color según tipo de turno</a:t>
+            </a:r>
           </a:p>
           <a:p>
             <a:pPr>
@@ -9582,26 +9877,14 @@
               </a:defRPr>
             </a:pPr>
             <a:r>
-              <a:rPr dirty="0" err="1"/>
-              <a:t>Soporte</a:t>
-            </a:r>
-            <a:r>
-              <a:rPr dirty="0"/>
-              <a:t> para </a:t>
-            </a:r>
-            <a:r>
-              <a:rPr dirty="0" err="1"/>
-              <a:t>eventos</a:t>
-            </a:r>
-            <a:r>
-              <a:rPr dirty="0"/>
-              <a:t> multi-</a:t>
-            </a:r>
-            <a:r>
-              <a:rPr dirty="0" err="1"/>
-              <a:t>dia</a:t>
-            </a:r>
-            <a:endParaRPr dirty="0"/>
+              <a:rPr lang="es-ES" noProof="0" dirty="0"/>
+              <a:t>Soporte para eventos </a:t>
+            </a:r>
+            <a:r>
+              <a:rPr lang="es-ES" noProof="0" dirty="0" err="1"/>
+              <a:t>multi-día</a:t>
+            </a:r>
+            <a:endParaRPr lang="es-ES" noProof="0" dirty="0"/>
           </a:p>
           <a:p>
             <a:pPr>
@@ -9616,62 +9899,53 @@
               </a:defRPr>
             </a:pPr>
             <a:r>
-              <a:rPr dirty="0"/>
-              <a:t>Un </a:t>
-            </a:r>
-            <a:r>
-              <a:rPr dirty="0" err="1"/>
-              <a:t>turno</a:t>
-            </a:r>
-            <a:r>
-              <a:rPr dirty="0"/>
-              <a:t> </a:t>
-            </a:r>
-            <a:r>
-              <a:rPr dirty="0" err="1"/>
-              <a:t>por</a:t>
-            </a:r>
-            <a:r>
-              <a:rPr dirty="0"/>
-              <a:t> </a:t>
-            </a:r>
-            <a:r>
-              <a:rPr dirty="0" err="1"/>
-              <a:t>dia</a:t>
-            </a:r>
-            <a:r>
-              <a:rPr dirty="0"/>
-              <a:t>: </a:t>
-            </a:r>
-            <a:r>
-              <a:rPr dirty="0" err="1"/>
-              <a:t>restriccion</a:t>
-            </a:r>
-            <a:r>
-              <a:rPr dirty="0"/>
-              <a:t> </a:t>
-            </a:r>
-            <a:r>
-              <a:rPr dirty="0" err="1"/>
-              <a:t>inteligente</a:t>
-            </a:r>
-            <a:r>
-              <a:rPr dirty="0"/>
-              <a:t> para </a:t>
-            </a:r>
-            <a:r>
-              <a:rPr dirty="0" err="1"/>
-              <a:t>evitar</a:t>
-            </a:r>
-            <a:r>
-              <a:rPr dirty="0"/>
-              <a:t> </a:t>
-            </a:r>
-            <a:r>
-              <a:rPr dirty="0" err="1"/>
-              <a:t>conflictos</a:t>
-            </a:r>
-            <a:endParaRPr dirty="0"/>
+              <a:rPr lang="es-ES" noProof="0" dirty="0"/>
+              <a:t>Un turno por día: restricción inteligente para evitar conflictos</a:t>
+            </a:r>
+          </a:p>
+          <a:p>
+            <a:pPr>
+              <a:spcAft>
+                <a:spcPts val="800"/>
+              </a:spcAft>
+              <a:defRPr sz="1600">
+                <a:solidFill>
+                  <a:srgbClr val="F9FAFB"/>
+                </a:solidFill>
+                <a:latin typeface="Calibri"/>
+              </a:defRPr>
+            </a:pPr>
+            <a:r>
+              <a:rPr lang="es-ES" sz="1500" noProof="0" dirty="0">
+                <a:solidFill>
+                  <a:srgbClr val="F9FAFB"/>
+                </a:solidFill>
+                <a:latin typeface="Calibri"/>
+              </a:rPr>
+              <a:t>Eventos de serie vinculados: editar/eliminar uno o toda la serie futura</a:t>
+            </a:r>
+          </a:p>
+          <a:p>
+            <a:pPr>
+              <a:spcAft>
+                <a:spcPts val="800"/>
+              </a:spcAft>
+              <a:defRPr sz="1600">
+                <a:solidFill>
+                  <a:srgbClr val="F9FAFB"/>
+                </a:solidFill>
+                <a:latin typeface="Calibri"/>
+              </a:defRPr>
+            </a:pPr>
+            <a:r>
+              <a:rPr lang="es-ES" sz="1500" noProof="0" dirty="0">
+                <a:solidFill>
+                  <a:srgbClr val="F9FAFB"/>
+                </a:solidFill>
+                <a:latin typeface="Calibri"/>
+              </a:rPr>
+              <a:t>Generación automática de eventos recurrentes desde recordatorios con repetición</a:t>
+            </a:r>
           </a:p>
         </p:txBody>
       </p:sp>
@@ -9778,7 +10052,7 @@
           <a:lstStyle/>
           <a:p>
             <a:pPr algn="ctr"/>
-            <a:endParaRPr/>
+            <a:endParaRPr lang="es-ES" noProof="0" dirty="0"/>
           </a:p>
         </p:txBody>
       </p:sp>
@@ -9813,10 +10087,9 @@
               </a:defRPr>
             </a:pPr>
             <a:r>
-              <a:rPr dirty="0" err="1"/>
+              <a:rPr lang="es-ES" noProof="0" dirty="0"/>
               <a:t>Turnos</a:t>
             </a:r>
-            <a:endParaRPr dirty="0"/>
           </a:p>
         </p:txBody>
       </p:sp>
@@ -9851,6 +10124,7 @@
               </a:defRPr>
             </a:pPr>
             <a:r>
+              <a:rPr lang="es-ES" noProof="0" dirty="0"/>
               <a:t>Turnos</a:t>
             </a:r>
           </a:p>
@@ -9865,7 +10139,7 @@
         <p:spPr>
           <a:xfrm>
             <a:off x="731520" y="1920240"/>
-            <a:ext cx="5029200" cy="4114800"/>
+            <a:ext cx="5029200" cy="1990288"/>
           </a:xfrm>
           <a:prstGeom prst="rect">
             <a:avLst/>
@@ -9890,6 +10164,7 @@
               </a:defRPr>
             </a:pPr>
             <a:r>
+              <a:rPr lang="es-ES" noProof="0" dirty="0"/>
               <a:t>Plantillas reutilizables con nombre, emoji y color</a:t>
             </a:r>
           </a:p>
@@ -9906,7 +10181,8 @@
               </a:defRPr>
             </a:pPr>
             <a:r>
-              <a:t>Calculo automatico de horas trabajadas</a:t>
+              <a:rPr lang="es-ES" noProof="0" dirty="0"/>
+              <a:t>Calculo automático de horas trabajadas</a:t>
             </a:r>
           </a:p>
           <a:p>
@@ -9922,6 +10198,7 @@
               </a:defRPr>
             </a:pPr>
             <a:r>
+              <a:rPr lang="es-ES" noProof="0" dirty="0"/>
               <a:t>Soporte para turnos de 24h y cruce de medianoche</a:t>
             </a:r>
           </a:p>
@@ -9938,6 +10215,7 @@
               </a:defRPr>
             </a:pPr>
             <a:r>
+              <a:rPr lang="es-ES" noProof="0" dirty="0"/>
               <a:t>Activar/desactivar sin eliminar</a:t>
             </a:r>
           </a:p>
@@ -9954,6 +10232,7 @@
               </a:defRPr>
             </a:pPr>
             <a:r>
+              <a:rPr lang="es-ES" noProof="0" dirty="0"/>
               <a:t>Paleta de 45 colores (9 familias x 5 tonos)</a:t>
             </a:r>
           </a:p>
@@ -9970,6 +10249,7 @@
               </a:defRPr>
             </a:pPr>
             <a:r>
+              <a:rPr lang="es-ES" noProof="0" dirty="0"/>
               <a:t>Selector de emojis integrado</a:t>
             </a:r>
           </a:p>
@@ -10090,7 +10370,7 @@
           <a:lstStyle/>
           <a:p>
             <a:pPr algn="ctr"/>
-            <a:endParaRPr/>
+            <a:endParaRPr lang="es-ES" noProof="0" dirty="0"/>
           </a:p>
         </p:txBody>
       </p:sp>
@@ -10131,10 +10411,9 @@
               </a:defRPr>
             </a:pPr>
             <a:r>
-              <a:rPr dirty="0" err="1"/>
+              <a:rPr lang="es-ES" noProof="0" dirty="0"/>
               <a:t>Recordatorios</a:t>
             </a:r>
-            <a:endParaRPr dirty="0"/>
           </a:p>
         </p:txBody>
       </p:sp>
@@ -10175,6 +10454,7 @@
               </a:defRPr>
             </a:pPr>
             <a:r>
+              <a:rPr lang="es-ES" noProof="0" dirty="0"/>
               <a:t>Recordatorios</a:t>
             </a:r>
           </a:p>
@@ -10195,7 +10475,7 @@
         <p:spPr>
           <a:xfrm>
             <a:off x="6400800" y="1920240"/>
-            <a:ext cx="5029200" cy="4114800"/>
+            <a:ext cx="5029200" cy="2887970"/>
           </a:xfrm>
           <a:prstGeom prst="rect">
             <a:avLst/>
@@ -10220,7 +10500,8 @@
               </a:defRPr>
             </a:pPr>
             <a:r>
-              <a:t>Templates para eventos recurrentes</a:t>
+              <a:rPr lang="es-ES" noProof="0" dirty="0"/>
+              <a:t>Plantillas para eventos recurrentes</a:t>
             </a:r>
           </a:p>
           <a:p>
@@ -10236,6 +10517,7 @@
               </a:defRPr>
             </a:pPr>
             <a:r>
+              <a:rPr lang="es-ES" noProof="0" dirty="0"/>
               <a:t>Personalizables con emoji y color</a:t>
             </a:r>
           </a:p>
@@ -10252,7 +10534,8 @@
               </a:defRPr>
             </a:pPr>
             <a:r>
-              <a:t>Ideal para: reuniones, medicacion, tareas</a:t>
+              <a:rPr lang="es-ES" noProof="0" dirty="0"/>
+              <a:t>Ideal para: reuniones, medicación, tareas</a:t>
             </a:r>
           </a:p>
           <a:p>
@@ -10268,7 +10551,8 @@
               </a:defRPr>
             </a:pPr>
             <a:r>
-              <a:t>Activar/desactivar segun necesidad</a:t>
+              <a:rPr lang="es-ES" noProof="0" dirty="0"/>
+              <a:t>Activar/desactivar según necesidad</a:t>
             </a:r>
           </a:p>
           <a:p>
@@ -10284,8 +10568,14 @@
               </a:defRPr>
             </a:pPr>
             <a:r>
-              <a:t>Sincronizacion multi-dispositivo</a:t>
-            </a:r>
+              <a:rPr lang="es-ES" noProof="0" dirty="0"/>
+              <a:t>Sincronización </a:t>
+            </a:r>
+            <a:r>
+              <a:rPr lang="es-ES" noProof="0" dirty="0" err="1"/>
+              <a:t>multi-dispositivo</a:t>
+            </a:r>
+            <a:endParaRPr lang="es-ES" noProof="0" dirty="0"/>
           </a:p>
           <a:p>
             <a:pPr>
@@ -10300,8 +10590,56 @@
               </a:defRPr>
             </a:pPr>
             <a:r>
-              <a:t>Vinculacion directa con eventos del calendario</a:t>
-            </a:r>
+              <a:rPr lang="es-ES" noProof="0" dirty="0"/>
+              <a:t>Vinculación directa con eventos del calendario</a:t>
+            </a:r>
+          </a:p>
+          <a:p>
+            <a:pPr>
+              <a:spcAft>
+                <a:spcPts val="800"/>
+              </a:spcAft>
+              <a:defRPr sz="1500">
+                <a:solidFill>
+                  <a:srgbClr val="F9FAFB"/>
+                </a:solidFill>
+                <a:latin typeface="Calibri"/>
+              </a:defRPr>
+            </a:pPr>
+            <a:r>
+              <a:rPr lang="es-ES" sz="1500" noProof="0" dirty="0">
+                <a:solidFill>
+                  <a:srgbClr val="F9FAFB"/>
+                </a:solidFill>
+                <a:latin typeface="Calibri"/>
+              </a:rPr>
+              <a:t>Series de repetición: semanal, mensual o anual</a:t>
+            </a:r>
+          </a:p>
+          <a:p>
+            <a:r>
+              <a:rPr lang="es-ES" sz="1500" noProof="0" dirty="0">
+                <a:solidFill>
+                  <a:srgbClr val="F9FAFB"/>
+                </a:solidFill>
+                <a:latin typeface="Calibri"/>
+              </a:rPr>
+              <a:t>Etiqueta de frecuencia visible en la tarjeta del recordatorio</a:t>
+            </a:r>
+          </a:p>
+          <a:p>
+            <a:pPr>
+              <a:spcAft>
+                <a:spcPts val="800"/>
+              </a:spcAft>
+              <a:defRPr sz="1500">
+                <a:solidFill>
+                  <a:srgbClr val="F9FAFB"/>
+                </a:solidFill>
+                <a:latin typeface="Calibri"/>
+              </a:defRPr>
+            </a:pPr>
+            <a:endParaRPr lang="es-ES" noProof="0" dirty="0"/>
           </a:p>
         </p:txBody>
       </p:sp>
@@ -10413,7 +10751,7 @@
           <a:lstStyle/>
           <a:p>
             <a:pPr algn="ctr"/>
-            <a:endParaRPr/>
+            <a:endParaRPr lang="es-ES" noProof="0" dirty="0"/>
           </a:p>
         </p:txBody>
       </p:sp>
@@ -10426,7 +10764,7 @@
         <p:spPr>
           <a:xfrm>
             <a:off x="731520" y="457200"/>
-            <a:ext cx="9144000" cy="731520"/>
+            <a:ext cx="9144000" cy="646331"/>
           </a:xfrm>
           <a:prstGeom prst="rect">
             <a:avLst/>
@@ -10448,7 +10786,8 @@
               </a:defRPr>
             </a:pPr>
             <a:r>
-              <a:t>Informes y Estadisticas</a:t>
+              <a:rPr lang="es-ES" noProof="0" dirty="0"/>
+              <a:t>Informes y Estadísticas</a:t>
             </a:r>
           </a:p>
         </p:txBody>
@@ -10462,7 +10801,7 @@
         <p:spPr>
           <a:xfrm>
             <a:off x="731520" y="1280160"/>
-            <a:ext cx="10058400" cy="731520"/>
+            <a:ext cx="10058400" cy="369332"/>
           </a:xfrm>
           <a:prstGeom prst="rect">
             <a:avLst/>
@@ -10484,7 +10823,8 @@
               </a:defRPr>
             </a:pPr>
             <a:r>
-              <a:t>Visualiza tu productividad con graficos claros y accionables</a:t>
+              <a:rPr lang="es-ES" noProof="0" dirty="0"/>
+              <a:t>Visualiza tu productividad con gráficos claros y accionables</a:t>
             </a:r>
           </a:p>
         </p:txBody>
@@ -10498,7 +10838,7 @@
         <p:spPr>
           <a:xfrm>
             <a:off x="731520" y="2103120"/>
-            <a:ext cx="5486400" cy="4114800"/>
+            <a:ext cx="5486400" cy="2431435"/>
           </a:xfrm>
           <a:prstGeom prst="rect">
             <a:avLst/>
@@ -10523,7 +10863,8 @@
               </a:defRPr>
             </a:pPr>
             <a:r>
-              <a:t>Horas trabajadas por dia, semana, mes o anio</a:t>
+              <a:rPr lang="es-ES" noProof="0" dirty="0"/>
+              <a:t>Horas trabajadas mes o año</a:t>
             </a:r>
           </a:p>
           <a:p>
@@ -10539,7 +10880,8 @@
               </a:defRPr>
             </a:pPr>
             <a:r>
-              <a:t>Graficos de barras para distribucion de horas</a:t>
+              <a:rPr lang="es-ES" noProof="0" dirty="0"/>
+              <a:t>Gráficos de barras para distribución de horas</a:t>
             </a:r>
           </a:p>
           <a:p>
@@ -10555,7 +10897,8 @@
               </a:defRPr>
             </a:pPr>
             <a:r>
-              <a:t>Graficos de dona para desglose por tipo de turno</a:t>
+              <a:rPr lang="es-ES" noProof="0" dirty="0"/>
+              <a:t>Gráficos de dona para desglose por tipo de turno</a:t>
             </a:r>
           </a:p>
           <a:p>
@@ -10571,7 +10914,8 @@
               </a:defRPr>
             </a:pPr>
             <a:r>
-              <a:t>Configuracion de objetivo anual de horas</a:t>
+              <a:rPr lang="es-ES" noProof="0" dirty="0"/>
+              <a:t>Configuración de objetivo anual de horas</a:t>
             </a:r>
           </a:p>
           <a:p>
@@ -10587,7 +10931,8 @@
               </a:defRPr>
             </a:pPr>
             <a:r>
-              <a:t>Actualizacion automatica al crear/modificar eventos</a:t>
+              <a:rPr lang="es-ES" noProof="0" dirty="0"/>
+              <a:t>Actualización automática al crear/modificar eventos</a:t>
             </a:r>
           </a:p>
           <a:p>
@@ -10603,6 +10948,7 @@
               </a:defRPr>
             </a:pPr>
             <a:r>
+              <a:rPr lang="es-ES" noProof="0" dirty="0"/>
               <a:t>Filtros por periodo temporal</a:t>
             </a:r>
           </a:p>
@@ -10619,6 +10965,7 @@
               </a:defRPr>
             </a:pPr>
             <a:r>
+              <a:rPr lang="es-ES" noProof="0" dirty="0"/>
               <a:t>Colores consistentes con la paleta de marca</a:t>
             </a:r>
           </a:p>
@@ -10739,7 +11086,7 @@
           <a:lstStyle/>
           <a:p>
             <a:pPr algn="ctr"/>
-            <a:endParaRPr/>
+            <a:endParaRPr lang="es-ES" noProof="0" dirty="0"/>
           </a:p>
         </p:txBody>
       </p:sp>
@@ -10780,10 +11127,10 @@
               </a:defRPr>
             </a:pPr>
             <a:r>
-              <a:rPr lang="es-ES" sz="3600" b="1" dirty="0"/>
+              <a:rPr lang="es-ES" sz="3600" b="1" noProof="0" dirty="0"/>
               <a:t>Modo Turno — Simplifica tu calendario</a:t>
             </a:r>
-            <a:endParaRPr dirty="0"/>
+            <a:endParaRPr lang="es-ES" noProof="0" dirty="0"/>
           </a:p>
         </p:txBody>
       </p:sp>
@@ -10824,10 +11171,10 @@
               </a:defRPr>
             </a:pPr>
             <a:r>
-              <a:rPr lang="es-ES" i="1" dirty="0"/>
+              <a:rPr lang="es-ES" i="1" noProof="0" dirty="0"/>
               <a:t>Un modo especializado para quienes gestionan turnos de trabajo</a:t>
             </a:r>
-            <a:endParaRPr dirty="0"/>
+            <a:endParaRPr lang="es-ES" noProof="0" dirty="0"/>
           </a:p>
         </p:txBody>
       </p:sp>
@@ -10860,7 +11207,7 @@
           <a:lstStyle/>
           <a:p>
             <a:r>
-              <a:rPr lang="es-ES" sz="1600" dirty="0">
+              <a:rPr lang="es-ES" sz="1600" noProof="0" dirty="0">
                 <a:solidFill>
                   <a:srgbClr val="F9FAFB"/>
                 </a:solidFill>
@@ -10870,7 +11217,7 @@
             </a:r>
           </a:p>
           <a:p>
-            <a:endParaRPr lang="es-ES" sz="1600" dirty="0">
+            <a:endParaRPr lang="es-ES" sz="1600" noProof="0" dirty="0">
               <a:solidFill>
                 <a:srgbClr val="F9FAFB"/>
               </a:solidFill>
@@ -10879,7 +11226,7 @@
           </a:p>
           <a:p>
             <a:r>
-              <a:rPr lang="es-ES" sz="1600" dirty="0">
+              <a:rPr lang="es-ES" sz="1600" noProof="0" dirty="0">
                 <a:solidFill>
                   <a:srgbClr val="F9FAFB"/>
                 </a:solidFill>
@@ -10889,7 +11236,7 @@
             </a:r>
           </a:p>
           <a:p>
-            <a:endParaRPr lang="es-ES" sz="1600" dirty="0">
+            <a:endParaRPr lang="es-ES" sz="1600" noProof="0" dirty="0">
               <a:solidFill>
                 <a:srgbClr val="F9FAFB"/>
               </a:solidFill>
@@ -10898,7 +11245,7 @@
           </a:p>
           <a:p>
             <a:r>
-              <a:rPr lang="es-ES" sz="1600" dirty="0">
+              <a:rPr lang="es-ES" sz="1600" noProof="0" dirty="0">
                 <a:solidFill>
                   <a:srgbClr val="F9FAFB"/>
                 </a:solidFill>
@@ -10908,7 +11255,7 @@
             </a:r>
           </a:p>
           <a:p>
-            <a:endParaRPr lang="es-ES" sz="1600" dirty="0">
+            <a:endParaRPr lang="es-ES" sz="1600" noProof="0" dirty="0">
               <a:solidFill>
                 <a:srgbClr val="F9FAFB"/>
               </a:solidFill>
@@ -10917,7 +11264,7 @@
           </a:p>
           <a:p>
             <a:r>
-              <a:rPr lang="es-ES" sz="1600" dirty="0">
+              <a:rPr lang="es-ES" sz="1600" noProof="0" dirty="0">
                 <a:solidFill>
                   <a:srgbClr val="F9FAFB"/>
                 </a:solidFill>
@@ -10927,7 +11274,7 @@
             </a:r>
           </a:p>
           <a:p>
-            <a:endParaRPr lang="es-ES" sz="1600" dirty="0">
+            <a:endParaRPr lang="es-ES" sz="1600" noProof="0" dirty="0">
               <a:solidFill>
                 <a:srgbClr val="F9FAFB"/>
               </a:solidFill>
@@ -10936,7 +11283,7 @@
           </a:p>
           <a:p>
             <a:r>
-              <a:rPr lang="es-ES" sz="1600" dirty="0">
+              <a:rPr lang="es-ES" sz="1600" noProof="0" dirty="0">
                 <a:solidFill>
                   <a:srgbClr val="F9FAFB"/>
                 </a:solidFill>
@@ -10946,7 +11293,7 @@
             </a:r>
           </a:p>
           <a:p>
-            <a:endParaRPr lang="es-ES" sz="1600" dirty="0">
+            <a:endParaRPr lang="es-ES" sz="1600" noProof="0" dirty="0">
               <a:solidFill>
                 <a:srgbClr val="F9FAFB"/>
               </a:solidFill>
@@ -10955,7 +11302,7 @@
           </a:p>
           <a:p>
             <a:r>
-              <a:rPr lang="es-ES" sz="1600" dirty="0">
+              <a:rPr lang="es-ES" sz="1600" noProof="0" dirty="0">
                 <a:solidFill>
                   <a:srgbClr val="F9FAFB"/>
                 </a:solidFill>
@@ -10964,7 +11311,7 @@
               <a:t>🌗 Actívalo cuando quieras — Un simple </a:t>
             </a:r>
             <a:r>
-              <a:rPr lang="es-ES" sz="1600" dirty="0" err="1">
+              <a:rPr lang="es-ES" sz="1600" noProof="0" dirty="0" err="1">
                 <a:solidFill>
                   <a:srgbClr val="F9FAFB"/>
                 </a:solidFill>
@@ -10973,7 +11320,7 @@
               <a:t>toggle</a:t>
             </a:r>
             <a:r>
-              <a:rPr lang="es-ES" sz="1600" dirty="0">
+              <a:rPr lang="es-ES" sz="1600" noProof="0" dirty="0">
                 <a:solidFill>
                   <a:srgbClr val="F9FAFB"/>
                 </a:solidFill>
@@ -10981,7 +11328,7 @@
               </a:rPr>
               <a:t> en Ajustes, efecto inmediato, sin reiniciar</a:t>
             </a:r>
-            <a:endParaRPr dirty="0"/>
+            <a:endParaRPr lang="es-ES" noProof="0" dirty="0"/>
           </a:p>
         </p:txBody>
       </p:sp>
